--- a/AI_Implementation_Strategy_SE_Workshop.pptx
+++ b/AI_Implementation_Strategy_SE_Workshop.pptx
@@ -29,6 +29,10 @@
     <p:sldId id="277" r:id="rId28"/>
     <p:sldId id="278" r:id="rId29"/>
     <p:sldId id="279" r:id="rId30"/>
+    <p:sldId id="280" r:id="rId31"/>
+    <p:sldId id="281" r:id="rId32"/>
+    <p:sldId id="282" r:id="rId33"/>
+    <p:sldId id="283" r:id="rId34"/>
   </p:sldIdLst>
   <p:sldSz cx="12191695" cy="6858000" type="screen4x3"/>
   <p:notesSz cx="6858000" cy="9144000"/>
@@ -3228,7 +3232,7 @@
                 </a:solidFill>
                 <a:latin typeface="Arial"/>
               </a:rPr>
-              <a:t>CAPGEMINI ENGINEERING  ·  SYSTEMS ENGINEERING</a:t>
+              <a:t>CAPGEMINI ENGINEERING  .  SYSTEMS ENGINEERING</a:t>
             </a:r>
           </a:p>
         </p:txBody>
@@ -3420,7 +3424,7 @@
                 </a:solidFill>
                 <a:latin typeface="Arial"/>
               </a:rPr>
-              <a:t>WORKSHOP  ·  2026</a:t>
+              <a:t>WORKSHOP  .  2026</a:t>
             </a:r>
           </a:p>
         </p:txBody>
@@ -3676,7 +3680,7 @@
                 </a:solidFill>
                 <a:latin typeface="Arial"/>
               </a:rPr>
-              <a:t>AI Implementation Strategy  ·  Systems Engineering</a:t>
+              <a:t>AI Implementation Strategy  .  Systems Engineering</a:t>
             </a:r>
           </a:p>
         </p:txBody>
@@ -4194,7 +4198,7 @@
                 </a:solidFill>
                 <a:latin typeface="Arial"/>
               </a:rPr>
-              <a:t>The trained model predicts the next token from your context. Cheap, constant — this is each prompt.</a:t>
+              <a:t>The trained model predicts the next token from your context. Cheap, constant -- this is each prompt.</a:t>
             </a:r>
           </a:p>
         </p:txBody>
@@ -4334,7 +4338,7 @@
                 </a:solidFill>
                 <a:latin typeface="Arial"/>
               </a:rPr>
-              <a:t>  —  </a:t>
+              <a:t>  --  </a:t>
             </a:r>
             <a:r>
               <a:rPr sz="1100" b="0" i="0">
@@ -4343,7 +4347,7 @@
                 </a:solidFill>
                 <a:latin typeface="Arial"/>
               </a:rPr>
-              <a:t>Billions of nodes and trillions of operations mean you cannot know exactly what went wrong. We refocus on outcomes — eval sets.</a:t>
+              <a:t>Billions of nodes and trillions of operations mean you cannot know exactly what went wrong. We refocus on outcomes -- eval sets.</a:t>
             </a:r>
           </a:p>
         </p:txBody>
@@ -4483,7 +4487,7 @@
                 </a:solidFill>
                 <a:latin typeface="Arial"/>
               </a:rPr>
-              <a:t>  —  </a:t>
+              <a:t>  --  </a:t>
             </a:r>
             <a:r>
               <a:rPr sz="1100" b="0" i="0">
@@ -4632,7 +4636,7 @@
                 </a:solidFill>
                 <a:latin typeface="Arial"/>
               </a:rPr>
-              <a:t>  —  </a:t>
+              <a:t>  --  </a:t>
             </a:r>
             <a:r>
               <a:rPr sz="1100" b="0" i="0">
@@ -4780,7 +4784,7 @@
                 </a:solidFill>
                 <a:latin typeface="Georgia"/>
               </a:rPr>
-              <a:t>“arrive”</a:t>
+              <a:t>arrive</a:t>
             </a:r>
           </a:p>
         </p:txBody>
@@ -4858,7 +4862,7 @@
                 </a:solidFill>
                 <a:latin typeface="Arial"/>
               </a:rPr>
-              <a:t>AI Implementation Strategy  ·  Systems Engineering</a:t>
+              <a:t>AI Implementation Strategy  .  Systems Engineering</a:t>
             </a:r>
           </a:p>
         </p:txBody>
@@ -5033,7 +5037,7 @@
                 </a:solidFill>
                 <a:latin typeface="Arial"/>
               </a:rPr>
-              <a:t>  —  </a:t>
+              <a:t>  --  </a:t>
             </a:r>
             <a:r>
               <a:rPr sz="1200" b="0" i="0">
@@ -5042,7 +5046,7 @@
                 </a:solidFill>
                 <a:latin typeface="Arial"/>
               </a:rPr>
-              <a:t>We don't tell clients they'll be “AI-ready” in five years.</a:t>
+              <a:t>We don't tell clients they'll be AI-ready in five years.</a:t>
             </a:r>
           </a:p>
         </p:txBody>
@@ -5182,7 +5186,7 @@
                 </a:solidFill>
                 <a:latin typeface="Arial"/>
               </a:rPr>
-              <a:t>  —  </a:t>
+              <a:t>  --  </a:t>
             </a:r>
             <a:r>
               <a:rPr sz="1200" b="0" i="0">
@@ -5191,7 +5195,7 @@
                 </a:solidFill>
                 <a:latin typeface="Arial"/>
               </a:rPr>
-              <a:t>You evaluate outputs, you generate synthetic data on what “good” looks like, and you log everything. That log becomes your mature data — and AI does the work.</a:t>
+              <a:t>You evaluate outputs, generate synthetic data on what good output looks like, and log everything. That log becomes your mature data -- and AI does the work.</a:t>
             </a:r>
           </a:p>
         </p:txBody>
@@ -5322,7 +5326,7 @@
                 </a:solidFill>
                 <a:latin typeface="Arial"/>
               </a:rPr>
-              <a:t>Garbage in, garbage out — still real</a:t>
+              <a:t>Garbage in, garbage out -- still real</a:t>
             </a:r>
             <a:r>
               <a:rPr sz="1250" b="1" i="0">
@@ -5331,7 +5335,7 @@
                 </a:solidFill>
                 <a:latin typeface="Arial"/>
               </a:rPr>
-              <a:t>  —  </a:t>
+              <a:t>  --  </a:t>
             </a:r>
             <a:r>
               <a:rPr sz="1200" b="0" i="0">
@@ -5596,7 +5600,7 @@
                 </a:solidFill>
                 <a:latin typeface="Arial"/>
               </a:rPr>
-              <a:t>AI Implementation Strategy  ·  Systems Engineering</a:t>
+              <a:t>AI Implementation Strategy  .  Systems Engineering</a:t>
             </a:r>
           </a:p>
         </p:txBody>
@@ -5771,7 +5775,7 @@
                 </a:solidFill>
                 <a:latin typeface="Arial"/>
               </a:rPr>
-              <a:t>  —  </a:t>
+              <a:t>  --  </a:t>
             </a:r>
             <a:r>
               <a:rPr sz="1200" b="0" i="0">
@@ -5920,7 +5924,7 @@
                 </a:solidFill>
                 <a:latin typeface="Arial"/>
               </a:rPr>
-              <a:t>  —  </a:t>
+              <a:t>  --  </a:t>
             </a:r>
             <a:r>
               <a:rPr sz="1200" b="0" i="0">
@@ -6069,7 +6073,7 @@
                 </a:solidFill>
                 <a:latin typeface="Arial"/>
               </a:rPr>
-              <a:t>  —  </a:t>
+              <a:t>  --  </a:t>
             </a:r>
             <a:r>
               <a:rPr sz="1200" b="0" i="0">
@@ -6174,7 +6178,7 @@
                 </a:solidFill>
                 <a:latin typeface="Arial"/>
               </a:rPr>
-              <a:t>FUNDAMENTALS  ·  BARRIERS</a:t>
+              <a:t>FUNDAMENTALS  .  BARRIERS</a:t>
             </a:r>
           </a:p>
         </p:txBody>
@@ -6256,7 +6260,7 @@
                 </a:solidFill>
                 <a:latin typeface="Arial"/>
               </a:rPr>
-              <a:t>Gen AI is probabilistic by foundation — yet robust products can be built if done properly.</a:t>
+              <a:t>Gen AI is probabilistic by foundation -- yet robust products can be built if done properly.</a:t>
             </a:r>
           </a:p>
         </p:txBody>
@@ -6334,7 +6338,7 @@
                 </a:solidFill>
                 <a:latin typeface="Arial"/>
               </a:rPr>
-              <a:t>AI Implementation Strategy  ·  Systems Engineering</a:t>
+              <a:t>AI Implementation Strategy  .  Systems Engineering</a:t>
             </a:r>
           </a:p>
         </p:txBody>
@@ -6520,7 +6524,7 @@
                 </a:solidFill>
                 <a:latin typeface="Arial"/>
               </a:rPr>
-              <a:t>It is not deterministic — design for that.</a:t>
+              <a:t>It is not deterministic -- design for that.</a:t>
             </a:r>
           </a:p>
         </p:txBody>
@@ -7371,7 +7375,7 @@
                 </a:solidFill>
                 <a:latin typeface="Arial"/>
               </a:rPr>
-              <a:t>FUNDAMENTALS  ·  BARRIERS</a:t>
+              <a:t>FUNDAMENTALS  .  BARRIERS</a:t>
             </a:r>
           </a:p>
         </p:txBody>
@@ -7492,7 +7496,7 @@
                 </a:solidFill>
                 <a:latin typeface="Arial"/>
               </a:rPr>
-              <a:t>AI Implementation Strategy  ·  Systems Engineering</a:t>
+              <a:t>AI Implementation Strategy  .  Systems Engineering</a:t>
             </a:r>
           </a:p>
         </p:txBody>
@@ -7855,7 +7859,7 @@
                 </a:solidFill>
                 <a:latin typeface="Arial"/>
               </a:rPr>
-              <a:t>How you combine it is where the creativity lives — and that is human work.</a:t>
+              <a:t>How you combine it is where the creativity lives -- and that is human work.</a:t>
             </a:r>
           </a:p>
         </p:txBody>
@@ -8285,7 +8289,7 @@
                 </a:solidFill>
                 <a:latin typeface="Arial"/>
               </a:rPr>
-              <a:t>Your existing instincts transfer directly — here is what to add.</a:t>
+              <a:t>Your existing instincts transfer directly -- here is what to add.</a:t>
             </a:r>
           </a:p>
         </p:txBody>
@@ -8363,7 +8367,7 @@
                 </a:solidFill>
                 <a:latin typeface="Arial"/>
               </a:rPr>
-              <a:t>AI Implementation Strategy  ·  Systems Engineering</a:t>
+              <a:t>AI Implementation Strategy  .  Systems Engineering</a:t>
             </a:r>
           </a:p>
         </p:txBody>
@@ -8543,7 +8547,7 @@
                 </a:solidFill>
                 <a:latin typeface="Arial"/>
               </a:rPr>
-              <a:t>✓  </a:t>
+              <a:t>checkmark  </a:t>
             </a:r>
             <a:r>
               <a:rPr sz="1200" b="0" i="0">
@@ -8552,7 +8556,7 @@
                 </a:solidFill>
                 <a:latin typeface="Arial"/>
               </a:rPr>
-              <a:t>Modular architecture — a black-box view of a system or component is fine</a:t>
+              <a:t>Modular architecture -- a black-box view of a system or component is fine</a:t>
             </a:r>
           </a:p>
           <a:p>
@@ -8571,7 +8575,7 @@
                 </a:solidFill>
                 <a:latin typeface="Arial"/>
               </a:rPr>
-              <a:t>✓  </a:t>
+              <a:t>checkmark  </a:t>
             </a:r>
             <a:r>
               <a:rPr sz="1200" b="0" i="0">
@@ -8599,7 +8603,7 @@
                 </a:solidFill>
                 <a:latin typeface="Arial"/>
               </a:rPr>
-              <a:t>✓  </a:t>
+              <a:t>checkmark  </a:t>
             </a:r>
             <a:r>
               <a:rPr sz="1200" b="0" i="0">
@@ -8753,7 +8757,7 @@
                 </a:solidFill>
                 <a:latin typeface="Arial"/>
               </a:rPr>
-              <a:t>→  </a:t>
+              <a:t>-&gt;  </a:t>
             </a:r>
             <a:r>
               <a:rPr sz="1080" b="0" i="0">
@@ -8762,7 +8766,7 @@
                 </a:solidFill>
                 <a:latin typeface="Arial"/>
               </a:rPr>
-              <a:t>Learn what modules and platforms exist — and how to discover them; the field moves daily and you can't keep up without leaning on AI</a:t>
+              <a:t>Learn what modules and platforms exist -- and how to discover them; the field moves daily and you can't keep up without leaning on AI</a:t>
             </a:r>
           </a:p>
           <a:p>
@@ -8781,7 +8785,7 @@
                 </a:solidFill>
                 <a:latin typeface="Arial"/>
               </a:rPr>
-              <a:t>→  </a:t>
+              <a:t>-&gt;  </a:t>
             </a:r>
             <a:r>
               <a:rPr sz="1080" b="0" i="0">
@@ -8790,7 +8794,7 @@
                 </a:solidFill>
                 <a:latin typeface="Arial"/>
               </a:rPr>
-              <a:t>Know which problems aren't worth solving, or are too expensive — and why</a:t>
+              <a:t>Know which problems aren't worth solving, or are too expensive -- and why</a:t>
             </a:r>
           </a:p>
           <a:p>
@@ -8809,7 +8813,7 @@
                 </a:solidFill>
                 <a:latin typeface="Arial"/>
               </a:rPr>
-              <a:t>→  </a:t>
+              <a:t>-&gt;  </a:t>
             </a:r>
             <a:r>
               <a:rPr sz="1080" b="0" i="0">
@@ -8818,7 +8822,7 @@
                 </a:solidFill>
                 <a:latin typeface="Arial"/>
               </a:rPr>
-              <a:t>Adopt wider scopes — ideation-to-product is a reality now</a:t>
+              <a:t>Adopt wider scopes -- ideation-to-product is a reality now</a:t>
             </a:r>
           </a:p>
           <a:p>
@@ -8837,7 +8841,7 @@
                 </a:solidFill>
                 <a:latin typeface="Arial"/>
               </a:rPr>
-              <a:t>→  </a:t>
+              <a:t>-&gt;  </a:t>
             </a:r>
             <a:r>
               <a:rPr sz="1080" b="0" i="0">
@@ -8846,7 +8850,7 @@
                 </a:solidFill>
                 <a:latin typeface="Arial"/>
               </a:rPr>
-              <a:t>Build for yourself and your team — most builders need a domain expert, and most domain experts need a builder. That barrier has never been lower</a:t>
+              <a:t>Build for yourself and your team -- most builders need a domain expert, and most domain experts need a builder. That barrier has never been lower</a:t>
             </a:r>
           </a:p>
           <a:p>
@@ -8865,7 +8869,7 @@
                 </a:solidFill>
                 <a:latin typeface="Arial"/>
               </a:rPr>
-              <a:t>→  </a:t>
+              <a:t>-&gt;  </a:t>
             </a:r>
             <a:r>
               <a:rPr sz="1080" b="0" i="0">
@@ -9052,7 +9056,7 @@
                 </a:solidFill>
                 <a:latin typeface="Arial"/>
               </a:rPr>
-              <a:t>A great deal of value comes from integration — and you lose it on a subpar platform.</a:t>
+              <a:t>A great deal of value comes from integration -- and you lose it on a subpar platform.</a:t>
             </a:r>
           </a:p>
         </p:txBody>
@@ -9130,7 +9134,7 @@
                 </a:solidFill>
                 <a:latin typeface="Arial"/>
               </a:rPr>
-              <a:t>AI Implementation Strategy  ·  Systems Engineering</a:t>
+              <a:t>AI Implementation Strategy  .  Systems Engineering</a:t>
             </a:r>
           </a:p>
         </p:txBody>
@@ -9305,7 +9309,7 @@
                 </a:solidFill>
                 <a:latin typeface="Arial"/>
               </a:rPr>
-              <a:t>  —  </a:t>
+              <a:t>  --  </a:t>
             </a:r>
             <a:r>
               <a:rPr sz="1080" b="0" i="0">
@@ -9454,7 +9458,7 @@
                 </a:solidFill>
                 <a:latin typeface="Arial"/>
               </a:rPr>
-              <a:t>  —  </a:t>
+              <a:t>  --  </a:t>
             </a:r>
             <a:r>
               <a:rPr sz="1080" b="0" i="0">
@@ -9603,7 +9607,7 @@
                 </a:solidFill>
                 <a:latin typeface="Arial"/>
               </a:rPr>
-              <a:t>  —  </a:t>
+              <a:t>  --  </a:t>
             </a:r>
             <a:r>
               <a:rPr sz="1080" b="0" i="0">
@@ -9743,7 +9747,7 @@
                 </a:solidFill>
                 <a:latin typeface="Arial"/>
               </a:rPr>
-              <a:t>Fully-autonomous computer-use agents — the maximal end</a:t>
+              <a:t>Fully-autonomous computer-use agents -- the maximal end</a:t>
             </a:r>
             <a:r>
               <a:rPr sz="1150" b="1" i="0">
@@ -9752,7 +9756,7 @@
                 </a:solidFill>
                 <a:latin typeface="Arial"/>
               </a:rPr>
-              <a:t>  —  </a:t>
+              <a:t>  --  </a:t>
             </a:r>
             <a:r>
               <a:rPr sz="1080" b="0" i="0">
@@ -9761,7 +9765,7 @@
                 </a:solidFill>
                 <a:latin typeface="Arial"/>
               </a:rPr>
-              <a:t>Open frameworks that drive your entire desktop/browser with minimal guardrails: maximal power, maximal setup and oversight burden — “too much for us” today. [confirm tool name]</a:t>
+              <a:t>Open-source computer-use frameworks that drive your entire desktop and browser with minimal guardrails: maximal power, maximal setup and oversight burden -- beyond what most teams need today.</a:t>
             </a:r>
           </a:p>
         </p:txBody>
@@ -9901,7 +9905,7 @@
                 </a:solidFill>
                 <a:latin typeface="Arial"/>
               </a:rPr>
-              <a:t>  —  </a:t>
+              <a:t>  --  </a:t>
             </a:r>
             <a:r>
               <a:rPr sz="1080" b="0" i="0">
@@ -10006,7 +10010,7 @@
                 </a:solidFill>
                 <a:latin typeface="Arial"/>
               </a:rPr>
-              <a:t>BUILDING PRODUCTS  ·  INTERFACES</a:t>
+              <a:t>BUILDING PRODUCTS  .  INTERFACES</a:t>
             </a:r>
           </a:p>
         </p:txBody>
@@ -10049,7 +10053,7 @@
                 </a:solidFill>
                 <a:latin typeface="Georgia"/>
               </a:rPr>
-              <a:t>Chat · Cowork · Code</a:t>
+              <a:t>Chat . Cowork . Code</a:t>
             </a:r>
           </a:p>
         </p:txBody>
@@ -10088,7 +10092,7 @@
                 </a:solidFill>
                 <a:latin typeface="Arial"/>
               </a:rPr>
-              <a:t>What can actually interface with your work — the dimension I care about most.</a:t>
+              <a:t>What can actually interface with your work -- the dimension I care about most.</a:t>
             </a:r>
           </a:p>
         </p:txBody>
@@ -10166,7 +10170,7 @@
                 </a:solidFill>
                 <a:latin typeface="Arial"/>
               </a:rPr>
-              <a:t>AI Implementation Strategy  ·  Systems Engineering</a:t>
+              <a:t>AI Implementation Strategy  .  Systems Engineering</a:t>
             </a:r>
           </a:p>
         </p:txBody>
@@ -10445,7 +10449,7 @@
                           </a:solidFill>
                           <a:latin typeface="Arial"/>
                         </a:rPr>
-                        <a:t>None — output only</a:t>
+                        <a:t>None -- output only</a:t>
                       </a:r>
                     </a:p>
                   </a:txBody>
@@ -10489,7 +10493,7 @@
                           </a:solidFill>
                           <a:latin typeface="Arial"/>
                         </a:rPr>
-                        <a:t>Full — files, apps, shell, systems</a:t>
+                        <a:t>Full -- files, apps, shell, systems</a:t>
                       </a:r>
                     </a:p>
                   </a:txBody>
@@ -10759,7 +10763,7 @@
                           </a:solidFill>
                           <a:latin typeface="Arial"/>
                         </a:rPr>
-                        <a:t>Native — no copy-paste</a:t>
+                        <a:t>Native -- no copy-paste</a:t>
                       </a:r>
                     </a:p>
                   </a:txBody>
@@ -10873,7 +10877,7 @@
                           </a:solidFill>
                           <a:latin typeface="Arial"/>
                         </a:rPr>
-                        <a:t>Web · GitHub · Drive · MCP</a:t>
+                        <a:t>Web / GitHub / Drive / MCP</a:t>
                       </a:r>
                     </a:p>
                   </a:txBody>
@@ -11029,7 +11033,7 @@
                           </a:solidFill>
                           <a:latin typeface="Arial"/>
                         </a:rPr>
-                        <a:t>Plan → approve before any change</a:t>
+                        <a:t>Plan -&gt; approve before any change</a:t>
                       </a:r>
                     </a:p>
                   </a:txBody>
@@ -11385,7 +11389,7 @@
                 </a:solidFill>
                 <a:latin typeface="Arial"/>
               </a:rPr>
-              <a:t>AI Implementation Strategy  ·  Systems Engineering</a:t>
+              <a:t>AI Implementation Strategy  .  Systems Engineering</a:t>
             </a:r>
           </a:p>
         </p:txBody>
@@ -11605,49 +11609,7 @@
       </p:sp>
       <p:sp>
         <p:nvSpPr>
-          <p:cNvPr id="12" name="Rectangle 11"/>
-          <p:cNvSpPr/>
-          <p:nvPr/>
-        </p:nvSpPr>
-        <p:spPr>
-          <a:xfrm>
-            <a:off x="2514600" y="3108960"/>
-            <a:ext cx="256032" cy="182880"/>
-          </a:xfrm>
-          <a:prstGeom prst="rect">
-            <a:avLst/>
-          </a:prstGeom>
-          <a:noFill/>
-          <a:ln>
-            <a:noFill/>
-          </a:ln>
-          <a:effectLst/>
-        </p:spPr>
-        <p:style>
-          <a:lnRef idx="1">
-            <a:schemeClr val="accent1"/>
-          </a:lnRef>
-          <a:fillRef idx="3">
-            <a:schemeClr val="accent1"/>
-          </a:fillRef>
-          <a:effectRef idx="2">
-            <a:schemeClr val="accent1"/>
-          </a:effectRef>
-          <a:fontRef idx="minor">
-            <a:schemeClr val="lt1"/>
-          </a:fontRef>
-        </p:style>
-        <p:txBody>
-          <a:bodyPr rtlCol="0" anchor="ctr"/>
-          <a:lstStyle/>
-          <a:p>
-            <a:pPr algn="ctr"/>
-          </a:p>
-        </p:txBody>
-      </p:sp>
-      <p:sp>
-        <p:nvSpPr>
-          <p:cNvPr id="13" name="TextBox 12"/>
+          <p:cNvPr id="12" name="TextBox 11"/>
           <p:cNvSpPr txBox="1"/>
           <p:nvPr/>
         </p:nvSpPr>
@@ -11675,14 +11637,14 @@
                 </a:solidFill>
                 <a:latin typeface="Arial"/>
               </a:rPr>
-              <a:t>→</a:t>
-            </a:r>
-          </a:p>
-        </p:txBody>
-      </p:sp>
-      <p:sp>
-        <p:nvSpPr>
-          <p:cNvPr id="14" name="Rounded Rectangle 13"/>
+              <a:t>-&gt;</a:t>
+            </a:r>
+          </a:p>
+        </p:txBody>
+      </p:sp>
+      <p:sp>
+        <p:nvSpPr>
+          <p:cNvPr id="13" name="Rounded Rectangle 12"/>
           <p:cNvSpPr/>
           <p:nvPr/>
         </p:nvSpPr>
@@ -11730,7 +11692,7 @@
       </p:sp>
       <p:sp>
         <p:nvSpPr>
-          <p:cNvPr id="15" name="Rectangle 14"/>
+          <p:cNvPr id="14" name="Rectangle 13"/>
           <p:cNvSpPr/>
           <p:nvPr/>
         </p:nvSpPr>
@@ -11774,7 +11736,7 @@
       </p:sp>
       <p:sp>
         <p:nvSpPr>
-          <p:cNvPr id="16" name="TextBox 15"/>
+          <p:cNvPr id="15" name="TextBox 14"/>
           <p:cNvSpPr txBox="1"/>
           <p:nvPr/>
         </p:nvSpPr>
@@ -11859,49 +11821,7 @@
       </p:sp>
       <p:sp>
         <p:nvSpPr>
-          <p:cNvPr id="17" name="Rectangle 16"/>
-          <p:cNvSpPr/>
-          <p:nvPr/>
-        </p:nvSpPr>
-        <p:spPr>
-          <a:xfrm>
-            <a:off x="4800600" y="3108960"/>
-            <a:ext cx="256032" cy="182880"/>
-          </a:xfrm>
-          <a:prstGeom prst="rect">
-            <a:avLst/>
-          </a:prstGeom>
-          <a:noFill/>
-          <a:ln>
-            <a:noFill/>
-          </a:ln>
-          <a:effectLst/>
-        </p:spPr>
-        <p:style>
-          <a:lnRef idx="1">
-            <a:schemeClr val="accent1"/>
-          </a:lnRef>
-          <a:fillRef idx="3">
-            <a:schemeClr val="accent1"/>
-          </a:fillRef>
-          <a:effectRef idx="2">
-            <a:schemeClr val="accent1"/>
-          </a:effectRef>
-          <a:fontRef idx="minor">
-            <a:schemeClr val="lt1"/>
-          </a:fontRef>
-        </p:style>
-        <p:txBody>
-          <a:bodyPr rtlCol="0" anchor="ctr"/>
-          <a:lstStyle/>
-          <a:p>
-            <a:pPr algn="ctr"/>
-          </a:p>
-        </p:txBody>
-      </p:sp>
-      <p:sp>
-        <p:nvSpPr>
-          <p:cNvPr id="18" name="TextBox 17"/>
+          <p:cNvPr id="16" name="TextBox 15"/>
           <p:cNvSpPr txBox="1"/>
           <p:nvPr/>
         </p:nvSpPr>
@@ -11929,14 +11849,14 @@
                 </a:solidFill>
                 <a:latin typeface="Arial"/>
               </a:rPr>
-              <a:t>→</a:t>
-            </a:r>
-          </a:p>
-        </p:txBody>
-      </p:sp>
-      <p:sp>
-        <p:nvSpPr>
-          <p:cNvPr id="19" name="Rounded Rectangle 18"/>
+              <a:t>-&gt;</a:t>
+            </a:r>
+          </a:p>
+        </p:txBody>
+      </p:sp>
+      <p:sp>
+        <p:nvSpPr>
+          <p:cNvPr id="17" name="Rounded Rectangle 16"/>
           <p:cNvSpPr/>
           <p:nvPr/>
         </p:nvSpPr>
@@ -11984,7 +11904,7 @@
       </p:sp>
       <p:sp>
         <p:nvSpPr>
-          <p:cNvPr id="20" name="Rectangle 19"/>
+          <p:cNvPr id="18" name="Rectangle 17"/>
           <p:cNvSpPr/>
           <p:nvPr/>
         </p:nvSpPr>
@@ -12028,7 +11948,7 @@
       </p:sp>
       <p:sp>
         <p:nvSpPr>
-          <p:cNvPr id="21" name="TextBox 20"/>
+          <p:cNvPr id="19" name="TextBox 18"/>
           <p:cNvSpPr txBox="1"/>
           <p:nvPr/>
         </p:nvSpPr>
@@ -12113,49 +12033,7 @@
       </p:sp>
       <p:sp>
         <p:nvSpPr>
-          <p:cNvPr id="22" name="Rectangle 21"/>
-          <p:cNvSpPr/>
-          <p:nvPr/>
-        </p:nvSpPr>
-        <p:spPr>
-          <a:xfrm>
-            <a:off x="7086600" y="3108960"/>
-            <a:ext cx="256032" cy="182880"/>
-          </a:xfrm>
-          <a:prstGeom prst="rect">
-            <a:avLst/>
-          </a:prstGeom>
-          <a:noFill/>
-          <a:ln>
-            <a:noFill/>
-          </a:ln>
-          <a:effectLst/>
-        </p:spPr>
-        <p:style>
-          <a:lnRef idx="1">
-            <a:schemeClr val="accent1"/>
-          </a:lnRef>
-          <a:fillRef idx="3">
-            <a:schemeClr val="accent1"/>
-          </a:fillRef>
-          <a:effectRef idx="2">
-            <a:schemeClr val="accent1"/>
-          </a:effectRef>
-          <a:fontRef idx="minor">
-            <a:schemeClr val="lt1"/>
-          </a:fontRef>
-        </p:style>
-        <p:txBody>
-          <a:bodyPr rtlCol="0" anchor="ctr"/>
-          <a:lstStyle/>
-          <a:p>
-            <a:pPr algn="ctr"/>
-          </a:p>
-        </p:txBody>
-      </p:sp>
-      <p:sp>
-        <p:nvSpPr>
-          <p:cNvPr id="23" name="TextBox 22"/>
+          <p:cNvPr id="20" name="TextBox 19"/>
           <p:cNvSpPr txBox="1"/>
           <p:nvPr/>
         </p:nvSpPr>
@@ -12183,14 +12061,14 @@
                 </a:solidFill>
                 <a:latin typeface="Arial"/>
               </a:rPr>
-              <a:t>→</a:t>
-            </a:r>
-          </a:p>
-        </p:txBody>
-      </p:sp>
-      <p:sp>
-        <p:nvSpPr>
-          <p:cNvPr id="24" name="Rounded Rectangle 23"/>
+              <a:t>-&gt;</a:t>
+            </a:r>
+          </a:p>
+        </p:txBody>
+      </p:sp>
+      <p:sp>
+        <p:nvSpPr>
+          <p:cNvPr id="21" name="Rounded Rectangle 20"/>
           <p:cNvSpPr/>
           <p:nvPr/>
         </p:nvSpPr>
@@ -12238,7 +12116,7 @@
       </p:sp>
       <p:sp>
         <p:nvSpPr>
-          <p:cNvPr id="25" name="Rectangle 24"/>
+          <p:cNvPr id="22" name="Rectangle 21"/>
           <p:cNvSpPr/>
           <p:nvPr/>
         </p:nvSpPr>
@@ -12282,7 +12160,7 @@
       </p:sp>
       <p:sp>
         <p:nvSpPr>
-          <p:cNvPr id="26" name="TextBox 25"/>
+          <p:cNvPr id="23" name="TextBox 22"/>
           <p:cNvSpPr txBox="1"/>
           <p:nvPr/>
         </p:nvSpPr>
@@ -12367,49 +12245,7 @@
       </p:sp>
       <p:sp>
         <p:nvSpPr>
-          <p:cNvPr id="27" name="Rectangle 26"/>
-          <p:cNvSpPr/>
-          <p:nvPr/>
-        </p:nvSpPr>
-        <p:spPr>
-          <a:xfrm>
-            <a:off x="9372600" y="3108960"/>
-            <a:ext cx="256032" cy="182880"/>
-          </a:xfrm>
-          <a:prstGeom prst="rect">
-            <a:avLst/>
-          </a:prstGeom>
-          <a:noFill/>
-          <a:ln>
-            <a:noFill/>
-          </a:ln>
-          <a:effectLst/>
-        </p:spPr>
-        <p:style>
-          <a:lnRef idx="1">
-            <a:schemeClr val="accent1"/>
-          </a:lnRef>
-          <a:fillRef idx="3">
-            <a:schemeClr val="accent1"/>
-          </a:fillRef>
-          <a:effectRef idx="2">
-            <a:schemeClr val="accent1"/>
-          </a:effectRef>
-          <a:fontRef idx="minor">
-            <a:schemeClr val="lt1"/>
-          </a:fontRef>
-        </p:style>
-        <p:txBody>
-          <a:bodyPr rtlCol="0" anchor="ctr"/>
-          <a:lstStyle/>
-          <a:p>
-            <a:pPr algn="ctr"/>
-          </a:p>
-        </p:txBody>
-      </p:sp>
-      <p:sp>
-        <p:nvSpPr>
-          <p:cNvPr id="28" name="TextBox 27"/>
+          <p:cNvPr id="24" name="TextBox 23"/>
           <p:cNvSpPr txBox="1"/>
           <p:nvPr/>
         </p:nvSpPr>
@@ -12437,14 +12273,14 @@
                 </a:solidFill>
                 <a:latin typeface="Arial"/>
               </a:rPr>
-              <a:t>→</a:t>
-            </a:r>
-          </a:p>
-        </p:txBody>
-      </p:sp>
-      <p:sp>
-        <p:nvSpPr>
-          <p:cNvPr id="29" name="Rounded Rectangle 28"/>
+              <a:t>-&gt;</a:t>
+            </a:r>
+          </a:p>
+        </p:txBody>
+      </p:sp>
+      <p:sp>
+        <p:nvSpPr>
+          <p:cNvPr id="25" name="Rounded Rectangle 24"/>
           <p:cNvSpPr/>
           <p:nvPr/>
         </p:nvSpPr>
@@ -12492,7 +12328,7 @@
       </p:sp>
       <p:sp>
         <p:nvSpPr>
-          <p:cNvPr id="30" name="Rectangle 29"/>
+          <p:cNvPr id="26" name="Rectangle 25"/>
           <p:cNvSpPr/>
           <p:nvPr/>
         </p:nvSpPr>
@@ -12536,7 +12372,7 @@
       </p:sp>
       <p:sp>
         <p:nvSpPr>
-          <p:cNvPr id="31" name="TextBox 30"/>
+          <p:cNvPr id="27" name="TextBox 26"/>
           <p:cNvSpPr txBox="1"/>
           <p:nvPr/>
         </p:nvSpPr>
@@ -12621,7 +12457,7 @@
       </p:sp>
       <p:sp>
         <p:nvSpPr>
-          <p:cNvPr id="32" name="Rectangle 31"/>
+          <p:cNvPr id="28" name="Rectangle 27"/>
           <p:cNvSpPr/>
           <p:nvPr/>
         </p:nvSpPr>
@@ -12665,7 +12501,7 @@
       </p:sp>
       <p:sp>
         <p:nvSpPr>
-          <p:cNvPr id="33" name="Rectangle 32"/>
+          <p:cNvPr id="29" name="Rectangle 28"/>
           <p:cNvSpPr/>
           <p:nvPr/>
         </p:nvSpPr>
@@ -12709,7 +12545,7 @@
       </p:sp>
       <p:sp>
         <p:nvSpPr>
-          <p:cNvPr id="34" name="Rectangle 33"/>
+          <p:cNvPr id="30" name="Rectangle 29"/>
           <p:cNvSpPr/>
           <p:nvPr/>
         </p:nvSpPr>
@@ -12753,7 +12589,7 @@
       </p:sp>
       <p:sp>
         <p:nvSpPr>
-          <p:cNvPr id="35" name="TextBox 34"/>
+          <p:cNvPr id="31" name="TextBox 30"/>
           <p:cNvSpPr txBox="1"/>
           <p:nvPr/>
         </p:nvSpPr>
@@ -12781,14 +12617,14 @@
                 </a:solidFill>
                 <a:latin typeface="Arial"/>
               </a:rPr>
-              <a:t>fail  →  back to Write</a:t>
-            </a:r>
-          </a:p>
-        </p:txBody>
-      </p:sp>
-      <p:sp>
-        <p:nvSpPr>
-          <p:cNvPr id="36" name="Rounded Rectangle 35"/>
+              <a:t>fail  -&gt;  back to Write</a:t>
+            </a:r>
+          </a:p>
+        </p:txBody>
+      </p:sp>
+      <p:sp>
+        <p:nvSpPr>
+          <p:cNvPr id="32" name="Rounded Rectangle 31"/>
           <p:cNvSpPr/>
           <p:nvPr/>
         </p:nvSpPr>
@@ -12836,7 +12672,7 @@
       </p:sp>
       <p:sp>
         <p:nvSpPr>
-          <p:cNvPr id="37" name="Rectangle 36"/>
+          <p:cNvPr id="33" name="Rectangle 32"/>
           <p:cNvSpPr/>
           <p:nvPr/>
         </p:nvSpPr>
@@ -12880,7 +12716,7 @@
       </p:sp>
       <p:sp>
         <p:nvSpPr>
-          <p:cNvPr id="38" name="TextBox 37"/>
+          <p:cNvPr id="34" name="TextBox 33"/>
           <p:cNvSpPr txBox="1"/>
           <p:nvPr/>
         </p:nvSpPr>
@@ -12921,7 +12757,7 @@
                 </a:solidFill>
                 <a:latin typeface="Arial"/>
               </a:rPr>
-              <a:t>It defines what “done” means — without it there is no principled stopping condition.</a:t>
+              <a:t>It defines what done means -- without it there is no principled stopping condition.</a:t>
             </a:r>
           </a:p>
         </p:txBody>
@@ -13017,7 +12853,7 @@
                 </a:solidFill>
                 <a:latin typeface="Arial"/>
               </a:rPr>
-              <a:t>FINDINGS  ·  BOTTOM LINE UP FRONT</a:t>
+              <a:t>FINDINGS  .  BOTTOM LINE UP FRONT</a:t>
             </a:r>
           </a:p>
         </p:txBody>
@@ -13099,7 +12935,7 @@
                 </a:solidFill>
                 <a:latin typeface="Arial"/>
               </a:rPr>
-              <a:t>The conclusions first — the rest of this deck is the argument and the evidence behind them.</a:t>
+              <a:t>The conclusions first -- the rest of this deck is the argument and the evidence behind them.</a:t>
             </a:r>
           </a:p>
         </p:txBody>
@@ -13177,7 +13013,7 @@
                 </a:solidFill>
                 <a:latin typeface="Arial"/>
               </a:rPr>
-              <a:t>AI Implementation Strategy  ·  Systems Engineering</a:t>
+              <a:t>AI Implementation Strategy  .  Systems Engineering</a:t>
             </a:r>
           </a:p>
         </p:txBody>
@@ -13352,7 +13188,7 @@
                 </a:solidFill>
                 <a:latin typeface="Arial"/>
               </a:rPr>
-              <a:t>  —  </a:t>
+              <a:t>  --  </a:t>
             </a:r>
             <a:r>
               <a:rPr sz="1200" b="0" i="0">
@@ -13361,7 +13197,7 @@
                 </a:solidFill>
                 <a:latin typeface="Arial"/>
               </a:rPr>
-              <a:t>It is an environment for building AI products — and those products may or may not contain AI themselves. Using chat is just the start.</a:t>
+              <a:t>It is an environment for building AI products -- and those products may or may not contain AI themselves. Using chat is just the start.</a:t>
             </a:r>
           </a:p>
         </p:txBody>
@@ -13501,7 +13337,7 @@
                 </a:solidFill>
                 <a:latin typeface="Arial"/>
               </a:rPr>
-              <a:t>  —  </a:t>
+              <a:t>  --  </a:t>
             </a:r>
             <a:r>
               <a:rPr sz="1200" b="0" i="0">
@@ -13650,7 +13486,7 @@
                 </a:solidFill>
                 <a:latin typeface="Arial"/>
               </a:rPr>
-              <a:t>  —  </a:t>
+              <a:t>  --  </a:t>
             </a:r>
             <a:r>
               <a:rPr sz="1200" b="0" i="0">
@@ -13799,7 +13635,7 @@
                 </a:solidFill>
                 <a:latin typeface="Arial"/>
               </a:rPr>
-              <a:t>  —  </a:t>
+              <a:t>  --  </a:t>
             </a:r>
             <a:r>
               <a:rPr sz="1200" b="0" i="0">
@@ -13808,7 +13644,7 @@
                 </a:solidFill>
                 <a:latin typeface="Arial"/>
               </a:rPr>
-              <a:t>AI economics are reshaping the model — not erasing it.</a:t>
+              <a:t>AI economics are reshaping the model -- not erasing it.</a:t>
             </a:r>
           </a:p>
         </p:txBody>
@@ -13948,7 +13784,7 @@
                 </a:solidFill>
                 <a:latin typeface="Arial"/>
               </a:rPr>
-              <a:t>  —  </a:t>
+              <a:t>  --  </a:t>
             </a:r>
             <a:r>
               <a:rPr sz="1200" b="0" i="0">
@@ -14135,7 +13971,7 @@
                 </a:solidFill>
                 <a:latin typeface="Arial"/>
               </a:rPr>
-              <a:t>What this looks like in practice — built hands-on during the research project.</a:t>
+              <a:t>What this looks like in practice -- built hands-on during the research project.</a:t>
             </a:r>
           </a:p>
         </p:txBody>
@@ -14213,7 +14049,7 @@
                 </a:solidFill>
                 <a:latin typeface="Arial"/>
               </a:rPr>
-              <a:t>AI Implementation Strategy  ·  Systems Engineering</a:t>
+              <a:t>AI Implementation Strategy  .  Systems Engineering</a:t>
             </a:r>
           </a:p>
         </p:txBody>
@@ -14570,7 +14406,7 @@
                 </a:solidFill>
                 <a:latin typeface="Arial"/>
               </a:rPr>
-              <a:t>Across text, speech and video — converting between formats and modalities.</a:t>
+              <a:t>Across text, speech and video -- converting between formats and modalities.</a:t>
             </a:r>
           </a:p>
         </p:txBody>
@@ -14731,7 +14567,7 @@
                 </a:solidFill>
                 <a:latin typeface="Arial"/>
               </a:rPr>
-              <a:t>Working retrieval on a local LLM — answers with sources, zero compute cost, zero data egress.</a:t>
+              <a:t>Working retrieval on a local LLM -- answers with sources, zero compute cost, zero data egress.</a:t>
             </a:r>
           </a:p>
         </p:txBody>
@@ -15152,7 +14988,7 @@
                 </a:solidFill>
                 <a:latin typeface="Arial"/>
               </a:rPr>
-              <a:t>Each was built by one person with domain expertise — not a development team.</a:t>
+              <a:t>Each was built by one person with domain expertise -- not a development team.</a:t>
             </a:r>
           </a:p>
         </p:txBody>
@@ -15369,7 +15205,7 @@
                 </a:solidFill>
                 <a:latin typeface="Arial"/>
               </a:rPr>
-              <a:t>Gemini · NotebookLM · Notion · Claude in Excel &amp; PowerPoint</a:t>
+              <a:t>Gemini  .  NotebookLM  .  Notion  .  Claude in Excel &amp; PowerPoint</a:t>
             </a:r>
           </a:p>
         </p:txBody>
@@ -15500,7 +15336,7 @@
                 </a:solidFill>
                 <a:latin typeface="Arial"/>
               </a:rPr>
-              <a:t>MORE ON TOOLS</a:t>
+              <a:t>MORE ON TOOLS  .  TRACK 1 - AUGMENT</a:t>
             </a:r>
           </a:p>
         </p:txBody>
@@ -15582,7 +15418,7 @@
                 </a:solidFill>
                 <a:latin typeface="Arial"/>
               </a:rPr>
-              <a:t>Financial — or any — models in Excel, at best-in-class quality. Query and challenge the assumptions directly in the sheet.</a:t>
+              <a:t>The primary value is judgment, not speed -- catching logic errors on a 200-row risk register the day before a CDR is the use case that matters.</a:t>
             </a:r>
           </a:p>
         </p:txBody>
@@ -15660,7 +15496,7 @@
                 </a:solidFill>
                 <a:latin typeface="Arial"/>
               </a:rPr>
-              <a:t>AI Implementation Strategy  ·  Systems Engineering</a:t>
+              <a:t>AI Implementation Strategy  .  Systems Engineering</a:t>
             </a:r>
           </a:p>
         </p:txBody>
@@ -15708,8 +15544,8 @@
         </p:nvSpPr>
         <p:spPr>
           <a:xfrm>
-            <a:off x="502920" y="2331720"/>
-            <a:ext cx="11155680" cy="768096"/>
+            <a:off x="502920" y="2176272"/>
+            <a:ext cx="11155680" cy="676656"/>
           </a:xfrm>
           <a:prstGeom prst="roundRect">
             <a:avLst>
@@ -15756,8 +15592,8 @@
         </p:nvSpPr>
         <p:spPr>
           <a:xfrm>
-            <a:off x="502920" y="2331720"/>
-            <a:ext cx="64008" cy="768096"/>
+            <a:off x="502920" y="2176272"/>
+            <a:ext cx="64008" cy="676656"/>
           </a:xfrm>
           <a:prstGeom prst="rect">
             <a:avLst/>
@@ -15800,8 +15636,8 @@
         </p:nvSpPr>
         <p:spPr>
           <a:xfrm>
-            <a:off x="758952" y="2331720"/>
-            <a:ext cx="10698480" cy="768096"/>
+            <a:off x="758952" y="2176272"/>
+            <a:ext cx="10698480" cy="676656"/>
           </a:xfrm>
           <a:prstGeom prst="rect">
             <a:avLst/>
@@ -15820,31 +15656,31 @@
               </a:lnSpc>
             </a:pPr>
             <a:r>
-              <a:rPr sz="1200" b="1" i="0">
+              <a:rPr sz="1150" b="1" i="0">
                 <a:solidFill>
                   <a:srgbClr val="1A1C22"/>
                 </a:solidFill>
                 <a:latin typeface="Arial"/>
               </a:rPr>
-              <a:t>Generate standardized models</a:t>
-            </a:r>
-            <a:r>
-              <a:rPr sz="1200" b="1" i="0">
+              <a:t>Setup -- Desktop App or Claude Code</a:t>
+            </a:r>
+            <a:r>
+              <a:rPr sz="1150" b="1" i="0">
                 <a:solidFill>
                   <a:srgbClr val="1A5E38"/>
                 </a:solidFill>
                 <a:latin typeface="Arial"/>
               </a:rPr>
-              <a:t>  —  </a:t>
-            </a:r>
-            <a:r>
-              <a:rPr sz="1100" b="0" i="0">
+              <a:t>  --  </a:t>
+            </a:r>
+            <a:r>
+              <a:rPr sz="1080" b="0" i="0">
                 <a:solidFill>
                   <a:srgbClr val="52586A"/>
                 </a:solidFill>
                 <a:latin typeface="Arial"/>
               </a:rPr>
-              <a:t>Requirements matrices, risk registers, WBS, budget trackers — described in plain English, built in minutes.</a:t>
+              <a:t>Install Claude Desktop App (Mac/Windows) and it integrates with your open .xlsx file directly. Claude Code reads and writes any spreadsheet from the terminal. Both are live -- no copy-paste.</a:t>
             </a:r>
           </a:p>
         </p:txBody>
@@ -15857,8 +15693,8 @@
         </p:nvSpPr>
         <p:spPr>
           <a:xfrm>
-            <a:off x="502920" y="3218688"/>
-            <a:ext cx="11155680" cy="768096"/>
+            <a:off x="502920" y="2935224"/>
+            <a:ext cx="11155680" cy="676656"/>
           </a:xfrm>
           <a:prstGeom prst="roundRect">
             <a:avLst>
@@ -15905,8 +15741,8 @@
         </p:nvSpPr>
         <p:spPr>
           <a:xfrm>
-            <a:off x="502920" y="3218688"/>
-            <a:ext cx="64008" cy="768096"/>
+            <a:off x="502920" y="2935224"/>
+            <a:ext cx="64008" cy="676656"/>
           </a:xfrm>
           <a:prstGeom prst="rect">
             <a:avLst/>
@@ -15949,8 +15785,8 @@
         </p:nvSpPr>
         <p:spPr>
           <a:xfrm>
-            <a:off x="758952" y="3218688"/>
-            <a:ext cx="10698480" cy="768096"/>
+            <a:off x="758952" y="2935224"/>
+            <a:ext cx="10698480" cy="676656"/>
           </a:xfrm>
           <a:prstGeom prst="rect">
             <a:avLst/>
@@ -15969,31 +15805,31 @@
               </a:lnSpc>
             </a:pPr>
             <a:r>
-              <a:rPr sz="1200" b="1" i="0">
+              <a:rPr sz="1150" b="1" i="0">
                 <a:solidFill>
                   <a:srgbClr val="1A1C22"/>
                 </a:solidFill>
                 <a:latin typeface="Arial"/>
               </a:rPr>
-              <a:t>Live logical &amp; quality checks</a:t>
-            </a:r>
-            <a:r>
-              <a:rPr sz="1200" b="1" i="0">
+              <a:t>Generate -- describe the model, Claude builds it</a:t>
+            </a:r>
+            <a:r>
+              <a:rPr sz="1150" b="1" i="0">
                 <a:solidFill>
                   <a:srgbClr val="1A5E38"/>
                 </a:solidFill>
                 <a:latin typeface="Arial"/>
               </a:rPr>
-              <a:t>  —  </a:t>
-            </a:r>
-            <a:r>
-              <a:rPr sz="1100" b="0" i="0">
+              <a:t>  --  </a:t>
+            </a:r>
+            <a:r>
+              <a:rPr sz="1080" b="0" i="0">
                 <a:solidFill>
                   <a:srgbClr val="52586A"/>
                 </a:solidFill>
                 <a:latin typeface="Arial"/>
               </a:rPr>
-              <a:t>Claude reads every row and flags inconsistencies — risk scores that don't match, mitigations closed with high residual risk, broken totals.</a:t>
+              <a:t>Plain English: Create a Requirements Traceability Matrix, columns ID, Description, Source, Verification Method, Status. Colour code by status. Half-day task, five minutes.</a:t>
             </a:r>
           </a:p>
         </p:txBody>
@@ -16006,8 +15842,8 @@
         </p:nvSpPr>
         <p:spPr>
           <a:xfrm>
-            <a:off x="502920" y="4105656"/>
-            <a:ext cx="11155680" cy="768096"/>
+            <a:off x="502920" y="3694176"/>
+            <a:ext cx="11155680" cy="676656"/>
           </a:xfrm>
           <a:prstGeom prst="roundRect">
             <a:avLst>
@@ -16054,8 +15890,8 @@
         </p:nvSpPr>
         <p:spPr>
           <a:xfrm>
-            <a:off x="502920" y="4105656"/>
-            <a:ext cx="64008" cy="768096"/>
+            <a:off x="502920" y="3694176"/>
+            <a:ext cx="64008" cy="676656"/>
           </a:xfrm>
           <a:prstGeom prst="rect">
             <a:avLst/>
@@ -16098,8 +15934,8 @@
         </p:nvSpPr>
         <p:spPr>
           <a:xfrm>
-            <a:off x="758952" y="4105656"/>
-            <a:ext cx="10698480" cy="768096"/>
+            <a:off x="758952" y="3694176"/>
+            <a:ext cx="10698480" cy="676656"/>
           </a:xfrm>
           <a:prstGeom prst="rect">
             <a:avLst/>
@@ -16118,31 +15954,31 @@
               </a:lnSpc>
             </a:pPr>
             <a:r>
-              <a:rPr sz="1200" b="1" i="0">
+              <a:rPr sz="1150" b="1" i="0">
                 <a:solidFill>
                   <a:srgbClr val="1A1C22"/>
                 </a:solidFill>
                 <a:latin typeface="Arial"/>
               </a:rPr>
-              <a:t>Query and challenge assumptions</a:t>
-            </a:r>
-            <a:r>
-              <a:rPr sz="1200" b="1" i="0">
+              <a:t>Validate -- logical consistency on existing data</a:t>
+            </a:r>
+            <a:r>
+              <a:rPr sz="1150" b="1" i="0">
                 <a:solidFill>
                   <a:srgbClr val="1A5E38"/>
                 </a:solidFill>
                 <a:latin typeface="Arial"/>
               </a:rPr>
-              <a:t>  —  </a:t>
-            </a:r>
-            <a:r>
-              <a:rPr sz="1100" b="0" i="0">
+              <a:t>  --  </a:t>
+            </a:r>
+            <a:r>
+              <a:rPr sz="1080" b="0" i="0">
                 <a:solidFill>
                   <a:srgbClr val="52586A"/>
                 </a:solidFill>
                 <a:latin typeface="Arial"/>
               </a:rPr>
-              <a:t>Interrogate the model in place: “which assumptions drive this result, and where are they weakest?”</a:t>
+              <a:t>Check this risk register: flag rows where score does not equal Likelihood times Impact, and any mitigation marked complete with residual risk still rated High. Exact row references returned.</a:t>
             </a:r>
           </a:p>
         </p:txBody>
@@ -16155,8 +15991,8 @@
         </p:nvSpPr>
         <p:spPr>
           <a:xfrm>
-            <a:off x="502920" y="4992624"/>
-            <a:ext cx="11155680" cy="768096"/>
+            <a:off x="502920" y="4453128"/>
+            <a:ext cx="11155680" cy="676656"/>
           </a:xfrm>
           <a:prstGeom prst="roundRect">
             <a:avLst>
@@ -16203,8 +16039,8 @@
         </p:nvSpPr>
         <p:spPr>
           <a:xfrm>
-            <a:off x="502920" y="4992624"/>
-            <a:ext cx="64008" cy="768096"/>
+            <a:off x="502920" y="4453128"/>
+            <a:ext cx="64008" cy="676656"/>
           </a:xfrm>
           <a:prstGeom prst="rect">
             <a:avLst/>
@@ -16247,8 +16083,8 @@
         </p:nvSpPr>
         <p:spPr>
           <a:xfrm>
-            <a:off x="758952" y="4992624"/>
-            <a:ext cx="10698480" cy="768096"/>
+            <a:off x="758952" y="4453128"/>
+            <a:ext cx="10698480" cy="676656"/>
           </a:xfrm>
           <a:prstGeom prst="rect">
             <a:avLst/>
@@ -16267,31 +16103,180 @@
               </a:lnSpc>
             </a:pPr>
             <a:r>
-              <a:rPr sz="1200" b="1" i="0">
+              <a:rPr sz="1150" b="1" i="0">
                 <a:solidFill>
                   <a:srgbClr val="1A1C22"/>
                 </a:solidFill>
                 <a:latin typeface="Arial"/>
               </a:rPr>
-              <a:t>Reformat without data loss</a:t>
-            </a:r>
-            <a:r>
-              <a:rPr sz="1200" b="1" i="0">
+              <a:t>Quality -- structured quality report across the workbook</a:t>
+            </a:r>
+            <a:r>
+              <a:rPr sz="1150" b="1" i="0">
                 <a:solidFill>
                   <a:srgbClr val="1A5E38"/>
                 </a:solidFill>
                 <a:latin typeface="Arial"/>
               </a:rPr>
-              <a:t>  —  </a:t>
-            </a:r>
-            <a:r>
-              <a:rPr sz="1100" b="0" i="0">
+              <a:t>  --  </a:t>
+            </a:r>
+            <a:r>
+              <a:rPr sz="1080" b="0" i="0">
                 <a:solidFill>
                   <a:srgbClr val="52586A"/>
                 </a:solidFill>
                 <a:latin typeface="Arial"/>
               </a:rPr>
-              <a:t>Restructure to a new standard or client template, with a backup of the original — no copy-paste between files.</a:t>
+              <a:t>Missing values, duplicate cost IDs, sub-item totals that don't roll up, forecast dates already passed. The prompt is the quality criterion -- no hard-coded rules.</a:t>
+            </a:r>
+          </a:p>
+        </p:txBody>
+      </p:sp>
+      <p:sp>
+        <p:nvSpPr>
+          <p:cNvPr id="21" name="Rounded Rectangle 20"/>
+          <p:cNvSpPr/>
+          <p:nvPr/>
+        </p:nvSpPr>
+        <p:spPr>
+          <a:xfrm>
+            <a:off x="502920" y="5212080"/>
+            <a:ext cx="11155680" cy="676656"/>
+          </a:xfrm>
+          <a:prstGeom prst="roundRect">
+            <a:avLst>
+              <a:gd name="adj" fmla="val 8000"/>
+            </a:avLst>
+          </a:prstGeom>
+          <a:solidFill>
+            <a:srgbClr val="FFFFFF"/>
+          </a:solidFill>
+          <a:ln w="12700">
+            <a:solidFill>
+              <a:srgbClr val="E0E4EC"/>
+            </a:solidFill>
+          </a:ln>
+          <a:effectLst/>
+        </p:spPr>
+        <p:style>
+          <a:lnRef idx="1">
+            <a:schemeClr val="accent1"/>
+          </a:lnRef>
+          <a:fillRef idx="3">
+            <a:schemeClr val="accent1"/>
+          </a:fillRef>
+          <a:effectRef idx="2">
+            <a:schemeClr val="accent1"/>
+          </a:effectRef>
+          <a:fontRef idx="minor">
+            <a:schemeClr val="lt1"/>
+          </a:fontRef>
+        </p:style>
+        <p:txBody>
+          <a:bodyPr rtlCol="0" anchor="ctr"/>
+          <a:lstStyle/>
+          <a:p>
+            <a:pPr algn="ctr"/>
+          </a:p>
+        </p:txBody>
+      </p:sp>
+      <p:sp>
+        <p:nvSpPr>
+          <p:cNvPr id="22" name="Rectangle 21"/>
+          <p:cNvSpPr/>
+          <p:nvPr/>
+        </p:nvSpPr>
+        <p:spPr>
+          <a:xfrm>
+            <a:off x="502920" y="5212080"/>
+            <a:ext cx="64008" cy="676656"/>
+          </a:xfrm>
+          <a:prstGeom prst="rect">
+            <a:avLst/>
+          </a:prstGeom>
+          <a:solidFill>
+            <a:srgbClr val="1A5E38"/>
+          </a:solidFill>
+          <a:ln>
+            <a:noFill/>
+          </a:ln>
+          <a:effectLst/>
+        </p:spPr>
+        <p:style>
+          <a:lnRef idx="1">
+            <a:schemeClr val="accent1"/>
+          </a:lnRef>
+          <a:fillRef idx="3">
+            <a:schemeClr val="accent1"/>
+          </a:fillRef>
+          <a:effectRef idx="2">
+            <a:schemeClr val="accent1"/>
+          </a:effectRef>
+          <a:fontRef idx="minor">
+            <a:schemeClr val="lt1"/>
+          </a:fontRef>
+        </p:style>
+        <p:txBody>
+          <a:bodyPr rtlCol="0" anchor="ctr"/>
+          <a:lstStyle/>
+          <a:p>
+            <a:pPr algn="ctr"/>
+          </a:p>
+        </p:txBody>
+      </p:sp>
+      <p:sp>
+        <p:nvSpPr>
+          <p:cNvPr id="23" name="TextBox 22"/>
+          <p:cNvSpPr txBox="1"/>
+          <p:nvPr/>
+        </p:nvSpPr>
+        <p:spPr>
+          <a:xfrm>
+            <a:off x="758952" y="5212080"/>
+            <a:ext cx="10698480" cy="676656"/>
+          </a:xfrm>
+          <a:prstGeom prst="rect">
+            <a:avLst/>
+          </a:prstGeom>
+          <a:noFill/>
+        </p:spPr>
+        <p:txBody>
+          <a:bodyPr wrap="square" anchor="ctr" lIns="0" rIns="0" tIns="0" bIns="0">
+            <a:spAutoFit/>
+          </a:bodyPr>
+          <a:lstStyle/>
+          <a:p>
+            <a:pPr>
+              <a:lnSpc>
+                <a:spcPct val="118000"/>
+              </a:lnSpc>
+            </a:pPr>
+            <a:r>
+              <a:rPr sz="1150" b="1" i="0">
+                <a:solidFill>
+                  <a:srgbClr val="1A1C22"/>
+                </a:solidFill>
+                <a:latin typeface="Arial"/>
+              </a:rPr>
+              <a:t>Revise -- reformat to a new standard without data loss</a:t>
+            </a:r>
+            <a:r>
+              <a:rPr sz="1150" b="1" i="0">
+                <a:solidFill>
+                  <a:srgbClr val="1A5E38"/>
+                </a:solidFill>
+                <a:latin typeface="Arial"/>
+              </a:rPr>
+              <a:t>  --  </a:t>
+            </a:r>
+            <a:r>
+              <a:rPr sz="1080" b="0" i="0">
+                <a:solidFill>
+                  <a:srgbClr val="52586A"/>
+                </a:solidFill>
+                <a:latin typeface="Arial"/>
+              </a:rPr>
+              <a:t>Apply the AS9100 template. Add missing columns, rename existing ones, keep all data. Create a backup tab first. No manual reformatting, no cut-and-paste risk.</a:t>
             </a:r>
           </a:p>
         </p:txBody>
@@ -16329,7 +16314,7 @@
             <a:avLst/>
           </a:prstGeom>
           <a:solidFill>
-            <a:srgbClr val="090D18"/>
+            <a:srgbClr val="F7F8FA"/>
           </a:solidFill>
           <a:ln>
             <a:noFill/>
@@ -16360,14 +16345,291 @@
       </p:sp>
       <p:sp>
         <p:nvSpPr>
-          <p:cNvPr id="3" name="Rectangle 2"/>
+          <p:cNvPr id="3" name="TextBox 2"/>
+          <p:cNvSpPr txBox="1"/>
+          <p:nvPr/>
+        </p:nvSpPr>
+        <p:spPr>
+          <a:xfrm>
+            <a:off x="502920" y="457200"/>
+            <a:ext cx="10058400" cy="274320"/>
+          </a:xfrm>
+          <a:prstGeom prst="rect">
+            <a:avLst/>
+          </a:prstGeom>
+          <a:noFill/>
+        </p:spPr>
+        <p:txBody>
+          <a:bodyPr wrap="square" anchor="t" lIns="0" rIns="0" tIns="0" bIns="0">
+            <a:spAutoFit/>
+          </a:bodyPr>
+          <a:lstStyle/>
+          <a:p>
+            <a:r>
+              <a:rPr sz="1050" b="1" i="0" spc="220">
+                <a:solidFill>
+                  <a:srgbClr val="0070C0"/>
+                </a:solidFill>
+                <a:latin typeface="Arial"/>
+              </a:rPr>
+              <a:t>MORE ON TOOLS  .  TRACK 1 - AUGMENT</a:t>
+            </a:r>
+          </a:p>
+        </p:txBody>
+      </p:sp>
+      <p:sp>
+        <p:nvSpPr>
+          <p:cNvPr id="4" name="TextBox 3"/>
+          <p:cNvSpPr txBox="1"/>
+          <p:nvPr/>
+        </p:nvSpPr>
+        <p:spPr>
+          <a:xfrm>
+            <a:off x="502920" y="749808"/>
+            <a:ext cx="10515600" cy="1097280"/>
+          </a:xfrm>
+          <a:prstGeom prst="rect">
+            <a:avLst/>
+          </a:prstGeom>
+          <a:noFill/>
+        </p:spPr>
+        <p:txBody>
+          <a:bodyPr wrap="square" anchor="t" lIns="0" rIns="0" tIns="0" bIns="0">
+            <a:spAutoFit/>
+          </a:bodyPr>
+          <a:lstStyle/>
+          <a:p>
+            <a:r>
+              <a:rPr sz="3300" b="0" i="0">
+                <a:solidFill>
+                  <a:srgbClr val="1A1C22"/>
+                </a:solidFill>
+                <a:latin typeface="Georgia"/>
+              </a:rPr>
+              <a:t>Claude in </a:t>
+            </a:r>
+            <a:r>
+              <a:rPr sz="3300" b="0" i="0">
+                <a:solidFill>
+                  <a:srgbClr val="0070C0"/>
+                </a:solidFill>
+                <a:latin typeface="Georgia"/>
+              </a:rPr>
+              <a:t>PowerPoint</a:t>
+            </a:r>
+          </a:p>
+        </p:txBody>
+      </p:sp>
+      <p:sp>
+        <p:nvSpPr>
+          <p:cNvPr id="5" name="TextBox 4"/>
+          <p:cNvSpPr txBox="1"/>
+          <p:nvPr/>
+        </p:nvSpPr>
+        <p:spPr>
+          <a:xfrm>
+            <a:off x="521207" y="1572768"/>
+            <a:ext cx="9601200" cy="640080"/>
+          </a:xfrm>
+          <a:prstGeom prst="rect">
+            <a:avLst/>
+          </a:prstGeom>
+          <a:noFill/>
+        </p:spPr>
+        <p:txBody>
+          <a:bodyPr wrap="square" anchor="t" lIns="0" rIns="0" tIns="0" bIns="0">
+            <a:spAutoFit/>
+          </a:bodyPr>
+          <a:lstStyle/>
+          <a:p>
+            <a:pPr>
+              <a:lnSpc>
+                <a:spcPct val="130000"/>
+              </a:lnSpc>
+            </a:pPr>
+            <a:r>
+              <a:rPr sz="1300" b="0" i="0">
+                <a:solidFill>
+                  <a:srgbClr val="52586A"/>
+                </a:solidFill>
+                <a:latin typeface="Arial"/>
+              </a:rPr>
+              <a:t>Narrative intelligence, not template filling. A CDR deck tells a different story than an executive briefing -- from the same technical content, Claude rewrites for each audience automatically.</a:t>
+            </a:r>
+          </a:p>
+        </p:txBody>
+      </p:sp>
+      <p:sp>
+        <p:nvSpPr>
+          <p:cNvPr id="6" name="Rectangle 5"/>
           <p:cNvSpPr/>
           <p:nvPr/>
         </p:nvSpPr>
         <p:spPr>
           <a:xfrm>
-            <a:off x="502920" y="2331720"/>
-            <a:ext cx="457200" cy="54864"/>
+            <a:off x="502920" y="6455664"/>
+            <a:ext cx="11183112" cy="9525"/>
+          </a:xfrm>
+          <a:prstGeom prst="rect">
+            <a:avLst/>
+          </a:prstGeom>
+          <a:solidFill>
+            <a:srgbClr val="E0E4EC"/>
+          </a:solidFill>
+          <a:ln>
+            <a:noFill/>
+          </a:ln>
+          <a:effectLst/>
+        </p:spPr>
+        <p:style>
+          <a:lnRef idx="1">
+            <a:schemeClr val="accent1"/>
+          </a:lnRef>
+          <a:fillRef idx="3">
+            <a:schemeClr val="accent1"/>
+          </a:fillRef>
+          <a:effectRef idx="2">
+            <a:schemeClr val="accent1"/>
+          </a:effectRef>
+          <a:fontRef idx="minor">
+            <a:schemeClr val="lt1"/>
+          </a:fontRef>
+        </p:style>
+        <p:txBody>
+          <a:bodyPr rtlCol="0" anchor="ctr"/>
+          <a:lstStyle/>
+          <a:p>
+            <a:pPr algn="ctr"/>
+          </a:p>
+        </p:txBody>
+      </p:sp>
+      <p:sp>
+        <p:nvSpPr>
+          <p:cNvPr id="7" name="TextBox 6"/>
+          <p:cNvSpPr txBox="1"/>
+          <p:nvPr/>
+        </p:nvSpPr>
+        <p:spPr>
+          <a:xfrm>
+            <a:off x="502920" y="6510528"/>
+            <a:ext cx="8229600" cy="274320"/>
+          </a:xfrm>
+          <a:prstGeom prst="rect">
+            <a:avLst/>
+          </a:prstGeom>
+          <a:noFill/>
+        </p:spPr>
+        <p:txBody>
+          <a:bodyPr wrap="square" anchor="t" lIns="0" rIns="0" tIns="0" bIns="0">
+            <a:spAutoFit/>
+          </a:bodyPr>
+          <a:lstStyle/>
+          <a:p>
+            <a:r>
+              <a:rPr sz="850" b="0" i="0" spc="80">
+                <a:solidFill>
+                  <a:srgbClr val="8A93A8"/>
+                </a:solidFill>
+                <a:latin typeface="Arial"/>
+              </a:rPr>
+              <a:t>AI Implementation Strategy  .  Systems Engineering</a:t>
+            </a:r>
+          </a:p>
+        </p:txBody>
+      </p:sp>
+      <p:sp>
+        <p:nvSpPr>
+          <p:cNvPr id="8" name="TextBox 7"/>
+          <p:cNvSpPr txBox="1"/>
+          <p:nvPr/>
+        </p:nvSpPr>
+        <p:spPr>
+          <a:xfrm>
+            <a:off x="10789920" y="6510528"/>
+            <a:ext cx="896112" cy="274320"/>
+          </a:xfrm>
+          <a:prstGeom prst="rect">
+            <a:avLst/>
+          </a:prstGeom>
+          <a:noFill/>
+        </p:spPr>
+        <p:txBody>
+          <a:bodyPr wrap="square" anchor="t" lIns="0" rIns="0" tIns="0" bIns="0">
+            <a:spAutoFit/>
+          </a:bodyPr>
+          <a:lstStyle/>
+          <a:p>
+            <a:pPr algn="r"/>
+            <a:r>
+              <a:rPr sz="850" b="0" i="0" spc="80">
+                <a:solidFill>
+                  <a:srgbClr val="8A93A8"/>
+                </a:solidFill>
+                <a:latin typeface="Arial"/>
+              </a:rPr>
+              <a:t>23</a:t>
+            </a:r>
+          </a:p>
+        </p:txBody>
+      </p:sp>
+      <p:sp>
+        <p:nvSpPr>
+          <p:cNvPr id="9" name="Rounded Rectangle 8"/>
+          <p:cNvSpPr/>
+          <p:nvPr/>
+        </p:nvSpPr>
+        <p:spPr>
+          <a:xfrm>
+            <a:off x="502920" y="2176272"/>
+            <a:ext cx="11155680" cy="676656"/>
+          </a:xfrm>
+          <a:prstGeom prst="roundRect">
+            <a:avLst>
+              <a:gd name="adj" fmla="val 8000"/>
+            </a:avLst>
+          </a:prstGeom>
+          <a:solidFill>
+            <a:srgbClr val="FFFFFF"/>
+          </a:solidFill>
+          <a:ln w="12700">
+            <a:solidFill>
+              <a:srgbClr val="E0E4EC"/>
+            </a:solidFill>
+          </a:ln>
+          <a:effectLst/>
+        </p:spPr>
+        <p:style>
+          <a:lnRef idx="1">
+            <a:schemeClr val="accent1"/>
+          </a:lnRef>
+          <a:fillRef idx="3">
+            <a:schemeClr val="accent1"/>
+          </a:fillRef>
+          <a:effectRef idx="2">
+            <a:schemeClr val="accent1"/>
+          </a:effectRef>
+          <a:fontRef idx="minor">
+            <a:schemeClr val="lt1"/>
+          </a:fontRef>
+        </p:style>
+        <p:txBody>
+          <a:bodyPr rtlCol="0" anchor="ctr"/>
+          <a:lstStyle/>
+          <a:p>
+            <a:pPr algn="ctr"/>
+          </a:p>
+        </p:txBody>
+      </p:sp>
+      <p:sp>
+        <p:nvSpPr>
+          <p:cNvPr id="10" name="Rectangle 9"/>
+          <p:cNvSpPr/>
+          <p:nvPr/>
+        </p:nvSpPr>
+        <p:spPr>
+          <a:xfrm>
+            <a:off x="502920" y="2176272"/>
+            <a:ext cx="64008" cy="676656"/>
           </a:xfrm>
           <a:prstGeom prst="rect">
             <a:avLst/>
@@ -16404,14 +16666,14 @@
       </p:sp>
       <p:sp>
         <p:nvSpPr>
-          <p:cNvPr id="4" name="TextBox 3"/>
+          <p:cNvPr id="11" name="TextBox 10"/>
           <p:cNvSpPr txBox="1"/>
           <p:nvPr/>
         </p:nvSpPr>
         <p:spPr>
           <a:xfrm>
-            <a:off x="502920" y="1874519"/>
-            <a:ext cx="10058400" cy="274320"/>
+            <a:off x="758952" y="2176272"/>
+            <a:ext cx="10698480" cy="676656"/>
           </a:xfrm>
           <a:prstGeom prst="rect">
             <a:avLst/>
@@ -16419,33 +16681,148 @@
           <a:noFill/>
         </p:spPr>
         <p:txBody>
-          <a:bodyPr wrap="square" anchor="t" lIns="0" rIns="0" tIns="0" bIns="0">
+          <a:bodyPr wrap="square" anchor="ctr" lIns="0" rIns="0" tIns="0" bIns="0">
             <a:spAutoFit/>
           </a:bodyPr>
           <a:lstStyle/>
           <a:p>
-            <a:r>
-              <a:rPr sz="1050" b="1" i="0" spc="220">
+            <a:pPr>
+              <a:lnSpc>
+                <a:spcPct val="118000"/>
+              </a:lnSpc>
+            </a:pPr>
+            <a:r>
+              <a:rPr sz="1150" b="1" i="0">
+                <a:solidFill>
+                  <a:srgbClr val="1A1C22"/>
+                </a:solidFill>
+                <a:latin typeface="Arial"/>
+              </a:rPr>
+              <a:t>Setup -- Desktop App or Claude Code</a:t>
+            </a:r>
+            <a:r>
+              <a:rPr sz="1150" b="1" i="0">
                 <a:solidFill>
                   <a:srgbClr val="0070C0"/>
                 </a:solidFill>
                 <a:latin typeface="Arial"/>
               </a:rPr>
-              <a:t>SECTION 05</a:t>
-            </a:r>
-          </a:p>
-        </p:txBody>
-      </p:sp>
-      <p:sp>
-        <p:nvSpPr>
-          <p:cNvPr id="5" name="TextBox 4"/>
+              <a:t>  --  </a:t>
+            </a:r>
+            <a:r>
+              <a:rPr sz="1080" b="0" i="0">
+                <a:solidFill>
+                  <a:srgbClr val="52586A"/>
+                </a:solidFill>
+                <a:latin typeface="Arial"/>
+              </a:rPr>
+              <a:t>Desktop App: integrates with your open PowerPoint file -- describe the deck or ask Claude to revise a slide. Claude Code: point it at a .pptx file; reads template structure, applies content, reshuffles slides and saves. Best for batch operations.</a:t>
+            </a:r>
+          </a:p>
+        </p:txBody>
+      </p:sp>
+      <p:sp>
+        <p:nvSpPr>
+          <p:cNvPr id="12" name="Rounded Rectangle 11"/>
+          <p:cNvSpPr/>
+          <p:nvPr/>
+        </p:nvSpPr>
+        <p:spPr>
+          <a:xfrm>
+            <a:off x="502920" y="2935224"/>
+            <a:ext cx="11155680" cy="676656"/>
+          </a:xfrm>
+          <a:prstGeom prst="roundRect">
+            <a:avLst>
+              <a:gd name="adj" fmla="val 8000"/>
+            </a:avLst>
+          </a:prstGeom>
+          <a:solidFill>
+            <a:srgbClr val="FFFFFF"/>
+          </a:solidFill>
+          <a:ln w="12700">
+            <a:solidFill>
+              <a:srgbClr val="E0E4EC"/>
+            </a:solidFill>
+          </a:ln>
+          <a:effectLst/>
+        </p:spPr>
+        <p:style>
+          <a:lnRef idx="1">
+            <a:schemeClr val="accent1"/>
+          </a:lnRef>
+          <a:fillRef idx="3">
+            <a:schemeClr val="accent1"/>
+          </a:fillRef>
+          <a:effectRef idx="2">
+            <a:schemeClr val="accent1"/>
+          </a:effectRef>
+          <a:fontRef idx="minor">
+            <a:schemeClr val="lt1"/>
+          </a:fontRef>
+        </p:style>
+        <p:txBody>
+          <a:bodyPr rtlCol="0" anchor="ctr"/>
+          <a:lstStyle/>
+          <a:p>
+            <a:pPr algn="ctr"/>
+          </a:p>
+        </p:txBody>
+      </p:sp>
+      <p:sp>
+        <p:nvSpPr>
+          <p:cNvPr id="13" name="Rectangle 12"/>
+          <p:cNvSpPr/>
+          <p:nvPr/>
+        </p:nvSpPr>
+        <p:spPr>
+          <a:xfrm>
+            <a:off x="502920" y="2935224"/>
+            <a:ext cx="64008" cy="676656"/>
+          </a:xfrm>
+          <a:prstGeom prst="rect">
+            <a:avLst/>
+          </a:prstGeom>
+          <a:solidFill>
+            <a:srgbClr val="0070C0"/>
+          </a:solidFill>
+          <a:ln>
+            <a:noFill/>
+          </a:ln>
+          <a:effectLst/>
+        </p:spPr>
+        <p:style>
+          <a:lnRef idx="1">
+            <a:schemeClr val="accent1"/>
+          </a:lnRef>
+          <a:fillRef idx="3">
+            <a:schemeClr val="accent1"/>
+          </a:fillRef>
+          <a:effectRef idx="2">
+            <a:schemeClr val="accent1"/>
+          </a:effectRef>
+          <a:fontRef idx="minor">
+            <a:schemeClr val="lt1"/>
+          </a:fontRef>
+        </p:style>
+        <p:txBody>
+          <a:bodyPr rtlCol="0" anchor="ctr"/>
+          <a:lstStyle/>
+          <a:p>
+            <a:pPr algn="ctr"/>
+          </a:p>
+        </p:txBody>
+      </p:sp>
+      <p:sp>
+        <p:nvSpPr>
+          <p:cNvPr id="14" name="TextBox 13"/>
           <p:cNvSpPr txBox="1"/>
           <p:nvPr/>
         </p:nvSpPr>
         <p:spPr>
           <a:xfrm>
-            <a:off x="457200" y="2606040"/>
-            <a:ext cx="10972800" cy="1463040"/>
+            <a:off x="758952" y="2935224"/>
+            <a:ext cx="10698480" cy="676656"/>
           </a:xfrm>
           <a:prstGeom prst="rect">
             <a:avLst/>
@@ -16453,42 +16830,148 @@
           <a:noFill/>
         </p:spPr>
         <p:txBody>
-          <a:bodyPr wrap="square" anchor="t" lIns="0" rIns="0" tIns="0" bIns="0">
+          <a:bodyPr wrap="square" anchor="ctr" lIns="0" rIns="0" tIns="0" bIns="0">
             <a:spAutoFit/>
           </a:bodyPr>
           <a:lstStyle/>
           <a:p>
-            <a:r>
-              <a:rPr sz="4600" b="0" i="0">
-                <a:solidFill>
-                  <a:srgbClr val="FFFFFF"/>
-                </a:solidFill>
-                <a:latin typeface="Georgia"/>
-              </a:rPr>
-              <a:t>The </a:t>
-            </a:r>
-            <a:r>
-              <a:rPr sz="4600" b="0" i="0">
+            <a:pPr>
+              <a:lnSpc>
+                <a:spcPct val="118000"/>
+              </a:lnSpc>
+            </a:pPr>
+            <a:r>
+              <a:rPr sz="1150" b="1" i="0">
+                <a:solidFill>
+                  <a:srgbClr val="1A1C22"/>
+                </a:solidFill>
+                <a:latin typeface="Arial"/>
+              </a:rPr>
+              <a:t>Input -- dump raw material, specify audience and purpose</a:t>
+            </a:r>
+            <a:r>
+              <a:rPr sz="1150" b="1" i="0">
                 <a:solidFill>
                   <a:srgbClr val="0070C0"/>
                 </a:solidFill>
-                <a:latin typeface="Georgia"/>
-              </a:rPr>
-              <a:t>Research Project</a:t>
-            </a:r>
-          </a:p>
-        </p:txBody>
-      </p:sp>
-      <p:sp>
-        <p:nvSpPr>
-          <p:cNvPr id="6" name="TextBox 5"/>
+                <a:latin typeface="Arial"/>
+              </a:rPr>
+              <a:t>  --  </a:t>
+            </a:r>
+            <a:r>
+              <a:rPr sz="1080" b="0" i="0">
+                <a:solidFill>
+                  <a:srgbClr val="52586A"/>
+                </a:solidFill>
+                <a:latin typeface="Arial"/>
+              </a:rPr>
+              <a:t>Provide raw notes and the goal: integration test results for the thermal subsystem, 10-slide CDR pack for programme managers who are not thermal engineers, highlight the two anomalies. Claude produces: context, findings, risks, mitigations, schedule impact, next actions.</a:t>
+            </a:r>
+          </a:p>
+        </p:txBody>
+      </p:sp>
+      <p:sp>
+        <p:nvSpPr>
+          <p:cNvPr id="15" name="Rounded Rectangle 14"/>
+          <p:cNvSpPr/>
+          <p:nvPr/>
+        </p:nvSpPr>
+        <p:spPr>
+          <a:xfrm>
+            <a:off x="502920" y="3694176"/>
+            <a:ext cx="11155680" cy="676656"/>
+          </a:xfrm>
+          <a:prstGeom prst="roundRect">
+            <a:avLst>
+              <a:gd name="adj" fmla="val 8000"/>
+            </a:avLst>
+          </a:prstGeom>
+          <a:solidFill>
+            <a:srgbClr val="FFFFFF"/>
+          </a:solidFill>
+          <a:ln w="12700">
+            <a:solidFill>
+              <a:srgbClr val="E0E4EC"/>
+            </a:solidFill>
+          </a:ln>
+          <a:effectLst/>
+        </p:spPr>
+        <p:style>
+          <a:lnRef idx="1">
+            <a:schemeClr val="accent1"/>
+          </a:lnRef>
+          <a:fillRef idx="3">
+            <a:schemeClr val="accent1"/>
+          </a:fillRef>
+          <a:effectRef idx="2">
+            <a:schemeClr val="accent1"/>
+          </a:effectRef>
+          <a:fontRef idx="minor">
+            <a:schemeClr val="lt1"/>
+          </a:fontRef>
+        </p:style>
+        <p:txBody>
+          <a:bodyPr rtlCol="0" anchor="ctr"/>
+          <a:lstStyle/>
+          <a:p>
+            <a:pPr algn="ctr"/>
+          </a:p>
+        </p:txBody>
+      </p:sp>
+      <p:sp>
+        <p:nvSpPr>
+          <p:cNvPr id="16" name="Rectangle 15"/>
+          <p:cNvSpPr/>
+          <p:nvPr/>
+        </p:nvSpPr>
+        <p:spPr>
+          <a:xfrm>
+            <a:off x="502920" y="3694176"/>
+            <a:ext cx="64008" cy="676656"/>
+          </a:xfrm>
+          <a:prstGeom prst="rect">
+            <a:avLst/>
+          </a:prstGeom>
+          <a:solidFill>
+            <a:srgbClr val="0070C0"/>
+          </a:solidFill>
+          <a:ln>
+            <a:noFill/>
+          </a:ln>
+          <a:effectLst/>
+        </p:spPr>
+        <p:style>
+          <a:lnRef idx="1">
+            <a:schemeClr val="accent1"/>
+          </a:lnRef>
+          <a:fillRef idx="3">
+            <a:schemeClr val="accent1"/>
+          </a:fillRef>
+          <a:effectRef idx="2">
+            <a:schemeClr val="accent1"/>
+          </a:effectRef>
+          <a:fontRef idx="minor">
+            <a:schemeClr val="lt1"/>
+          </a:fontRef>
+        </p:style>
+        <p:txBody>
+          <a:bodyPr rtlCol="0" anchor="ctr"/>
+          <a:lstStyle/>
+          <a:p>
+            <a:pPr algn="ctr"/>
+          </a:p>
+        </p:txBody>
+      </p:sp>
+      <p:sp>
+        <p:nvSpPr>
+          <p:cNvPr id="17" name="TextBox 16"/>
           <p:cNvSpPr txBox="1"/>
           <p:nvPr/>
         </p:nvSpPr>
         <p:spPr>
           <a:xfrm>
-            <a:off x="521207" y="3977639"/>
-            <a:ext cx="10058400" cy="548640"/>
+            <a:off x="758952" y="3694176"/>
+            <a:ext cx="10698480" cy="676656"/>
           </a:xfrm>
           <a:prstGeom prst="rect">
             <a:avLst/>
@@ -16496,33 +16979,148 @@
           <a:noFill/>
         </p:spPr>
         <p:txBody>
-          <a:bodyPr wrap="square" anchor="t" lIns="0" rIns="0" tIns="0" bIns="0">
+          <a:bodyPr wrap="square" anchor="ctr" lIns="0" rIns="0" tIns="0" bIns="0">
             <a:spAutoFit/>
           </a:bodyPr>
           <a:lstStyle/>
           <a:p>
-            <a:r>
-              <a:rPr sz="1400" b="0" i="0">
-                <a:solidFill>
-                  <a:srgbClr val="8A93A8"/>
-                </a:solidFill>
-                <a:latin typeface="Arial"/>
-              </a:rPr>
-              <a:t>Strategic analysis · experimentation in Claude · product-architecture principles</a:t>
-            </a:r>
-          </a:p>
-        </p:txBody>
-      </p:sp>
-      <p:sp>
-        <p:nvSpPr>
-          <p:cNvPr id="7" name="TextBox 6"/>
+            <a:pPr>
+              <a:lnSpc>
+                <a:spcPct val="118000"/>
+              </a:lnSpc>
+            </a:pPr>
+            <a:r>
+              <a:rPr sz="1150" b="1" i="0">
+                <a:solidFill>
+                  <a:srgbClr val="1A1C22"/>
+                </a:solidFill>
+                <a:latin typeface="Arial"/>
+              </a:rPr>
+              <a:t>Template -- apply corporate branding without manual formatting</a:t>
+            </a:r>
+            <a:r>
+              <a:rPr sz="1150" b="1" i="0">
+                <a:solidFill>
+                  <a:srgbClr val="0070C0"/>
+                </a:solidFill>
+                <a:latin typeface="Arial"/>
+              </a:rPr>
+              <a:t>  --  </a:t>
+            </a:r>
+            <a:r>
+              <a:rPr sz="1080" b="0" i="0">
+                <a:solidFill>
+                  <a:srgbClr val="52586A"/>
+                </a:solidFill>
+                <a:latin typeface="Arial"/>
+              </a:rPr>
+              <a:t>Use the branding from this template file. Apply the correct master slide, replace placeholder text with new content. Claude reads the template structure -- no text-box dragging, no accidental font changes from cross-file pasting.</a:t>
+            </a:r>
+          </a:p>
+        </p:txBody>
+      </p:sp>
+      <p:sp>
+        <p:nvSpPr>
+          <p:cNvPr id="18" name="Rounded Rectangle 17"/>
+          <p:cNvSpPr/>
+          <p:nvPr/>
+        </p:nvSpPr>
+        <p:spPr>
+          <a:xfrm>
+            <a:off x="502920" y="4453128"/>
+            <a:ext cx="11155680" cy="676656"/>
+          </a:xfrm>
+          <a:prstGeom prst="roundRect">
+            <a:avLst>
+              <a:gd name="adj" fmla="val 8000"/>
+            </a:avLst>
+          </a:prstGeom>
+          <a:solidFill>
+            <a:srgbClr val="FFFFFF"/>
+          </a:solidFill>
+          <a:ln w="12700">
+            <a:solidFill>
+              <a:srgbClr val="E0E4EC"/>
+            </a:solidFill>
+          </a:ln>
+          <a:effectLst/>
+        </p:spPr>
+        <p:style>
+          <a:lnRef idx="1">
+            <a:schemeClr val="accent1"/>
+          </a:lnRef>
+          <a:fillRef idx="3">
+            <a:schemeClr val="accent1"/>
+          </a:fillRef>
+          <a:effectRef idx="2">
+            <a:schemeClr val="accent1"/>
+          </a:effectRef>
+          <a:fontRef idx="minor">
+            <a:schemeClr val="lt1"/>
+          </a:fontRef>
+        </p:style>
+        <p:txBody>
+          <a:bodyPr rtlCol="0" anchor="ctr"/>
+          <a:lstStyle/>
+          <a:p>
+            <a:pPr algn="ctr"/>
+          </a:p>
+        </p:txBody>
+      </p:sp>
+      <p:sp>
+        <p:nvSpPr>
+          <p:cNvPr id="19" name="Rectangle 18"/>
+          <p:cNvSpPr/>
+          <p:nvPr/>
+        </p:nvSpPr>
+        <p:spPr>
+          <a:xfrm>
+            <a:off x="502920" y="4453128"/>
+            <a:ext cx="64008" cy="676656"/>
+          </a:xfrm>
+          <a:prstGeom prst="rect">
+            <a:avLst/>
+          </a:prstGeom>
+          <a:solidFill>
+            <a:srgbClr val="0070C0"/>
+          </a:solidFill>
+          <a:ln>
+            <a:noFill/>
+          </a:ln>
+          <a:effectLst/>
+        </p:spPr>
+        <p:style>
+          <a:lnRef idx="1">
+            <a:schemeClr val="accent1"/>
+          </a:lnRef>
+          <a:fillRef idx="3">
+            <a:schemeClr val="accent1"/>
+          </a:fillRef>
+          <a:effectRef idx="2">
+            <a:schemeClr val="accent1"/>
+          </a:effectRef>
+          <a:fontRef idx="minor">
+            <a:schemeClr val="lt1"/>
+          </a:fontRef>
+        </p:style>
+        <p:txBody>
+          <a:bodyPr rtlCol="0" anchor="ctr"/>
+          <a:lstStyle/>
+          <a:p>
+            <a:pPr algn="ctr"/>
+          </a:p>
+        </p:txBody>
+      </p:sp>
+      <p:sp>
+        <p:nvSpPr>
+          <p:cNvPr id="20" name="TextBox 19"/>
           <p:cNvSpPr txBox="1"/>
           <p:nvPr/>
         </p:nvSpPr>
         <p:spPr>
           <a:xfrm>
-            <a:off x="10789920" y="6400800"/>
-            <a:ext cx="896112" cy="274320"/>
+            <a:off x="758952" y="4453128"/>
+            <a:ext cx="10698480" cy="676656"/>
           </a:xfrm>
           <a:prstGeom prst="rect">
             <a:avLst/>
@@ -16530,20 +17128,191 @@
           <a:noFill/>
         </p:spPr>
         <p:txBody>
-          <a:bodyPr wrap="square" anchor="t" lIns="0" rIns="0" tIns="0" bIns="0">
+          <a:bodyPr wrap="square" anchor="ctr" lIns="0" rIns="0" tIns="0" bIns="0">
             <a:spAutoFit/>
           </a:bodyPr>
           <a:lstStyle/>
           <a:p>
-            <a:pPr algn="r"/>
-            <a:r>
-              <a:rPr sz="850" b="0" i="0" spc="80">
-                <a:solidFill>
-                  <a:srgbClr val="4A5270"/>
-                </a:solidFill>
-                <a:latin typeface="Arial"/>
-              </a:rPr>
-              <a:t>23</a:t>
+            <a:pPr>
+              <a:lnSpc>
+                <a:spcPct val="118000"/>
+              </a:lnSpc>
+            </a:pPr>
+            <a:r>
+              <a:rPr sz="1150" b="1" i="0">
+                <a:solidFill>
+                  <a:srgbClr val="1A1C22"/>
+                </a:solidFill>
+                <a:latin typeface="Arial"/>
+              </a:rPr>
+              <a:t>Adapt -- audience calibration: two versions, one source</a:t>
+            </a:r>
+            <a:r>
+              <a:rPr sz="1150" b="1" i="0">
+                <a:solidFill>
+                  <a:srgbClr val="0070C0"/>
+                </a:solidFill>
+                <a:latin typeface="Arial"/>
+              </a:rPr>
+              <a:t>  --  </a:t>
+            </a:r>
+            <a:r>
+              <a:rPr sz="1080" b="0" i="0">
+                <a:solidFill>
+                  <a:srgbClr val="52586A"/>
+                </a:solidFill>
+                <a:latin typeface="Arial"/>
+              </a:rPr>
+              <a:t>Rewrite slide 3 for the executive steering committee. Remove TRL references, lead with the cost implication. That slide only. One deck, two audiences, no duplicated effort.</a:t>
+            </a:r>
+          </a:p>
+        </p:txBody>
+      </p:sp>
+      <p:sp>
+        <p:nvSpPr>
+          <p:cNvPr id="21" name="Rounded Rectangle 20"/>
+          <p:cNvSpPr/>
+          <p:nvPr/>
+        </p:nvSpPr>
+        <p:spPr>
+          <a:xfrm>
+            <a:off x="502920" y="5212080"/>
+            <a:ext cx="11155680" cy="676656"/>
+          </a:xfrm>
+          <a:prstGeom prst="roundRect">
+            <a:avLst>
+              <a:gd name="adj" fmla="val 8000"/>
+            </a:avLst>
+          </a:prstGeom>
+          <a:solidFill>
+            <a:srgbClr val="FFFFFF"/>
+          </a:solidFill>
+          <a:ln w="12700">
+            <a:solidFill>
+              <a:srgbClr val="E0E4EC"/>
+            </a:solidFill>
+          </a:ln>
+          <a:effectLst/>
+        </p:spPr>
+        <p:style>
+          <a:lnRef idx="1">
+            <a:schemeClr val="accent1"/>
+          </a:lnRef>
+          <a:fillRef idx="3">
+            <a:schemeClr val="accent1"/>
+          </a:fillRef>
+          <a:effectRef idx="2">
+            <a:schemeClr val="accent1"/>
+          </a:effectRef>
+          <a:fontRef idx="minor">
+            <a:schemeClr val="lt1"/>
+          </a:fontRef>
+        </p:style>
+        <p:txBody>
+          <a:bodyPr rtlCol="0" anchor="ctr"/>
+          <a:lstStyle/>
+          <a:p>
+            <a:pPr algn="ctr"/>
+          </a:p>
+        </p:txBody>
+      </p:sp>
+      <p:sp>
+        <p:nvSpPr>
+          <p:cNvPr id="22" name="Rectangle 21"/>
+          <p:cNvSpPr/>
+          <p:nvPr/>
+        </p:nvSpPr>
+        <p:spPr>
+          <a:xfrm>
+            <a:off x="502920" y="5212080"/>
+            <a:ext cx="64008" cy="676656"/>
+          </a:xfrm>
+          <a:prstGeom prst="rect">
+            <a:avLst/>
+          </a:prstGeom>
+          <a:solidFill>
+            <a:srgbClr val="0070C0"/>
+          </a:solidFill>
+          <a:ln>
+            <a:noFill/>
+          </a:ln>
+          <a:effectLst/>
+        </p:spPr>
+        <p:style>
+          <a:lnRef idx="1">
+            <a:schemeClr val="accent1"/>
+          </a:lnRef>
+          <a:fillRef idx="3">
+            <a:schemeClr val="accent1"/>
+          </a:fillRef>
+          <a:effectRef idx="2">
+            <a:schemeClr val="accent1"/>
+          </a:effectRef>
+          <a:fontRef idx="minor">
+            <a:schemeClr val="lt1"/>
+          </a:fontRef>
+        </p:style>
+        <p:txBody>
+          <a:bodyPr rtlCol="0" anchor="ctr"/>
+          <a:lstStyle/>
+          <a:p>
+            <a:pPr algn="ctr"/>
+          </a:p>
+        </p:txBody>
+      </p:sp>
+      <p:sp>
+        <p:nvSpPr>
+          <p:cNvPr id="23" name="TextBox 22"/>
+          <p:cNvSpPr txBox="1"/>
+          <p:nvPr/>
+        </p:nvSpPr>
+        <p:spPr>
+          <a:xfrm>
+            <a:off x="758952" y="5212080"/>
+            <a:ext cx="10698480" cy="676656"/>
+          </a:xfrm>
+          <a:prstGeom prst="rect">
+            <a:avLst/>
+          </a:prstGeom>
+          <a:noFill/>
+        </p:spPr>
+        <p:txBody>
+          <a:bodyPr wrap="square" anchor="ctr" lIns="0" rIns="0" tIns="0" bIns="0">
+            <a:spAutoFit/>
+          </a:bodyPr>
+          <a:lstStyle/>
+          <a:p>
+            <a:pPr>
+              <a:lnSpc>
+                <a:spcPct val="118000"/>
+              </a:lnSpc>
+            </a:pPr>
+            <a:r>
+              <a:rPr sz="1150" b="1" i="0">
+                <a:solidFill>
+                  <a:srgbClr val="1A1C22"/>
+                </a:solidFill>
+                <a:latin typeface="Arial"/>
+              </a:rPr>
+              <a:t>Finish -- speaker notes tailored to the specific presenter</a:t>
+            </a:r>
+            <a:r>
+              <a:rPr sz="1150" b="1" i="0">
+                <a:solidFill>
+                  <a:srgbClr val="0070C0"/>
+                </a:solidFill>
+                <a:latin typeface="Arial"/>
+              </a:rPr>
+              <a:t>  --  </a:t>
+            </a:r>
+            <a:r>
+              <a:rPr sz="1080" b="0" i="0">
+                <a:solidFill>
+                  <a:srgbClr val="52586A"/>
+                </a:solidFill>
+                <a:latin typeface="Arial"/>
+              </a:rPr>
+              <a:t>The presenter is the SE lead -- technically strong but new to this programme. Include background context for slides 4 and 7. Notes that prepare for likely questions, not just summaries of what is on the slide.</a:t>
             </a:r>
           </a:p>
         </p:txBody>
@@ -16639,7 +17408,7 @@
                 </a:solidFill>
                 <a:latin typeface="Arial"/>
               </a:rPr>
-              <a:t>THE RESEARCH PROJECT</a:t>
+              <a:t>MORE ON TOOLS  .  TRACK 1 - AUGMENT</a:t>
             </a:r>
           </a:p>
         </p:txBody>
@@ -16673,7 +17442,7 @@
                 </a:solidFill>
                 <a:latin typeface="Georgia"/>
               </a:rPr>
-              <a:t>Project </a:t>
+              <a:t>Cowork &amp; </a:t>
             </a:r>
             <a:r>
               <a:rPr sz="3300" b="0" i="0">
@@ -16682,7 +17451,7 @@
                 </a:solidFill>
                 <a:latin typeface="Georgia"/>
               </a:rPr>
-              <a:t>timeline</a:t>
+              <a:t>Reusable Skills</a:t>
             </a:r>
           </a:p>
         </p:txBody>
@@ -16721,7 +17490,7 @@
                 </a:solidFill>
                 <a:latin typeface="Arial"/>
               </a:rPr>
-              <a:t>From perspectives and state-of-the-art to building and positioning knowledge areas.</a:t>
+              <a:t>Without skills, every session starts from zero. Skills encode your team's standards once -- the AI behaves like a trained team member from the first message, for everyone.</a:t>
             </a:r>
           </a:p>
         </p:txBody>
@@ -16799,7 +17568,7 @@
                 </a:solidFill>
                 <a:latin typeface="Arial"/>
               </a:rPr>
-              <a:t>AI Implementation Strategy  ·  Systems Engineering</a:t>
+              <a:t>AI Implementation Strategy  .  Systems Engineering</a:t>
             </a:r>
           </a:p>
         </p:txBody>
@@ -16841,773 +17610,14 @@
       </p:sp>
       <p:sp>
         <p:nvSpPr>
-          <p:cNvPr id="9" name="Rectangle 8"/>
+          <p:cNvPr id="9" name="Rounded Rectangle 8"/>
           <p:cNvSpPr/>
           <p:nvPr/>
         </p:nvSpPr>
         <p:spPr>
           <a:xfrm>
-            <a:off x="822960" y="3977639"/>
-            <a:ext cx="10698480" cy="17780"/>
-          </a:xfrm>
-          <a:prstGeom prst="rect">
-            <a:avLst/>
-          </a:prstGeom>
-          <a:solidFill>
-            <a:srgbClr val="E4E8F0"/>
-          </a:solidFill>
-          <a:ln>
-            <a:noFill/>
-          </a:ln>
-          <a:effectLst/>
-        </p:spPr>
-        <p:style>
-          <a:lnRef idx="1">
-            <a:schemeClr val="accent1"/>
-          </a:lnRef>
-          <a:fillRef idx="3">
-            <a:schemeClr val="accent1"/>
-          </a:fillRef>
-          <a:effectRef idx="2">
-            <a:schemeClr val="accent1"/>
-          </a:effectRef>
-          <a:fontRef idx="minor">
-            <a:schemeClr val="lt1"/>
-          </a:fontRef>
-        </p:style>
-        <p:txBody>
-          <a:bodyPr rtlCol="0" anchor="ctr"/>
-          <a:lstStyle/>
-          <a:p>
-            <a:pPr algn="ctr"/>
-          </a:p>
-        </p:txBody>
-      </p:sp>
-      <p:sp>
-        <p:nvSpPr>
-          <p:cNvPr id="10" name="Rectangle 9"/>
-          <p:cNvSpPr/>
-          <p:nvPr/>
-        </p:nvSpPr>
-        <p:spPr>
-          <a:xfrm>
-            <a:off x="818388" y="3922776"/>
-            <a:ext cx="17780" cy="109728"/>
-          </a:xfrm>
-          <a:prstGeom prst="rect">
-            <a:avLst/>
-          </a:prstGeom>
-          <a:solidFill>
-            <a:srgbClr val="52586A"/>
-          </a:solidFill>
-          <a:ln>
-            <a:noFill/>
-          </a:ln>
-          <a:effectLst/>
-        </p:spPr>
-        <p:style>
-          <a:lnRef idx="1">
-            <a:schemeClr val="accent1"/>
-          </a:lnRef>
-          <a:fillRef idx="3">
-            <a:schemeClr val="accent1"/>
-          </a:fillRef>
-          <a:effectRef idx="2">
-            <a:schemeClr val="accent1"/>
-          </a:effectRef>
-          <a:fontRef idx="minor">
-            <a:schemeClr val="lt1"/>
-          </a:fontRef>
-        </p:style>
-        <p:txBody>
-          <a:bodyPr rtlCol="0" anchor="ctr"/>
-          <a:lstStyle/>
-          <a:p>
-            <a:pPr algn="ctr"/>
-          </a:p>
-        </p:txBody>
-      </p:sp>
-      <p:sp>
-        <p:nvSpPr>
-          <p:cNvPr id="11" name="TextBox 10"/>
-          <p:cNvSpPr txBox="1"/>
-          <p:nvPr/>
-        </p:nvSpPr>
-        <p:spPr>
-          <a:xfrm>
-            <a:off x="365760" y="4087368"/>
-            <a:ext cx="914400" cy="274320"/>
-          </a:xfrm>
-          <a:prstGeom prst="rect">
-            <a:avLst/>
-          </a:prstGeom>
-          <a:noFill/>
-        </p:spPr>
-        <p:txBody>
-          <a:bodyPr wrap="square" anchor="t" lIns="0" rIns="0" tIns="0" bIns="0">
-            <a:spAutoFit/>
-          </a:bodyPr>
-          <a:lstStyle/>
-          <a:p>
-            <a:pPr algn="ctr"/>
-            <a:r>
-              <a:rPr sz="950" b="1" i="0" spc="50">
-                <a:solidFill>
-                  <a:srgbClr val="52586A"/>
-                </a:solidFill>
-                <a:latin typeface="Arial"/>
-              </a:rPr>
-              <a:t>Jan '26</a:t>
-            </a:r>
-          </a:p>
-        </p:txBody>
-      </p:sp>
-      <p:sp>
-        <p:nvSpPr>
-          <p:cNvPr id="12" name="Rectangle 11"/>
-          <p:cNvSpPr/>
-          <p:nvPr/>
-        </p:nvSpPr>
-        <p:spPr>
-          <a:xfrm>
-            <a:off x="2958084" y="3922776"/>
-            <a:ext cx="17780" cy="109728"/>
-          </a:xfrm>
-          <a:prstGeom prst="rect">
-            <a:avLst/>
-          </a:prstGeom>
-          <a:solidFill>
-            <a:srgbClr val="52586A"/>
-          </a:solidFill>
-          <a:ln>
-            <a:noFill/>
-          </a:ln>
-          <a:effectLst/>
-        </p:spPr>
-        <p:style>
-          <a:lnRef idx="1">
-            <a:schemeClr val="accent1"/>
-          </a:lnRef>
-          <a:fillRef idx="3">
-            <a:schemeClr val="accent1"/>
-          </a:fillRef>
-          <a:effectRef idx="2">
-            <a:schemeClr val="accent1"/>
-          </a:effectRef>
-          <a:fontRef idx="minor">
-            <a:schemeClr val="lt1"/>
-          </a:fontRef>
-        </p:style>
-        <p:txBody>
-          <a:bodyPr rtlCol="0" anchor="ctr"/>
-          <a:lstStyle/>
-          <a:p>
-            <a:pPr algn="ctr"/>
-          </a:p>
-        </p:txBody>
-      </p:sp>
-      <p:sp>
-        <p:nvSpPr>
-          <p:cNvPr id="13" name="TextBox 12"/>
-          <p:cNvSpPr txBox="1"/>
-          <p:nvPr/>
-        </p:nvSpPr>
-        <p:spPr>
-          <a:xfrm>
-            <a:off x="2505456" y="4087368"/>
-            <a:ext cx="914400" cy="274320"/>
-          </a:xfrm>
-          <a:prstGeom prst="rect">
-            <a:avLst/>
-          </a:prstGeom>
-          <a:noFill/>
-        </p:spPr>
-        <p:txBody>
-          <a:bodyPr wrap="square" anchor="t" lIns="0" rIns="0" tIns="0" bIns="0">
-            <a:spAutoFit/>
-          </a:bodyPr>
-          <a:lstStyle/>
-          <a:p>
-            <a:pPr algn="ctr"/>
-            <a:r>
-              <a:rPr sz="950" b="1" i="0" spc="50">
-                <a:solidFill>
-                  <a:srgbClr val="52586A"/>
-                </a:solidFill>
-                <a:latin typeface="Arial"/>
-              </a:rPr>
-              <a:t>Feb '26</a:t>
-            </a:r>
-          </a:p>
-        </p:txBody>
-      </p:sp>
-      <p:sp>
-        <p:nvSpPr>
-          <p:cNvPr id="14" name="Rectangle 13"/>
-          <p:cNvSpPr/>
-          <p:nvPr/>
-        </p:nvSpPr>
-        <p:spPr>
-          <a:xfrm>
-            <a:off x="5097780" y="3922776"/>
-            <a:ext cx="17780" cy="109728"/>
-          </a:xfrm>
-          <a:prstGeom prst="rect">
-            <a:avLst/>
-          </a:prstGeom>
-          <a:solidFill>
-            <a:srgbClr val="52586A"/>
-          </a:solidFill>
-          <a:ln>
-            <a:noFill/>
-          </a:ln>
-          <a:effectLst/>
-        </p:spPr>
-        <p:style>
-          <a:lnRef idx="1">
-            <a:schemeClr val="accent1"/>
-          </a:lnRef>
-          <a:fillRef idx="3">
-            <a:schemeClr val="accent1"/>
-          </a:fillRef>
-          <a:effectRef idx="2">
-            <a:schemeClr val="accent1"/>
-          </a:effectRef>
-          <a:fontRef idx="minor">
-            <a:schemeClr val="lt1"/>
-          </a:fontRef>
-        </p:style>
-        <p:txBody>
-          <a:bodyPr rtlCol="0" anchor="ctr"/>
-          <a:lstStyle/>
-          <a:p>
-            <a:pPr algn="ctr"/>
-          </a:p>
-        </p:txBody>
-      </p:sp>
-      <p:sp>
-        <p:nvSpPr>
-          <p:cNvPr id="15" name="TextBox 14"/>
-          <p:cNvSpPr txBox="1"/>
-          <p:nvPr/>
-        </p:nvSpPr>
-        <p:spPr>
-          <a:xfrm>
-            <a:off x="4645152" y="4087368"/>
-            <a:ext cx="914400" cy="274320"/>
-          </a:xfrm>
-          <a:prstGeom prst="rect">
-            <a:avLst/>
-          </a:prstGeom>
-          <a:noFill/>
-        </p:spPr>
-        <p:txBody>
-          <a:bodyPr wrap="square" anchor="t" lIns="0" rIns="0" tIns="0" bIns="0">
-            <a:spAutoFit/>
-          </a:bodyPr>
-          <a:lstStyle/>
-          <a:p>
-            <a:pPr algn="ctr"/>
-            <a:r>
-              <a:rPr sz="950" b="1" i="0" spc="50">
-                <a:solidFill>
-                  <a:srgbClr val="52586A"/>
-                </a:solidFill>
-                <a:latin typeface="Arial"/>
-              </a:rPr>
-              <a:t>Mar '26</a:t>
-            </a:r>
-          </a:p>
-        </p:txBody>
-      </p:sp>
-      <p:sp>
-        <p:nvSpPr>
-          <p:cNvPr id="16" name="Rectangle 15"/>
-          <p:cNvSpPr/>
-          <p:nvPr/>
-        </p:nvSpPr>
-        <p:spPr>
-          <a:xfrm>
-            <a:off x="7237476" y="3922776"/>
-            <a:ext cx="17780" cy="109728"/>
-          </a:xfrm>
-          <a:prstGeom prst="rect">
-            <a:avLst/>
-          </a:prstGeom>
-          <a:solidFill>
-            <a:srgbClr val="52586A"/>
-          </a:solidFill>
-          <a:ln>
-            <a:noFill/>
-          </a:ln>
-          <a:effectLst/>
-        </p:spPr>
-        <p:style>
-          <a:lnRef idx="1">
-            <a:schemeClr val="accent1"/>
-          </a:lnRef>
-          <a:fillRef idx="3">
-            <a:schemeClr val="accent1"/>
-          </a:fillRef>
-          <a:effectRef idx="2">
-            <a:schemeClr val="accent1"/>
-          </a:effectRef>
-          <a:fontRef idx="minor">
-            <a:schemeClr val="lt1"/>
-          </a:fontRef>
-        </p:style>
-        <p:txBody>
-          <a:bodyPr rtlCol="0" anchor="ctr"/>
-          <a:lstStyle/>
-          <a:p>
-            <a:pPr algn="ctr"/>
-          </a:p>
-        </p:txBody>
-      </p:sp>
-      <p:sp>
-        <p:nvSpPr>
-          <p:cNvPr id="17" name="TextBox 16"/>
-          <p:cNvSpPr txBox="1"/>
-          <p:nvPr/>
-        </p:nvSpPr>
-        <p:spPr>
-          <a:xfrm>
-            <a:off x="6784848" y="4087368"/>
-            <a:ext cx="914400" cy="274320"/>
-          </a:xfrm>
-          <a:prstGeom prst="rect">
-            <a:avLst/>
-          </a:prstGeom>
-          <a:noFill/>
-        </p:spPr>
-        <p:txBody>
-          <a:bodyPr wrap="square" anchor="t" lIns="0" rIns="0" tIns="0" bIns="0">
-            <a:spAutoFit/>
-          </a:bodyPr>
-          <a:lstStyle/>
-          <a:p>
-            <a:pPr algn="ctr"/>
-            <a:r>
-              <a:rPr sz="950" b="1" i="0" spc="50">
-                <a:solidFill>
-                  <a:srgbClr val="52586A"/>
-                </a:solidFill>
-                <a:latin typeface="Arial"/>
-              </a:rPr>
-              <a:t>Apr '26</a:t>
-            </a:r>
-          </a:p>
-        </p:txBody>
-      </p:sp>
-      <p:sp>
-        <p:nvSpPr>
-          <p:cNvPr id="18" name="Rectangle 17"/>
-          <p:cNvSpPr/>
-          <p:nvPr/>
-        </p:nvSpPr>
-        <p:spPr>
-          <a:xfrm>
-            <a:off x="9377172" y="3922776"/>
-            <a:ext cx="17780" cy="109728"/>
-          </a:xfrm>
-          <a:prstGeom prst="rect">
-            <a:avLst/>
-          </a:prstGeom>
-          <a:solidFill>
-            <a:srgbClr val="52586A"/>
-          </a:solidFill>
-          <a:ln>
-            <a:noFill/>
-          </a:ln>
-          <a:effectLst/>
-        </p:spPr>
-        <p:style>
-          <a:lnRef idx="1">
-            <a:schemeClr val="accent1"/>
-          </a:lnRef>
-          <a:fillRef idx="3">
-            <a:schemeClr val="accent1"/>
-          </a:fillRef>
-          <a:effectRef idx="2">
-            <a:schemeClr val="accent1"/>
-          </a:effectRef>
-          <a:fontRef idx="minor">
-            <a:schemeClr val="lt1"/>
-          </a:fontRef>
-        </p:style>
-        <p:txBody>
-          <a:bodyPr rtlCol="0" anchor="ctr"/>
-          <a:lstStyle/>
-          <a:p>
-            <a:pPr algn="ctr"/>
-          </a:p>
-        </p:txBody>
-      </p:sp>
-      <p:sp>
-        <p:nvSpPr>
-          <p:cNvPr id="19" name="TextBox 18"/>
-          <p:cNvSpPr txBox="1"/>
-          <p:nvPr/>
-        </p:nvSpPr>
-        <p:spPr>
-          <a:xfrm>
-            <a:off x="8924544" y="4087368"/>
-            <a:ext cx="914400" cy="274320"/>
-          </a:xfrm>
-          <a:prstGeom prst="rect">
-            <a:avLst/>
-          </a:prstGeom>
-          <a:noFill/>
-        </p:spPr>
-        <p:txBody>
-          <a:bodyPr wrap="square" anchor="t" lIns="0" rIns="0" tIns="0" bIns="0">
-            <a:spAutoFit/>
-          </a:bodyPr>
-          <a:lstStyle/>
-          <a:p>
-            <a:pPr algn="ctr"/>
-            <a:r>
-              <a:rPr sz="950" b="1" i="0" spc="50">
-                <a:solidFill>
-                  <a:srgbClr val="52586A"/>
-                </a:solidFill>
-                <a:latin typeface="Arial"/>
-              </a:rPr>
-              <a:t>May '26</a:t>
-            </a:r>
-          </a:p>
-        </p:txBody>
-      </p:sp>
-      <p:sp>
-        <p:nvSpPr>
-          <p:cNvPr id="20" name="Rectangle 19"/>
-          <p:cNvSpPr/>
-          <p:nvPr/>
-        </p:nvSpPr>
-        <p:spPr>
-          <a:xfrm>
-            <a:off x="11516867" y="3922776"/>
-            <a:ext cx="17780" cy="109728"/>
-          </a:xfrm>
-          <a:prstGeom prst="rect">
-            <a:avLst/>
-          </a:prstGeom>
-          <a:solidFill>
-            <a:srgbClr val="52586A"/>
-          </a:solidFill>
-          <a:ln>
-            <a:noFill/>
-          </a:ln>
-          <a:effectLst/>
-        </p:spPr>
-        <p:style>
-          <a:lnRef idx="1">
-            <a:schemeClr val="accent1"/>
-          </a:lnRef>
-          <a:fillRef idx="3">
-            <a:schemeClr val="accent1"/>
-          </a:fillRef>
-          <a:effectRef idx="2">
-            <a:schemeClr val="accent1"/>
-          </a:effectRef>
-          <a:fontRef idx="minor">
-            <a:schemeClr val="lt1"/>
-          </a:fontRef>
-        </p:style>
-        <p:txBody>
-          <a:bodyPr rtlCol="0" anchor="ctr"/>
-          <a:lstStyle/>
-          <a:p>
-            <a:pPr algn="ctr"/>
-          </a:p>
-        </p:txBody>
-      </p:sp>
-      <p:sp>
-        <p:nvSpPr>
-          <p:cNvPr id="21" name="TextBox 20"/>
-          <p:cNvSpPr txBox="1"/>
-          <p:nvPr/>
-        </p:nvSpPr>
-        <p:spPr>
-          <a:xfrm>
-            <a:off x="11064240" y="4087368"/>
-            <a:ext cx="914400" cy="274320"/>
-          </a:xfrm>
-          <a:prstGeom prst="rect">
-            <a:avLst/>
-          </a:prstGeom>
-          <a:noFill/>
-        </p:spPr>
-        <p:txBody>
-          <a:bodyPr wrap="square" anchor="t" lIns="0" rIns="0" tIns="0" bIns="0">
-            <a:spAutoFit/>
-          </a:bodyPr>
-          <a:lstStyle/>
-          <a:p>
-            <a:pPr algn="ctr"/>
-            <a:r>
-              <a:rPr sz="950" b="1" i="0" spc="50">
-                <a:solidFill>
-                  <a:srgbClr val="52586A"/>
-                </a:solidFill>
-                <a:latin typeface="Arial"/>
-              </a:rPr>
-              <a:t>Jun '26</a:t>
-            </a:r>
-          </a:p>
-        </p:txBody>
-      </p:sp>
-      <p:sp>
-        <p:nvSpPr>
-          <p:cNvPr id="22" name="Rounded Rectangle 21"/>
-          <p:cNvSpPr/>
-          <p:nvPr/>
-        </p:nvSpPr>
-        <p:spPr>
-          <a:xfrm>
-            <a:off x="822960" y="3063240"/>
-            <a:ext cx="4279392" cy="566928"/>
-          </a:xfrm>
-          <a:prstGeom prst="roundRect">
-            <a:avLst>
-              <a:gd name="adj" fmla="val 25000"/>
-            </a:avLst>
-          </a:prstGeom>
-          <a:solidFill>
-            <a:srgbClr val="0070C0"/>
-          </a:solidFill>
-          <a:ln>
-            <a:noFill/>
-          </a:ln>
-          <a:effectLst/>
-        </p:spPr>
-        <p:style>
-          <a:lnRef idx="1">
-            <a:schemeClr val="accent1"/>
-          </a:lnRef>
-          <a:fillRef idx="3">
-            <a:schemeClr val="accent1"/>
-          </a:fillRef>
-          <a:effectRef idx="2">
-            <a:schemeClr val="accent1"/>
-          </a:effectRef>
-          <a:fontRef idx="minor">
-            <a:schemeClr val="lt1"/>
-          </a:fontRef>
-        </p:style>
-        <p:txBody>
-          <a:bodyPr rtlCol="0" anchor="ctr"/>
-          <a:lstStyle/>
-          <a:p>
-            <a:pPr algn="ctr"/>
-          </a:p>
-        </p:txBody>
-      </p:sp>
-      <p:sp>
-        <p:nvSpPr>
-          <p:cNvPr id="23" name="TextBox 22"/>
-          <p:cNvSpPr txBox="1"/>
-          <p:nvPr/>
-        </p:nvSpPr>
-        <p:spPr>
-          <a:xfrm>
-            <a:off x="960120" y="3063240"/>
-            <a:ext cx="4005072" cy="566928"/>
-          </a:xfrm>
-          <a:prstGeom prst="rect">
-            <a:avLst/>
-          </a:prstGeom>
-          <a:noFill/>
-        </p:spPr>
-        <p:txBody>
-          <a:bodyPr wrap="square" anchor="ctr" lIns="0" rIns="0" tIns="0" bIns="0">
-            <a:spAutoFit/>
-          </a:bodyPr>
-          <a:lstStyle/>
-          <a:p>
-            <a:pPr algn="ctr"/>
-            <a:r>
-              <a:rPr sz="1050" b="1" i="0">
-                <a:solidFill>
-                  <a:srgbClr val="FFFFFF"/>
-                </a:solidFill>
-                <a:latin typeface="Arial"/>
-              </a:rPr>
-              <a:t>Phase 1  ·  Perspectives, state of the art, tool exploration</a:t>
-            </a:r>
-          </a:p>
-        </p:txBody>
-      </p:sp>
-      <p:sp>
-        <p:nvSpPr>
-          <p:cNvPr id="24" name="Rounded Rectangle 23"/>
-          <p:cNvSpPr/>
-          <p:nvPr/>
-        </p:nvSpPr>
-        <p:spPr>
-          <a:xfrm>
-            <a:off x="7242048" y="4325112"/>
-            <a:ext cx="4279392" cy="566928"/>
-          </a:xfrm>
-          <a:prstGeom prst="roundRect">
-            <a:avLst>
-              <a:gd name="adj" fmla="val 25000"/>
-            </a:avLst>
-          </a:prstGeom>
-          <a:solidFill>
-            <a:srgbClr val="006B6B"/>
-          </a:solidFill>
-          <a:ln>
-            <a:noFill/>
-          </a:ln>
-          <a:effectLst/>
-        </p:spPr>
-        <p:style>
-          <a:lnRef idx="1">
-            <a:schemeClr val="accent1"/>
-          </a:lnRef>
-          <a:fillRef idx="3">
-            <a:schemeClr val="accent1"/>
-          </a:fillRef>
-          <a:effectRef idx="2">
-            <a:schemeClr val="accent1"/>
-          </a:effectRef>
-          <a:fontRef idx="minor">
-            <a:schemeClr val="lt1"/>
-          </a:fontRef>
-        </p:style>
-        <p:txBody>
-          <a:bodyPr rtlCol="0" anchor="ctr"/>
-          <a:lstStyle/>
-          <a:p>
-            <a:pPr algn="ctr"/>
-          </a:p>
-        </p:txBody>
-      </p:sp>
-      <p:sp>
-        <p:nvSpPr>
-          <p:cNvPr id="25" name="TextBox 24"/>
-          <p:cNvSpPr txBox="1"/>
-          <p:nvPr/>
-        </p:nvSpPr>
-        <p:spPr>
-          <a:xfrm>
-            <a:off x="7379208" y="4325112"/>
-            <a:ext cx="4005072" cy="566928"/>
-          </a:xfrm>
-          <a:prstGeom prst="rect">
-            <a:avLst/>
-          </a:prstGeom>
-          <a:noFill/>
-        </p:spPr>
-        <p:txBody>
-          <a:bodyPr wrap="square" anchor="ctr" lIns="0" rIns="0" tIns="0" bIns="0">
-            <a:spAutoFit/>
-          </a:bodyPr>
-          <a:lstStyle/>
-          <a:p>
-            <a:pPr algn="ctr"/>
-            <a:r>
-              <a:rPr sz="1050" b="1" i="0">
-                <a:solidFill>
-                  <a:srgbClr val="FFFFFF"/>
-                </a:solidFill>
-                <a:latin typeface="Arial"/>
-              </a:rPr>
-              <a:t>Phase 2  ·  1. Building   2. Positioning knowledge areas</a:t>
-            </a:r>
-          </a:p>
-        </p:txBody>
-      </p:sp>
-      <p:sp>
-        <p:nvSpPr>
-          <p:cNvPr id="26" name="Rectangle 25"/>
-          <p:cNvSpPr/>
-          <p:nvPr/>
-        </p:nvSpPr>
-        <p:spPr>
-          <a:xfrm>
-            <a:off x="11512296" y="2788920"/>
-            <a:ext cx="20320" cy="1188720"/>
-          </a:xfrm>
-          <a:prstGeom prst="rect">
-            <a:avLst/>
-          </a:prstGeom>
-          <a:solidFill>
-            <a:srgbClr val="8B1A1A"/>
-          </a:solidFill>
-          <a:ln>
-            <a:noFill/>
-          </a:ln>
-          <a:effectLst/>
-        </p:spPr>
-        <p:style>
-          <a:lnRef idx="1">
-            <a:schemeClr val="accent1"/>
-          </a:lnRef>
-          <a:fillRef idx="3">
-            <a:schemeClr val="accent1"/>
-          </a:fillRef>
-          <a:effectRef idx="2">
-            <a:schemeClr val="accent1"/>
-          </a:effectRef>
-          <a:fontRef idx="minor">
-            <a:schemeClr val="lt1"/>
-          </a:fontRef>
-        </p:style>
-        <p:txBody>
-          <a:bodyPr rtlCol="0" anchor="ctr"/>
-          <a:lstStyle/>
-          <a:p>
-            <a:pPr algn="ctr"/>
-          </a:p>
-        </p:txBody>
-      </p:sp>
-      <p:sp>
-        <p:nvSpPr>
-          <p:cNvPr id="27" name="TextBox 26"/>
-          <p:cNvSpPr txBox="1"/>
-          <p:nvPr/>
-        </p:nvSpPr>
-        <p:spPr>
-          <a:xfrm>
-            <a:off x="9235440" y="2514600"/>
-            <a:ext cx="2194560" cy="274320"/>
-          </a:xfrm>
-          <a:prstGeom prst="rect">
-            <a:avLst/>
-          </a:prstGeom>
-          <a:noFill/>
-        </p:spPr>
-        <p:txBody>
-          <a:bodyPr wrap="square" anchor="t" lIns="0" rIns="0" tIns="0" bIns="0">
-            <a:spAutoFit/>
-          </a:bodyPr>
-          <a:lstStyle/>
-          <a:p>
-            <a:pPr algn="r"/>
-            <a:r>
-              <a:rPr sz="900" b="1" i="0" spc="150">
-                <a:solidFill>
-                  <a:srgbClr val="8B1A1A"/>
-                </a:solidFill>
-                <a:latin typeface="Arial"/>
-              </a:rPr>
-              <a:t>WE ARE HERE  ↓</a:t>
-            </a:r>
-          </a:p>
-        </p:txBody>
-      </p:sp>
-      <p:sp>
-        <p:nvSpPr>
-          <p:cNvPr id="28" name="Rounded Rectangle 27"/>
-          <p:cNvSpPr/>
-          <p:nvPr/>
-        </p:nvSpPr>
-        <p:spPr>
-          <a:xfrm>
-            <a:off x="502920" y="5212080"/>
-            <a:ext cx="2670048" cy="1051560"/>
+            <a:off x="502920" y="2148840"/>
+            <a:ext cx="5440680" cy="1463040"/>
           </a:xfrm>
           <a:prstGeom prst="roundRect">
             <a:avLst>
@@ -17648,14 +17658,14 @@
       </p:sp>
       <p:sp>
         <p:nvSpPr>
-          <p:cNvPr id="29" name="Rectangle 28"/>
+          <p:cNvPr id="10" name="Rectangle 9"/>
           <p:cNvSpPr/>
           <p:nvPr/>
         </p:nvSpPr>
         <p:spPr>
           <a:xfrm>
-            <a:off x="502920" y="5212080"/>
-            <a:ext cx="2670048" cy="54864"/>
+            <a:off x="502920" y="2148840"/>
+            <a:ext cx="5440680" cy="54864"/>
           </a:xfrm>
           <a:prstGeom prst="rect">
             <a:avLst/>
@@ -17692,14 +17702,14 @@
       </p:sp>
       <p:sp>
         <p:nvSpPr>
-          <p:cNvPr id="30" name="TextBox 29"/>
+          <p:cNvPr id="11" name="TextBox 10"/>
           <p:cNvSpPr txBox="1"/>
           <p:nvPr/>
         </p:nvSpPr>
         <p:spPr>
           <a:xfrm>
-            <a:off x="667512" y="5394960"/>
-            <a:ext cx="2359152" cy="740664"/>
+            <a:off x="713232" y="2313432"/>
+            <a:ext cx="5038344" cy="1207008"/>
           </a:xfrm>
           <a:prstGeom prst="rect">
             <a:avLst/>
@@ -17713,13 +17723,13 @@
           <a:lstStyle/>
           <a:p>
             <a:r>
-              <a:rPr sz="850" b="1" i="0" spc="140">
+              <a:rPr sz="850" b="1" i="0" spc="120">
                 <a:solidFill>
                   <a:srgbClr val="0070C0"/>
                 </a:solidFill>
                 <a:latin typeface="Arial"/>
               </a:rPr>
-              <a:t>JAN–MAR</a:t>
+              <a:t>CLAUDE.md -- Always-on project memory</a:t>
             </a:r>
           </a:p>
           <a:p>
@@ -17732,27 +17742,27 @@
               </a:spcBef>
             </a:pPr>
             <a:r>
-              <a:rPr sz="1100" b="0" i="0">
+              <a:rPr sz="1080" b="0" i="0">
                 <a:solidFill>
                   <a:srgbClr val="52586A"/>
                 </a:solidFill>
                 <a:latin typeface="Arial"/>
               </a:rPr>
-              <a:t>Strategic analysis &amp; preliminary views</a:t>
-            </a:r>
-          </a:p>
-        </p:txBody>
-      </p:sp>
-      <p:sp>
-        <p:nvSpPr>
-          <p:cNvPr id="31" name="Rounded Rectangle 30"/>
+              <a:t>Plain-text file in project root. Contains company terminology, document standards, risk scales, naming rules. Claude reads it automatically every session. Shared via Git -- entire team uses the same knowledge base with no separate configuration.</a:t>
+            </a:r>
+          </a:p>
+        </p:txBody>
+      </p:sp>
+      <p:sp>
+        <p:nvSpPr>
+          <p:cNvPr id="12" name="Rounded Rectangle 11"/>
           <p:cNvSpPr/>
           <p:nvPr/>
         </p:nvSpPr>
         <p:spPr>
           <a:xfrm>
-            <a:off x="3337560" y="5212080"/>
-            <a:ext cx="2670048" cy="1051560"/>
+            <a:off x="6291072" y="2148840"/>
+            <a:ext cx="5440680" cy="1463040"/>
           </a:xfrm>
           <a:prstGeom prst="roundRect">
             <a:avLst>
@@ -17793,14 +17803,14 @@
       </p:sp>
       <p:sp>
         <p:nvSpPr>
-          <p:cNvPr id="32" name="Rectangle 31"/>
+          <p:cNvPr id="13" name="Rectangle 12"/>
           <p:cNvSpPr/>
           <p:nvPr/>
         </p:nvSpPr>
         <p:spPr>
           <a:xfrm>
-            <a:off x="3337560" y="5212080"/>
-            <a:ext cx="2670048" cy="54864"/>
+            <a:off x="6291072" y="2148840"/>
+            <a:ext cx="5440680" cy="54864"/>
           </a:xfrm>
           <a:prstGeom prst="rect">
             <a:avLst/>
@@ -17837,14 +17847,14 @@
       </p:sp>
       <p:sp>
         <p:nvSpPr>
-          <p:cNvPr id="33" name="TextBox 32"/>
+          <p:cNvPr id="14" name="TextBox 13"/>
           <p:cNvSpPr txBox="1"/>
           <p:nvPr/>
         </p:nvSpPr>
         <p:spPr>
           <a:xfrm>
-            <a:off x="3502152" y="5394960"/>
-            <a:ext cx="2359152" cy="740664"/>
+            <a:off x="6501384" y="2313432"/>
+            <a:ext cx="5038344" cy="1207008"/>
           </a:xfrm>
           <a:prstGeom prst="rect">
             <a:avLst/>
@@ -17858,13 +17868,13 @@
           <a:lstStyle/>
           <a:p>
             <a:r>
-              <a:rPr sz="850" b="1" i="0" spc="140">
+              <a:rPr sz="850" b="1" i="0" spc="120">
                 <a:solidFill>
                   <a:srgbClr val="002060"/>
                 </a:solidFill>
                 <a:latin typeface="Arial"/>
               </a:rPr>
-              <a:t>MAR</a:t>
+              <a:t>Slash commands -- One-keystroke workflow triggers</a:t>
             </a:r>
           </a:p>
           <a:p>
@@ -17877,31 +17887,31 @@
               </a:spcBef>
             </a:pPr>
             <a:r>
-              <a:rPr sz="1100" b="0" i="0">
+              <a:rPr sz="1080" b="0" i="0">
                 <a:solidFill>
                   <a:srgbClr val="52586A"/>
                 </a:solidFill>
                 <a:latin typeface="Arial"/>
               </a:rPr>
-              <a:t>State of the art + tool exploration</a:t>
-            </a:r>
-          </a:p>
-        </p:txBody>
-      </p:sp>
-      <p:sp>
-        <p:nvSpPr>
-          <p:cNvPr id="34" name="Rounded Rectangle 33"/>
+              <a:t>Files in .claude/commands/ -- each a prompt template for a recurring task. /weekly-report triggers the full workflow immediately. Committed to Git alongside CLAUDE.md -- distributed automatically to the whole team.</a:t>
+            </a:r>
+          </a:p>
+        </p:txBody>
+      </p:sp>
+      <p:sp>
+        <p:nvSpPr>
+          <p:cNvPr id="15" name="Rounded Rectangle 14"/>
           <p:cNvSpPr/>
           <p:nvPr/>
         </p:nvSpPr>
         <p:spPr>
           <a:xfrm>
-            <a:off x="6172200" y="5212080"/>
-            <a:ext cx="2670048" cy="1051560"/>
+            <a:off x="502920" y="3785615"/>
+            <a:ext cx="11155680" cy="694944"/>
           </a:xfrm>
           <a:prstGeom prst="roundRect">
             <a:avLst>
-              <a:gd name="adj" fmla="val 6000"/>
+              <a:gd name="adj" fmla="val 8000"/>
             </a:avLst>
           </a:prstGeom>
           <a:solidFill>
@@ -17938,14 +17948,14 @@
       </p:sp>
       <p:sp>
         <p:nvSpPr>
-          <p:cNvPr id="35" name="Rectangle 34"/>
+          <p:cNvPr id="16" name="Rectangle 15"/>
           <p:cNvSpPr/>
           <p:nvPr/>
         </p:nvSpPr>
         <p:spPr>
           <a:xfrm>
-            <a:off x="6172200" y="5212080"/>
-            <a:ext cx="2670048" cy="54864"/>
+            <a:off x="502920" y="3785615"/>
+            <a:ext cx="64008" cy="694944"/>
           </a:xfrm>
           <a:prstGeom prst="rect">
             <a:avLst/>
@@ -17982,14 +17992,431 @@
       </p:sp>
       <p:sp>
         <p:nvSpPr>
-          <p:cNvPr id="36" name="TextBox 35"/>
+          <p:cNvPr id="17" name="TextBox 16"/>
           <p:cNvSpPr txBox="1"/>
           <p:nvPr/>
         </p:nvSpPr>
         <p:spPr>
           <a:xfrm>
-            <a:off x="6336792" y="5394960"/>
-            <a:ext cx="2359152" cy="740664"/>
+            <a:off x="758952" y="3785615"/>
+            <a:ext cx="10698480" cy="694944"/>
+          </a:xfrm>
+          <a:prstGeom prst="rect">
+            <a:avLst/>
+          </a:prstGeom>
+          <a:noFill/>
+        </p:spPr>
+        <p:txBody>
+          <a:bodyPr wrap="square" anchor="ctr" lIns="0" rIns="0" tIns="0" bIns="0">
+            <a:spAutoFit/>
+          </a:bodyPr>
+          <a:lstStyle/>
+          <a:p>
+            <a:pPr>
+              <a:lnSpc>
+                <a:spcPct val="118000"/>
+              </a:lnSpc>
+            </a:pPr>
+            <a:r>
+              <a:rPr sz="1150" b="1" i="0">
+                <a:solidFill>
+                  <a:srgbClr val="1A1C22"/>
+                </a:solidFill>
+                <a:latin typeface="Arial"/>
+              </a:rPr>
+              <a:t>Write CLAUDE.md</a:t>
+            </a:r>
+            <a:r>
+              <a:rPr sz="1150" b="1" i="0">
+                <a:solidFill>
+                  <a:srgbClr val="006B6B"/>
+                </a:solidFill>
+                <a:latin typeface="Arial"/>
+              </a:rPr>
+              <a:t>  --  </a:t>
+            </a:r>
+            <a:r>
+              <a:rPr sz="1080" b="0" i="0">
+                <a:solidFill>
+                  <a:srgbClr val="52586A"/>
+                </a:solidFill>
+                <a:latin typeface="Arial"/>
+              </a:rPr>
+              <a:t>Treat it as an onboarding document: define risk register columns, scoring scale, flag thresholds, naming conventions. If a new hire needs to know it, the AI needs to know it too.</a:t>
+            </a:r>
+          </a:p>
+        </p:txBody>
+      </p:sp>
+      <p:sp>
+        <p:nvSpPr>
+          <p:cNvPr id="18" name="Rounded Rectangle 17"/>
+          <p:cNvSpPr/>
+          <p:nvPr/>
+        </p:nvSpPr>
+        <p:spPr>
+          <a:xfrm>
+            <a:off x="502920" y="4571999"/>
+            <a:ext cx="11155680" cy="694944"/>
+          </a:xfrm>
+          <a:prstGeom prst="roundRect">
+            <a:avLst>
+              <a:gd name="adj" fmla="val 8000"/>
+            </a:avLst>
+          </a:prstGeom>
+          <a:solidFill>
+            <a:srgbClr val="FFFFFF"/>
+          </a:solidFill>
+          <a:ln w="12700">
+            <a:solidFill>
+              <a:srgbClr val="E0E4EC"/>
+            </a:solidFill>
+          </a:ln>
+          <a:effectLst/>
+        </p:spPr>
+        <p:style>
+          <a:lnRef idx="1">
+            <a:schemeClr val="accent1"/>
+          </a:lnRef>
+          <a:fillRef idx="3">
+            <a:schemeClr val="accent1"/>
+          </a:fillRef>
+          <a:effectRef idx="2">
+            <a:schemeClr val="accent1"/>
+          </a:effectRef>
+          <a:fontRef idx="minor">
+            <a:schemeClr val="lt1"/>
+          </a:fontRef>
+        </p:style>
+        <p:txBody>
+          <a:bodyPr rtlCol="0" anchor="ctr"/>
+          <a:lstStyle/>
+          <a:p>
+            <a:pPr algn="ctr"/>
+          </a:p>
+        </p:txBody>
+      </p:sp>
+      <p:sp>
+        <p:nvSpPr>
+          <p:cNvPr id="19" name="Rectangle 18"/>
+          <p:cNvSpPr/>
+          <p:nvPr/>
+        </p:nvSpPr>
+        <p:spPr>
+          <a:xfrm>
+            <a:off x="502920" y="4571999"/>
+            <a:ext cx="64008" cy="694944"/>
+          </a:xfrm>
+          <a:prstGeom prst="rect">
+            <a:avLst/>
+          </a:prstGeom>
+          <a:solidFill>
+            <a:srgbClr val="006B6B"/>
+          </a:solidFill>
+          <a:ln>
+            <a:noFill/>
+          </a:ln>
+          <a:effectLst/>
+        </p:spPr>
+        <p:style>
+          <a:lnRef idx="1">
+            <a:schemeClr val="accent1"/>
+          </a:lnRef>
+          <a:fillRef idx="3">
+            <a:schemeClr val="accent1"/>
+          </a:fillRef>
+          <a:effectRef idx="2">
+            <a:schemeClr val="accent1"/>
+          </a:effectRef>
+          <a:fontRef idx="minor">
+            <a:schemeClr val="lt1"/>
+          </a:fontRef>
+        </p:style>
+        <p:txBody>
+          <a:bodyPr rtlCol="0" anchor="ctr"/>
+          <a:lstStyle/>
+          <a:p>
+            <a:pPr algn="ctr"/>
+          </a:p>
+        </p:txBody>
+      </p:sp>
+      <p:sp>
+        <p:nvSpPr>
+          <p:cNvPr id="20" name="TextBox 19"/>
+          <p:cNvSpPr txBox="1"/>
+          <p:nvPr/>
+        </p:nvSpPr>
+        <p:spPr>
+          <a:xfrm>
+            <a:off x="758952" y="4571999"/>
+            <a:ext cx="10698480" cy="694944"/>
+          </a:xfrm>
+          <a:prstGeom prst="rect">
+            <a:avLst/>
+          </a:prstGeom>
+          <a:noFill/>
+        </p:spPr>
+        <p:txBody>
+          <a:bodyPr wrap="square" anchor="ctr" lIns="0" rIns="0" tIns="0" bIns="0">
+            <a:spAutoFit/>
+          </a:bodyPr>
+          <a:lstStyle/>
+          <a:p>
+            <a:pPr>
+              <a:lnSpc>
+                <a:spcPct val="118000"/>
+              </a:lnSpc>
+            </a:pPr>
+            <a:r>
+              <a:rPr sz="1150" b="1" i="0">
+                <a:solidFill>
+                  <a:srgbClr val="1A1C22"/>
+                </a:solidFill>
+                <a:latin typeface="Arial"/>
+              </a:rPr>
+              <a:t>Share via Git</a:t>
+            </a:r>
+            <a:r>
+              <a:rPr sz="1150" b="1" i="0">
+                <a:solidFill>
+                  <a:srgbClr val="006B6B"/>
+                </a:solidFill>
+                <a:latin typeface="Arial"/>
+              </a:rPr>
+              <a:t>  --  </a:t>
+            </a:r>
+            <a:r>
+              <a:rPr sz="1080" b="0" i="0">
+                <a:solidFill>
+                  <a:srgbClr val="52586A"/>
+                </a:solidFill>
+                <a:latin typeface="Arial"/>
+              </a:rPr>
+              <a:t>Commit CLAUDE.md to the project repo. Every team member who opens the project with Claude Code has the same skills -- no separate configuration, no re-explanation. Standards propagate on the next pull.</a:t>
+            </a:r>
+          </a:p>
+        </p:txBody>
+      </p:sp>
+      <p:sp>
+        <p:nvSpPr>
+          <p:cNvPr id="21" name="Rounded Rectangle 20"/>
+          <p:cNvSpPr/>
+          <p:nvPr/>
+        </p:nvSpPr>
+        <p:spPr>
+          <a:xfrm>
+            <a:off x="502920" y="5358383"/>
+            <a:ext cx="11155680" cy="694944"/>
+          </a:xfrm>
+          <a:prstGeom prst="roundRect">
+            <a:avLst>
+              <a:gd name="adj" fmla="val 8000"/>
+            </a:avLst>
+          </a:prstGeom>
+          <a:solidFill>
+            <a:srgbClr val="FFFFFF"/>
+          </a:solidFill>
+          <a:ln w="12700">
+            <a:solidFill>
+              <a:srgbClr val="E0E4EC"/>
+            </a:solidFill>
+          </a:ln>
+          <a:effectLst/>
+        </p:spPr>
+        <p:style>
+          <a:lnRef idx="1">
+            <a:schemeClr val="accent1"/>
+          </a:lnRef>
+          <a:fillRef idx="3">
+            <a:schemeClr val="accent1"/>
+          </a:fillRef>
+          <a:effectRef idx="2">
+            <a:schemeClr val="accent1"/>
+          </a:effectRef>
+          <a:fontRef idx="minor">
+            <a:schemeClr val="lt1"/>
+          </a:fontRef>
+        </p:style>
+        <p:txBody>
+          <a:bodyPr rtlCol="0" anchor="ctr"/>
+          <a:lstStyle/>
+          <a:p>
+            <a:pPr algn="ctr"/>
+          </a:p>
+        </p:txBody>
+      </p:sp>
+      <p:sp>
+        <p:nvSpPr>
+          <p:cNvPr id="22" name="Rectangle 21"/>
+          <p:cNvSpPr/>
+          <p:nvPr/>
+        </p:nvSpPr>
+        <p:spPr>
+          <a:xfrm>
+            <a:off x="502920" y="5358383"/>
+            <a:ext cx="64008" cy="694944"/>
+          </a:xfrm>
+          <a:prstGeom prst="rect">
+            <a:avLst/>
+          </a:prstGeom>
+          <a:solidFill>
+            <a:srgbClr val="006B6B"/>
+          </a:solidFill>
+          <a:ln>
+            <a:noFill/>
+          </a:ln>
+          <a:effectLst/>
+        </p:spPr>
+        <p:style>
+          <a:lnRef idx="1">
+            <a:schemeClr val="accent1"/>
+          </a:lnRef>
+          <a:fillRef idx="3">
+            <a:schemeClr val="accent1"/>
+          </a:fillRef>
+          <a:effectRef idx="2">
+            <a:schemeClr val="accent1"/>
+          </a:effectRef>
+          <a:fontRef idx="minor">
+            <a:schemeClr val="lt1"/>
+          </a:fontRef>
+        </p:style>
+        <p:txBody>
+          <a:bodyPr rtlCol="0" anchor="ctr"/>
+          <a:lstStyle/>
+          <a:p>
+            <a:pPr algn="ctr"/>
+          </a:p>
+        </p:txBody>
+      </p:sp>
+      <p:sp>
+        <p:nvSpPr>
+          <p:cNvPr id="23" name="TextBox 22"/>
+          <p:cNvSpPr txBox="1"/>
+          <p:nvPr/>
+        </p:nvSpPr>
+        <p:spPr>
+          <a:xfrm>
+            <a:off x="758952" y="5358383"/>
+            <a:ext cx="10698480" cy="694944"/>
+          </a:xfrm>
+          <a:prstGeom prst="rect">
+            <a:avLst/>
+          </a:prstGeom>
+          <a:noFill/>
+        </p:spPr>
+        <p:txBody>
+          <a:bodyPr wrap="square" anchor="ctr" lIns="0" rIns="0" tIns="0" bIns="0">
+            <a:spAutoFit/>
+          </a:bodyPr>
+          <a:lstStyle/>
+          <a:p>
+            <a:pPr>
+              <a:lnSpc>
+                <a:spcPct val="118000"/>
+              </a:lnSpc>
+            </a:pPr>
+            <a:r>
+              <a:rPr sz="1150" b="1" i="0">
+                <a:solidFill>
+                  <a:srgbClr val="1A1C22"/>
+                </a:solidFill>
+                <a:latin typeface="Arial"/>
+              </a:rPr>
+              <a:t>Evolve -- skills are institutional IP</a:t>
+            </a:r>
+            <a:r>
+              <a:rPr sz="1150" b="1" i="0">
+                <a:solidFill>
+                  <a:srgbClr val="006B6B"/>
+                </a:solidFill>
+                <a:latin typeface="Arial"/>
+              </a:rPr>
+              <a:t>  --  </a:t>
+            </a:r>
+            <a:r>
+              <a:rPr sz="1080" b="0" i="0">
+                <a:solidFill>
+                  <a:srgbClr val="52586A"/>
+                </a:solidFill>
+                <a:latin typeface="Arial"/>
+              </a:rPr>
+              <a:t>Each time a standard is re-explained to the AI, it belongs in CLAUDE.md. After six months, a well-maintained file represents the team's accumulated knowledge of what good output looks like on this project.</a:t>
+            </a:r>
+          </a:p>
+        </p:txBody>
+      </p:sp>
+    </p:spTree>
+  </p:cSld>
+  <p:clrMapOvr>
+    <a:masterClrMapping/>
+  </p:clrMapOvr>
+</p:sld>
+</file>
+
+<file path=ppt/slides/slide25.xml><?xml version="1.0" encoding="utf-8"?>
+<p:sld xmlns:a="http://schemas.openxmlformats.org/drawingml/2006/main" xmlns:p="http://schemas.openxmlformats.org/presentationml/2006/main" xmlns:r="http://schemas.openxmlformats.org/officeDocument/2006/relationships">
+  <p:cSld>
+    <p:spTree>
+      <p:nvGrpSpPr>
+        <p:cNvPr id="1" name=""/>
+        <p:cNvGrpSpPr/>
+        <p:nvPr/>
+      </p:nvGrpSpPr>
+      <p:grpSpPr/>
+      <p:sp>
+        <p:nvSpPr>
+          <p:cNvPr id="2" name="Rectangle 1"/>
+          <p:cNvSpPr/>
+          <p:nvPr/>
+        </p:nvSpPr>
+        <p:spPr>
+          <a:xfrm>
+            <a:off x="0" y="0"/>
+            <a:ext cx="12191695" cy="6858000"/>
+          </a:xfrm>
+          <a:prstGeom prst="rect">
+            <a:avLst/>
+          </a:prstGeom>
+          <a:solidFill>
+            <a:srgbClr val="F7F8FA"/>
+          </a:solidFill>
+          <a:ln>
+            <a:noFill/>
+          </a:ln>
+          <a:effectLst/>
+        </p:spPr>
+        <p:style>
+          <a:lnRef idx="1">
+            <a:schemeClr val="accent1"/>
+          </a:lnRef>
+          <a:fillRef idx="3">
+            <a:schemeClr val="accent1"/>
+          </a:fillRef>
+          <a:effectRef idx="2">
+            <a:schemeClr val="accent1"/>
+          </a:effectRef>
+          <a:fontRef idx="minor">
+            <a:schemeClr val="lt1"/>
+          </a:fontRef>
+        </p:style>
+        <p:txBody>
+          <a:bodyPr rtlCol="0" anchor="ctr"/>
+          <a:lstStyle/>
+          <a:p>
+            <a:pPr algn="ctr"/>
+          </a:p>
+        </p:txBody>
+      </p:sp>
+      <p:sp>
+        <p:nvSpPr>
+          <p:cNvPr id="3" name="TextBox 2"/>
+          <p:cNvSpPr txBox="1"/>
+          <p:nvPr/>
+        </p:nvSpPr>
+        <p:spPr>
+          <a:xfrm>
+            <a:off x="502920" y="457200"/>
+            <a:ext cx="10058400" cy="274320"/>
           </a:xfrm>
           <a:prstGeom prst="rect">
             <a:avLst/>
@@ -18003,13 +18430,3289 @@
           <a:lstStyle/>
           <a:p>
             <a:r>
+              <a:rPr sz="1050" b="1" i="0" spc="220">
+                <a:solidFill>
+                  <a:srgbClr val="0070C0"/>
+                </a:solidFill>
+                <a:latin typeface="Arial"/>
+              </a:rPr>
+              <a:t>MORE ON TOOLS  .  GOOGLE &amp; NOTION</a:t>
+            </a:r>
+          </a:p>
+        </p:txBody>
+      </p:sp>
+      <p:sp>
+        <p:nvSpPr>
+          <p:cNvPr id="4" name="TextBox 3"/>
+          <p:cNvSpPr txBox="1"/>
+          <p:nvPr/>
+        </p:nvSpPr>
+        <p:spPr>
+          <a:xfrm>
+            <a:off x="502920" y="749808"/>
+            <a:ext cx="10515600" cy="1097280"/>
+          </a:xfrm>
+          <a:prstGeom prst="rect">
+            <a:avLst/>
+          </a:prstGeom>
+          <a:noFill/>
+        </p:spPr>
+        <p:txBody>
+          <a:bodyPr wrap="square" anchor="t" lIns="0" rIns="0" tIns="0" bIns="0">
+            <a:spAutoFit/>
+          </a:bodyPr>
+          <a:lstStyle/>
+          <a:p>
+            <a:r>
+              <a:rPr sz="3300" b="0" i="0">
+                <a:solidFill>
+                  <a:srgbClr val="1A1C22"/>
+                </a:solidFill>
+                <a:latin typeface="Georgia"/>
+              </a:rPr>
+              <a:t>NotebookLM  &amp;  </a:t>
+            </a:r>
+            <a:r>
+              <a:rPr sz="3300" b="0" i="0">
+                <a:solidFill>
+                  <a:srgbClr val="0070C0"/>
+                </a:solidFill>
+                <a:latin typeface="Georgia"/>
+              </a:rPr>
+              <a:t>Notion AI</a:t>
+            </a:r>
+          </a:p>
+        </p:txBody>
+      </p:sp>
+      <p:sp>
+        <p:nvSpPr>
+          <p:cNvPr id="5" name="TextBox 4"/>
+          <p:cNvSpPr txBox="1"/>
+          <p:nvPr/>
+        </p:nvSpPr>
+        <p:spPr>
+          <a:xfrm>
+            <a:off x="521207" y="1572768"/>
+            <a:ext cx="9601200" cy="640080"/>
+          </a:xfrm>
+          <a:prstGeom prst="rect">
+            <a:avLst/>
+          </a:prstGeom>
+          <a:noFill/>
+        </p:spPr>
+        <p:txBody>
+          <a:bodyPr wrap="square" anchor="t" lIns="0" rIns="0" tIns="0" bIns="0">
+            <a:spAutoFit/>
+          </a:bodyPr>
+          <a:lstStyle/>
+          <a:p>
+            <a:pPr>
+              <a:lnSpc>
+                <a:spcPct val="130000"/>
+              </a:lnSpc>
+            </a:pPr>
+            <a:r>
+              <a:rPr sz="1300" b="0" i="0">
+                <a:solidFill>
+                  <a:srgbClr val="52586A"/>
+                </a:solidFill>
+                <a:latin typeface="Arial"/>
+              </a:rPr>
+              <a:t>Research synthesis and knowledge management -- two complementary tools that extend what Claude covers.</a:t>
+            </a:r>
+          </a:p>
+        </p:txBody>
+      </p:sp>
+      <p:sp>
+        <p:nvSpPr>
+          <p:cNvPr id="6" name="Rectangle 5"/>
+          <p:cNvSpPr/>
+          <p:nvPr/>
+        </p:nvSpPr>
+        <p:spPr>
+          <a:xfrm>
+            <a:off x="502920" y="6455664"/>
+            <a:ext cx="11183112" cy="9525"/>
+          </a:xfrm>
+          <a:prstGeom prst="rect">
+            <a:avLst/>
+          </a:prstGeom>
+          <a:solidFill>
+            <a:srgbClr val="E0E4EC"/>
+          </a:solidFill>
+          <a:ln>
+            <a:noFill/>
+          </a:ln>
+          <a:effectLst/>
+        </p:spPr>
+        <p:style>
+          <a:lnRef idx="1">
+            <a:schemeClr val="accent1"/>
+          </a:lnRef>
+          <a:fillRef idx="3">
+            <a:schemeClr val="accent1"/>
+          </a:fillRef>
+          <a:effectRef idx="2">
+            <a:schemeClr val="accent1"/>
+          </a:effectRef>
+          <a:fontRef idx="minor">
+            <a:schemeClr val="lt1"/>
+          </a:fontRef>
+        </p:style>
+        <p:txBody>
+          <a:bodyPr rtlCol="0" anchor="ctr"/>
+          <a:lstStyle/>
+          <a:p>
+            <a:pPr algn="ctr"/>
+          </a:p>
+        </p:txBody>
+      </p:sp>
+      <p:sp>
+        <p:nvSpPr>
+          <p:cNvPr id="7" name="TextBox 6"/>
+          <p:cNvSpPr txBox="1"/>
+          <p:nvPr/>
+        </p:nvSpPr>
+        <p:spPr>
+          <a:xfrm>
+            <a:off x="502920" y="6510528"/>
+            <a:ext cx="8229600" cy="274320"/>
+          </a:xfrm>
+          <a:prstGeom prst="rect">
+            <a:avLst/>
+          </a:prstGeom>
+          <a:noFill/>
+        </p:spPr>
+        <p:txBody>
+          <a:bodyPr wrap="square" anchor="t" lIns="0" rIns="0" tIns="0" bIns="0">
+            <a:spAutoFit/>
+          </a:bodyPr>
+          <a:lstStyle/>
+          <a:p>
+            <a:r>
+              <a:rPr sz="850" b="0" i="0" spc="80">
+                <a:solidFill>
+                  <a:srgbClr val="8A93A8"/>
+                </a:solidFill>
+                <a:latin typeface="Arial"/>
+              </a:rPr>
+              <a:t>AI Implementation Strategy  .  Systems Engineering</a:t>
+            </a:r>
+          </a:p>
+        </p:txBody>
+      </p:sp>
+      <p:sp>
+        <p:nvSpPr>
+          <p:cNvPr id="8" name="TextBox 7"/>
+          <p:cNvSpPr txBox="1"/>
+          <p:nvPr/>
+        </p:nvSpPr>
+        <p:spPr>
+          <a:xfrm>
+            <a:off x="10789920" y="6510528"/>
+            <a:ext cx="896112" cy="274320"/>
+          </a:xfrm>
+          <a:prstGeom prst="rect">
+            <a:avLst/>
+          </a:prstGeom>
+          <a:noFill/>
+        </p:spPr>
+        <p:txBody>
+          <a:bodyPr wrap="square" anchor="t" lIns="0" rIns="0" tIns="0" bIns="0">
+            <a:spAutoFit/>
+          </a:bodyPr>
+          <a:lstStyle/>
+          <a:p>
+            <a:pPr algn="r"/>
+            <a:r>
+              <a:rPr sz="850" b="0" i="0" spc="80">
+                <a:solidFill>
+                  <a:srgbClr val="8A93A8"/>
+                </a:solidFill>
+                <a:latin typeface="Arial"/>
+              </a:rPr>
+              <a:t>25</a:t>
+            </a:r>
+          </a:p>
+        </p:txBody>
+      </p:sp>
+      <p:sp>
+        <p:nvSpPr>
+          <p:cNvPr id="9" name="Rounded Rectangle 8"/>
+          <p:cNvSpPr/>
+          <p:nvPr/>
+        </p:nvSpPr>
+        <p:spPr>
+          <a:xfrm>
+            <a:off x="502920" y="2148840"/>
+            <a:ext cx="5440680" cy="3931920"/>
+          </a:xfrm>
+          <a:prstGeom prst="roundRect">
+            <a:avLst>
+              <a:gd name="adj" fmla="val 6000"/>
+            </a:avLst>
+          </a:prstGeom>
+          <a:solidFill>
+            <a:srgbClr val="FFFFFF"/>
+          </a:solidFill>
+          <a:ln w="12700">
+            <a:solidFill>
+              <a:srgbClr val="E0E4EC"/>
+            </a:solidFill>
+          </a:ln>
+          <a:effectLst/>
+        </p:spPr>
+        <p:style>
+          <a:lnRef idx="1">
+            <a:schemeClr val="accent1"/>
+          </a:lnRef>
+          <a:fillRef idx="3">
+            <a:schemeClr val="accent1"/>
+          </a:fillRef>
+          <a:effectRef idx="2">
+            <a:schemeClr val="accent1"/>
+          </a:effectRef>
+          <a:fontRef idx="minor">
+            <a:schemeClr val="lt1"/>
+          </a:fontRef>
+        </p:style>
+        <p:txBody>
+          <a:bodyPr rtlCol="0" anchor="ctr"/>
+          <a:lstStyle/>
+          <a:p>
+            <a:pPr algn="ctr"/>
+          </a:p>
+        </p:txBody>
+      </p:sp>
+      <p:sp>
+        <p:nvSpPr>
+          <p:cNvPr id="10" name="Rectangle 9"/>
+          <p:cNvSpPr/>
+          <p:nvPr/>
+        </p:nvSpPr>
+        <p:spPr>
+          <a:xfrm>
+            <a:off x="502920" y="2148840"/>
+            <a:ext cx="5440680" cy="54864"/>
+          </a:xfrm>
+          <a:prstGeom prst="rect">
+            <a:avLst/>
+          </a:prstGeom>
+          <a:solidFill>
+            <a:srgbClr val="006B6B"/>
+          </a:solidFill>
+          <a:ln>
+            <a:noFill/>
+          </a:ln>
+          <a:effectLst/>
+        </p:spPr>
+        <p:style>
+          <a:lnRef idx="1">
+            <a:schemeClr val="accent1"/>
+          </a:lnRef>
+          <a:fillRef idx="3">
+            <a:schemeClr val="accent1"/>
+          </a:fillRef>
+          <a:effectRef idx="2">
+            <a:schemeClr val="accent1"/>
+          </a:effectRef>
+          <a:fontRef idx="minor">
+            <a:schemeClr val="lt1"/>
+          </a:fontRef>
+        </p:style>
+        <p:txBody>
+          <a:bodyPr rtlCol="0" anchor="ctr"/>
+          <a:lstStyle/>
+          <a:p>
+            <a:pPr algn="ctr"/>
+          </a:p>
+        </p:txBody>
+      </p:sp>
+      <p:sp>
+        <p:nvSpPr>
+          <p:cNvPr id="11" name="TextBox 10"/>
+          <p:cNvSpPr txBox="1"/>
+          <p:nvPr/>
+        </p:nvSpPr>
+        <p:spPr>
+          <a:xfrm>
+            <a:off x="713232" y="2313432"/>
+            <a:ext cx="5038344" cy="3675887"/>
+          </a:xfrm>
+          <a:prstGeom prst="rect">
+            <a:avLst/>
+          </a:prstGeom>
+          <a:noFill/>
+        </p:spPr>
+        <p:txBody>
+          <a:bodyPr wrap="square" anchor="t" lIns="0" rIns="0" tIns="0" bIns="0">
+            <a:spAutoFit/>
+          </a:bodyPr>
+          <a:lstStyle/>
+          <a:p>
+            <a:r>
+              <a:rPr sz="850" b="1" i="0" spc="120">
+                <a:solidFill>
+                  <a:srgbClr val="006B6B"/>
+                </a:solidFill>
+                <a:latin typeface="Arial"/>
+              </a:rPr>
+              <a:t>Google NotebookLM -- Deep Research</a:t>
+            </a:r>
+          </a:p>
+          <a:p>
+            <a:pPr>
+              <a:spcBef>
+                <a:spcPts val="600"/>
+              </a:spcBef>
+            </a:pPr>
+            <a:r>
+              <a:rPr sz="1150" b="1" i="0">
+                <a:solidFill>
+                  <a:srgbClr val="1A1C22"/>
+                </a:solidFill>
+                <a:latin typeface="Arial"/>
+              </a:rPr>
+              <a:t>Ingest up to 50 sources: PDFs, Google Docs, URLs, YouTube transcripts.</a:t>
+            </a:r>
+          </a:p>
+          <a:p>
+            <a:pPr>
+              <a:lnSpc>
+                <a:spcPct val="115000"/>
+              </a:lnSpc>
+              <a:spcBef>
+                <a:spcPts val="600"/>
+              </a:spcBef>
+            </a:pPr>
+            <a:r>
+              <a:rPr sz="1100" b="1" i="0">
+                <a:solidFill>
+                  <a:srgbClr val="006B6B"/>
+                </a:solidFill>
+                <a:latin typeface="Arial"/>
+              </a:rPr>
+              <a:t>-&gt;  </a:t>
+            </a:r>
+            <a:r>
+              <a:rPr sz="1080" b="0" i="0">
+                <a:solidFill>
+                  <a:srgbClr val="52586A"/>
+                </a:solidFill>
+                <a:latin typeface="Arial"/>
+              </a:rPr>
+              <a:t>Generates structured summaries and thematic analysis across all sources simultaneously -- not one document at a time.</a:t>
+            </a:r>
+          </a:p>
+          <a:p>
+            <a:pPr>
+              <a:lnSpc>
+                <a:spcPct val="115000"/>
+              </a:lnSpc>
+              <a:spcBef>
+                <a:spcPts val="600"/>
+              </a:spcBef>
+            </a:pPr>
+            <a:r>
+              <a:rPr sz="1100" b="1" i="0">
+                <a:solidFill>
+                  <a:srgbClr val="006B6B"/>
+                </a:solidFill>
+                <a:latin typeface="Arial"/>
+              </a:rPr>
+              <a:t>-&gt;  </a:t>
+            </a:r>
+            <a:r>
+              <a:rPr sz="1080" b="0" i="0">
+                <a:solidFill>
+                  <a:srgbClr val="52586A"/>
+                </a:solidFill>
+                <a:latin typeface="Arial"/>
+              </a:rPr>
+              <a:t>Audio Overview: a podcast-style briefing on your uploaded sources. Useful for absorbing large standards documents during a commute.</a:t>
+            </a:r>
+          </a:p>
+          <a:p>
+            <a:pPr>
+              <a:lnSpc>
+                <a:spcPct val="115000"/>
+              </a:lnSpc>
+              <a:spcBef>
+                <a:spcPts val="600"/>
+              </a:spcBef>
+            </a:pPr>
+            <a:r>
+              <a:rPr sz="1100" b="1" i="0">
+                <a:solidFill>
+                  <a:srgbClr val="006B6B"/>
+                </a:solidFill>
+                <a:latin typeface="Arial"/>
+              </a:rPr>
+              <a:t>-&gt;  </a:t>
+            </a:r>
+            <a:r>
+              <a:rPr sz="1080" b="0" i="0">
+                <a:solidFill>
+                  <a:srgbClr val="52586A"/>
+                </a:solidFill>
+                <a:latin typeface="Arial"/>
+              </a:rPr>
+              <a:t>Mind maps and structured FAQs generated directly from your source set.</a:t>
+            </a:r>
+          </a:p>
+          <a:p>
+            <a:pPr>
+              <a:lnSpc>
+                <a:spcPct val="115000"/>
+              </a:lnSpc>
+              <a:spcBef>
+                <a:spcPts val="600"/>
+              </a:spcBef>
+            </a:pPr>
+            <a:r>
+              <a:rPr sz="1100" b="1" i="0">
+                <a:solidFill>
+                  <a:srgbClr val="006B6B"/>
+                </a:solidFill>
+                <a:latin typeface="Arial"/>
+              </a:rPr>
+              <a:t>-&gt;  </a:t>
+            </a:r>
+            <a:r>
+              <a:rPr sz="1080" b="0" i="0">
+                <a:solidFill>
+                  <a:srgbClr val="52586A"/>
+                </a:solidFill>
+                <a:latin typeface="Arial"/>
+              </a:rPr>
+              <a:t>Best for: synthesising project libraries, ingesting lengthy standards, literature reviews, pre-briefing before a complex meeting.</a:t>
+            </a:r>
+          </a:p>
+        </p:txBody>
+      </p:sp>
+      <p:sp>
+        <p:nvSpPr>
+          <p:cNvPr id="12" name="Rounded Rectangle 11"/>
+          <p:cNvSpPr/>
+          <p:nvPr/>
+        </p:nvSpPr>
+        <p:spPr>
+          <a:xfrm>
+            <a:off x="6291072" y="2148840"/>
+            <a:ext cx="5440680" cy="3931920"/>
+          </a:xfrm>
+          <a:prstGeom prst="roundRect">
+            <a:avLst>
+              <a:gd name="adj" fmla="val 6000"/>
+            </a:avLst>
+          </a:prstGeom>
+          <a:solidFill>
+            <a:srgbClr val="FFFFFF"/>
+          </a:solidFill>
+          <a:ln w="12700">
+            <a:solidFill>
+              <a:srgbClr val="E0E4EC"/>
+            </a:solidFill>
+          </a:ln>
+          <a:effectLst/>
+        </p:spPr>
+        <p:style>
+          <a:lnRef idx="1">
+            <a:schemeClr val="accent1"/>
+          </a:lnRef>
+          <a:fillRef idx="3">
+            <a:schemeClr val="accent1"/>
+          </a:fillRef>
+          <a:effectRef idx="2">
+            <a:schemeClr val="accent1"/>
+          </a:effectRef>
+          <a:fontRef idx="minor">
+            <a:schemeClr val="lt1"/>
+          </a:fontRef>
+        </p:style>
+        <p:txBody>
+          <a:bodyPr rtlCol="0" anchor="ctr"/>
+          <a:lstStyle/>
+          <a:p>
+            <a:pPr algn="ctr"/>
+          </a:p>
+        </p:txBody>
+      </p:sp>
+      <p:sp>
+        <p:nvSpPr>
+          <p:cNvPr id="13" name="Rectangle 12"/>
+          <p:cNvSpPr/>
+          <p:nvPr/>
+        </p:nvSpPr>
+        <p:spPr>
+          <a:xfrm>
+            <a:off x="6291072" y="2148840"/>
+            <a:ext cx="5440680" cy="54864"/>
+          </a:xfrm>
+          <a:prstGeom prst="rect">
+            <a:avLst/>
+          </a:prstGeom>
+          <a:solidFill>
+            <a:srgbClr val="7B4F00"/>
+          </a:solidFill>
+          <a:ln>
+            <a:noFill/>
+          </a:ln>
+          <a:effectLst/>
+        </p:spPr>
+        <p:style>
+          <a:lnRef idx="1">
+            <a:schemeClr val="accent1"/>
+          </a:lnRef>
+          <a:fillRef idx="3">
+            <a:schemeClr val="accent1"/>
+          </a:fillRef>
+          <a:effectRef idx="2">
+            <a:schemeClr val="accent1"/>
+          </a:effectRef>
+          <a:fontRef idx="minor">
+            <a:schemeClr val="lt1"/>
+          </a:fontRef>
+        </p:style>
+        <p:txBody>
+          <a:bodyPr rtlCol="0" anchor="ctr"/>
+          <a:lstStyle/>
+          <a:p>
+            <a:pPr algn="ctr"/>
+          </a:p>
+        </p:txBody>
+      </p:sp>
+      <p:sp>
+        <p:nvSpPr>
+          <p:cNvPr id="14" name="TextBox 13"/>
+          <p:cNvSpPr txBox="1"/>
+          <p:nvPr/>
+        </p:nvSpPr>
+        <p:spPr>
+          <a:xfrm>
+            <a:off x="6501384" y="2313432"/>
+            <a:ext cx="5038344" cy="3675887"/>
+          </a:xfrm>
+          <a:prstGeom prst="rect">
+            <a:avLst/>
+          </a:prstGeom>
+          <a:noFill/>
+        </p:spPr>
+        <p:txBody>
+          <a:bodyPr wrap="square" anchor="t" lIns="0" rIns="0" tIns="0" bIns="0">
+            <a:spAutoFit/>
+          </a:bodyPr>
+          <a:lstStyle/>
+          <a:p>
+            <a:r>
+              <a:rPr sz="850" b="1" i="0" spc="120">
+                <a:solidFill>
+                  <a:srgbClr val="7B4F00"/>
+                </a:solidFill>
+                <a:latin typeface="Arial"/>
+              </a:rPr>
+              <a:t>Notion AI -- Prompt Library &amp; Knowledge Base</a:t>
+            </a:r>
+          </a:p>
+          <a:p>
+            <a:pPr>
+              <a:spcBef>
+                <a:spcPts val="600"/>
+              </a:spcBef>
+            </a:pPr>
+            <a:r>
+              <a:rPr sz="1150" b="1" i="0">
+                <a:solidFill>
+                  <a:srgbClr val="1A1C22"/>
+                </a:solidFill>
+                <a:latin typeface="Arial"/>
+              </a:rPr>
+              <a:t>Workspace with built-in AI: databases, docs, and AI-assisted editing in one tool.</a:t>
+            </a:r>
+          </a:p>
+          <a:p>
+            <a:pPr>
+              <a:lnSpc>
+                <a:spcPct val="115000"/>
+              </a:lnSpc>
+              <a:spcBef>
+                <a:spcPts val="600"/>
+              </a:spcBef>
+            </a:pPr>
+            <a:r>
+              <a:rPr sz="1100" b="1" i="0">
+                <a:solidFill>
+                  <a:srgbClr val="7B4F00"/>
+                </a:solidFill>
+                <a:latin typeface="Arial"/>
+              </a:rPr>
+              <a:t>-&gt;  </a:t>
+            </a:r>
+            <a:r>
+              <a:rPr sz="1080" b="0" i="0">
+                <a:solidFill>
+                  <a:srgbClr val="52586A"/>
+                </a:solidFill>
+                <a:latin typeface="Arial"/>
+              </a:rPr>
+              <a:t>Prompt library: store, categorise, and iterate on prompts for recurring tasks. Anyone on the team can find and reuse proven prompts without starting from scratch.</a:t>
+            </a:r>
+          </a:p>
+          <a:p>
+            <a:pPr>
+              <a:lnSpc>
+                <a:spcPct val="115000"/>
+              </a:lnSpc>
+              <a:spcBef>
+                <a:spcPts val="600"/>
+              </a:spcBef>
+            </a:pPr>
+            <a:r>
+              <a:rPr sz="1100" b="1" i="0">
+                <a:solidFill>
+                  <a:srgbClr val="7B4F00"/>
+                </a:solidFill>
+                <a:latin typeface="Arial"/>
+              </a:rPr>
+              <a:t>-&gt;  </a:t>
+            </a:r>
+            <a:r>
+              <a:rPr sz="1080" b="0" i="0">
+                <a:solidFill>
+                  <a:srgbClr val="52586A"/>
+                </a:solidFill>
+                <a:latin typeface="Arial"/>
+              </a:rPr>
+              <a:t>AI summaries: any page can be summarised, condensed, or expanded on demand.</a:t>
+            </a:r>
+          </a:p>
+          <a:p>
+            <a:pPr>
+              <a:lnSpc>
+                <a:spcPct val="115000"/>
+              </a:lnSpc>
+              <a:spcBef>
+                <a:spcPts val="600"/>
+              </a:spcBef>
+            </a:pPr>
+            <a:r>
+              <a:rPr sz="1100" b="1" i="0">
+                <a:solidFill>
+                  <a:srgbClr val="7B4F00"/>
+                </a:solidFill>
+                <a:latin typeface="Arial"/>
+              </a:rPr>
+              <a:t>-&gt;  </a:t>
+            </a:r>
+            <a:r>
+              <a:rPr sz="1080" b="0" i="0">
+                <a:solidFill>
+                  <a:srgbClr val="52586A"/>
+                </a:solidFill>
+                <a:latin typeface="Arial"/>
+              </a:rPr>
+              <a:t>Meeting notes to action items: paste transcript, extract structured actions with owners and dates.</a:t>
+            </a:r>
+          </a:p>
+          <a:p>
+            <a:pPr>
+              <a:lnSpc>
+                <a:spcPct val="115000"/>
+              </a:lnSpc>
+              <a:spcBef>
+                <a:spcPts val="600"/>
+              </a:spcBef>
+            </a:pPr>
+            <a:r>
+              <a:rPr sz="1100" b="1" i="0">
+                <a:solidFill>
+                  <a:srgbClr val="7B4F00"/>
+                </a:solidFill>
+                <a:latin typeface="Arial"/>
+              </a:rPr>
+              <a:t>-&gt;  </a:t>
+            </a:r>
+            <a:r>
+              <a:rPr sz="1080" b="0" i="0">
+                <a:solidFill>
+                  <a:srgbClr val="52586A"/>
+                </a:solidFill>
+                <a:latin typeface="Arial"/>
+              </a:rPr>
+              <a:t>Best for: prompt management, team knowledge base, lightweight project documentation where SharePoint is overkill.</a:t>
+            </a:r>
+          </a:p>
+        </p:txBody>
+      </p:sp>
+    </p:spTree>
+  </p:cSld>
+  <p:clrMapOvr>
+    <a:masterClrMapping/>
+  </p:clrMapOvr>
+</p:sld>
+</file>
+
+<file path=ppt/slides/slide26.xml><?xml version="1.0" encoding="utf-8"?>
+<p:sld xmlns:a="http://schemas.openxmlformats.org/drawingml/2006/main" xmlns:p="http://schemas.openxmlformats.org/presentationml/2006/main" xmlns:r="http://schemas.openxmlformats.org/officeDocument/2006/relationships">
+  <p:cSld>
+    <p:spTree>
+      <p:nvGrpSpPr>
+        <p:cNvPr id="1" name=""/>
+        <p:cNvGrpSpPr/>
+        <p:nvPr/>
+      </p:nvGrpSpPr>
+      <p:grpSpPr/>
+      <p:sp>
+        <p:nvSpPr>
+          <p:cNvPr id="2" name="Rectangle 1"/>
+          <p:cNvSpPr/>
+          <p:nvPr/>
+        </p:nvSpPr>
+        <p:spPr>
+          <a:xfrm>
+            <a:off x="0" y="0"/>
+            <a:ext cx="12191695" cy="6858000"/>
+          </a:xfrm>
+          <a:prstGeom prst="rect">
+            <a:avLst/>
+          </a:prstGeom>
+          <a:solidFill>
+            <a:srgbClr val="F7F8FA"/>
+          </a:solidFill>
+          <a:ln>
+            <a:noFill/>
+          </a:ln>
+          <a:effectLst/>
+        </p:spPr>
+        <p:style>
+          <a:lnRef idx="1">
+            <a:schemeClr val="accent1"/>
+          </a:lnRef>
+          <a:fillRef idx="3">
+            <a:schemeClr val="accent1"/>
+          </a:fillRef>
+          <a:effectRef idx="2">
+            <a:schemeClr val="accent1"/>
+          </a:effectRef>
+          <a:fontRef idx="minor">
+            <a:schemeClr val="lt1"/>
+          </a:fontRef>
+        </p:style>
+        <p:txBody>
+          <a:bodyPr rtlCol="0" anchor="ctr"/>
+          <a:lstStyle/>
+          <a:p>
+            <a:pPr algn="ctr"/>
+          </a:p>
+        </p:txBody>
+      </p:sp>
+      <p:sp>
+        <p:nvSpPr>
+          <p:cNvPr id="3" name="TextBox 2"/>
+          <p:cNvSpPr txBox="1"/>
+          <p:nvPr/>
+        </p:nvSpPr>
+        <p:spPr>
+          <a:xfrm>
+            <a:off x="502920" y="457200"/>
+            <a:ext cx="10058400" cy="274320"/>
+          </a:xfrm>
+          <a:prstGeom prst="rect">
+            <a:avLst/>
+          </a:prstGeom>
+          <a:noFill/>
+        </p:spPr>
+        <p:txBody>
+          <a:bodyPr wrap="square" anchor="t" lIns="0" rIns="0" tIns="0" bIns="0">
+            <a:spAutoFit/>
+          </a:bodyPr>
+          <a:lstStyle/>
+          <a:p>
+            <a:r>
+              <a:rPr sz="1050" b="1" i="0" spc="220">
+                <a:solidFill>
+                  <a:srgbClr val="0070C0"/>
+                </a:solidFill>
+                <a:latin typeface="Arial"/>
+              </a:rPr>
+              <a:t>MORE ON TOOLS  .  MODEL COMPARISON</a:t>
+            </a:r>
+          </a:p>
+        </p:txBody>
+      </p:sp>
+      <p:sp>
+        <p:nvSpPr>
+          <p:cNvPr id="4" name="TextBox 3"/>
+          <p:cNvSpPr txBox="1"/>
+          <p:nvPr/>
+        </p:nvSpPr>
+        <p:spPr>
+          <a:xfrm>
+            <a:off x="502920" y="749808"/>
+            <a:ext cx="10515600" cy="1097280"/>
+          </a:xfrm>
+          <a:prstGeom prst="rect">
+            <a:avLst/>
+          </a:prstGeom>
+          <a:noFill/>
+        </p:spPr>
+        <p:txBody>
+          <a:bodyPr wrap="square" anchor="t" lIns="0" rIns="0" tIns="0" bIns="0">
+            <a:spAutoFit/>
+          </a:bodyPr>
+          <a:lstStyle/>
+          <a:p>
+            <a:r>
+              <a:rPr sz="3300" b="0" i="0">
+                <a:solidFill>
+                  <a:srgbClr val="1A1C22"/>
+                </a:solidFill>
+                <a:latin typeface="Georgia"/>
+              </a:rPr>
+              <a:t>Gemini  vs  </a:t>
+            </a:r>
+            <a:r>
+              <a:rPr sz="3300" b="0" i="0">
+                <a:solidFill>
+                  <a:srgbClr val="0070C0"/>
+                </a:solidFill>
+                <a:latin typeface="Georgia"/>
+              </a:rPr>
+              <a:t>Claude</a:t>
+            </a:r>
+          </a:p>
+        </p:txBody>
+      </p:sp>
+      <p:sp>
+        <p:nvSpPr>
+          <p:cNvPr id="5" name="TextBox 4"/>
+          <p:cNvSpPr txBox="1"/>
+          <p:nvPr/>
+        </p:nvSpPr>
+        <p:spPr>
+          <a:xfrm>
+            <a:off x="521207" y="1572768"/>
+            <a:ext cx="9601200" cy="640080"/>
+          </a:xfrm>
+          <a:prstGeom prst="rect">
+            <a:avLst/>
+          </a:prstGeom>
+          <a:noFill/>
+        </p:spPr>
+        <p:txBody>
+          <a:bodyPr wrap="square" anchor="t" lIns="0" rIns="0" tIns="0" bIns="0">
+            <a:spAutoFit/>
+          </a:bodyPr>
+          <a:lstStyle/>
+          <a:p>
+            <a:pPr>
+              <a:lnSpc>
+                <a:spcPct val="130000"/>
+              </a:lnSpc>
+            </a:pPr>
+            <a:r>
+              <a:rPr sz="1300" b="0" i="0">
+                <a:solidFill>
+                  <a:srgbClr val="52586A"/>
+                </a:solidFill>
+                <a:latin typeface="Arial"/>
+              </a:rPr>
+              <a:t>Both are frontier-class. The question is fit for purpose -- and for agent building and office work, the answer is clear.</a:t>
+            </a:r>
+          </a:p>
+        </p:txBody>
+      </p:sp>
+      <p:sp>
+        <p:nvSpPr>
+          <p:cNvPr id="6" name="Rectangle 5"/>
+          <p:cNvSpPr/>
+          <p:nvPr/>
+        </p:nvSpPr>
+        <p:spPr>
+          <a:xfrm>
+            <a:off x="502920" y="6455664"/>
+            <a:ext cx="11183112" cy="9525"/>
+          </a:xfrm>
+          <a:prstGeom prst="rect">
+            <a:avLst/>
+          </a:prstGeom>
+          <a:solidFill>
+            <a:srgbClr val="E0E4EC"/>
+          </a:solidFill>
+          <a:ln>
+            <a:noFill/>
+          </a:ln>
+          <a:effectLst/>
+        </p:spPr>
+        <p:style>
+          <a:lnRef idx="1">
+            <a:schemeClr val="accent1"/>
+          </a:lnRef>
+          <a:fillRef idx="3">
+            <a:schemeClr val="accent1"/>
+          </a:fillRef>
+          <a:effectRef idx="2">
+            <a:schemeClr val="accent1"/>
+          </a:effectRef>
+          <a:fontRef idx="minor">
+            <a:schemeClr val="lt1"/>
+          </a:fontRef>
+        </p:style>
+        <p:txBody>
+          <a:bodyPr rtlCol="0" anchor="ctr"/>
+          <a:lstStyle/>
+          <a:p>
+            <a:pPr algn="ctr"/>
+          </a:p>
+        </p:txBody>
+      </p:sp>
+      <p:sp>
+        <p:nvSpPr>
+          <p:cNvPr id="7" name="TextBox 6"/>
+          <p:cNvSpPr txBox="1"/>
+          <p:nvPr/>
+        </p:nvSpPr>
+        <p:spPr>
+          <a:xfrm>
+            <a:off x="502920" y="6510528"/>
+            <a:ext cx="8229600" cy="274320"/>
+          </a:xfrm>
+          <a:prstGeom prst="rect">
+            <a:avLst/>
+          </a:prstGeom>
+          <a:noFill/>
+        </p:spPr>
+        <p:txBody>
+          <a:bodyPr wrap="square" anchor="t" lIns="0" rIns="0" tIns="0" bIns="0">
+            <a:spAutoFit/>
+          </a:bodyPr>
+          <a:lstStyle/>
+          <a:p>
+            <a:r>
+              <a:rPr sz="850" b="0" i="0" spc="80">
+                <a:solidFill>
+                  <a:srgbClr val="8A93A8"/>
+                </a:solidFill>
+                <a:latin typeface="Arial"/>
+              </a:rPr>
+              <a:t>AI Implementation Strategy  .  Systems Engineering</a:t>
+            </a:r>
+          </a:p>
+        </p:txBody>
+      </p:sp>
+      <p:sp>
+        <p:nvSpPr>
+          <p:cNvPr id="8" name="TextBox 7"/>
+          <p:cNvSpPr txBox="1"/>
+          <p:nvPr/>
+        </p:nvSpPr>
+        <p:spPr>
+          <a:xfrm>
+            <a:off x="10789920" y="6510528"/>
+            <a:ext cx="896112" cy="274320"/>
+          </a:xfrm>
+          <a:prstGeom prst="rect">
+            <a:avLst/>
+          </a:prstGeom>
+          <a:noFill/>
+        </p:spPr>
+        <p:txBody>
+          <a:bodyPr wrap="square" anchor="t" lIns="0" rIns="0" tIns="0" bIns="0">
+            <a:spAutoFit/>
+          </a:bodyPr>
+          <a:lstStyle/>
+          <a:p>
+            <a:pPr algn="r"/>
+            <a:r>
+              <a:rPr sz="850" b="0" i="0" spc="80">
+                <a:solidFill>
+                  <a:srgbClr val="8A93A8"/>
+                </a:solidFill>
+                <a:latin typeface="Arial"/>
+              </a:rPr>
+              <a:t>26</a:t>
+            </a:r>
+          </a:p>
+        </p:txBody>
+      </p:sp>
+      <p:sp>
+        <p:nvSpPr>
+          <p:cNvPr id="9" name="Rounded Rectangle 8"/>
+          <p:cNvSpPr/>
+          <p:nvPr/>
+        </p:nvSpPr>
+        <p:spPr>
+          <a:xfrm>
+            <a:off x="502920" y="2194560"/>
+            <a:ext cx="5440680" cy="3931920"/>
+          </a:xfrm>
+          <a:prstGeom prst="roundRect">
+            <a:avLst>
+              <a:gd name="adj" fmla="val 4000"/>
+            </a:avLst>
+          </a:prstGeom>
+          <a:solidFill>
+            <a:srgbClr val="FFFFFF"/>
+          </a:solidFill>
+          <a:ln w="12700">
+            <a:solidFill>
+              <a:srgbClr val="E0E4EC"/>
+            </a:solidFill>
+          </a:ln>
+          <a:effectLst/>
+        </p:spPr>
+        <p:style>
+          <a:lnRef idx="1">
+            <a:schemeClr val="accent1"/>
+          </a:lnRef>
+          <a:fillRef idx="3">
+            <a:schemeClr val="accent1"/>
+          </a:fillRef>
+          <a:effectRef idx="2">
+            <a:schemeClr val="accent1"/>
+          </a:effectRef>
+          <a:fontRef idx="minor">
+            <a:schemeClr val="lt1"/>
+          </a:fontRef>
+        </p:style>
+        <p:txBody>
+          <a:bodyPr rtlCol="0" anchor="ctr"/>
+          <a:lstStyle/>
+          <a:p>
+            <a:pPr algn="ctr"/>
+          </a:p>
+        </p:txBody>
+      </p:sp>
+      <p:sp>
+        <p:nvSpPr>
+          <p:cNvPr id="10" name="Rectangle 9"/>
+          <p:cNvSpPr/>
+          <p:nvPr/>
+        </p:nvSpPr>
+        <p:spPr>
+          <a:xfrm>
+            <a:off x="502920" y="2194560"/>
+            <a:ext cx="5440680" cy="54864"/>
+          </a:xfrm>
+          <a:prstGeom prst="rect">
+            <a:avLst/>
+          </a:prstGeom>
+          <a:solidFill>
+            <a:srgbClr val="006B6B"/>
+          </a:solidFill>
+          <a:ln>
+            <a:noFill/>
+          </a:ln>
+          <a:effectLst/>
+        </p:spPr>
+        <p:style>
+          <a:lnRef idx="1">
+            <a:schemeClr val="accent1"/>
+          </a:lnRef>
+          <a:fillRef idx="3">
+            <a:schemeClr val="accent1"/>
+          </a:fillRef>
+          <a:effectRef idx="2">
+            <a:schemeClr val="accent1"/>
+          </a:effectRef>
+          <a:fontRef idx="minor">
+            <a:schemeClr val="lt1"/>
+          </a:fontRef>
+        </p:style>
+        <p:txBody>
+          <a:bodyPr rtlCol="0" anchor="ctr"/>
+          <a:lstStyle/>
+          <a:p>
+            <a:pPr algn="ctr"/>
+          </a:p>
+        </p:txBody>
+      </p:sp>
+      <p:sp>
+        <p:nvSpPr>
+          <p:cNvPr id="11" name="TextBox 10"/>
+          <p:cNvSpPr txBox="1"/>
+          <p:nvPr/>
+        </p:nvSpPr>
+        <p:spPr>
+          <a:xfrm>
+            <a:off x="731520" y="2395728"/>
+            <a:ext cx="4983480" cy="3566160"/>
+          </a:xfrm>
+          <a:prstGeom prst="rect">
+            <a:avLst/>
+          </a:prstGeom>
+          <a:noFill/>
+        </p:spPr>
+        <p:txBody>
+          <a:bodyPr wrap="square" anchor="t" lIns="0" rIns="0" tIns="0" bIns="0">
+            <a:spAutoFit/>
+          </a:bodyPr>
+          <a:lstStyle/>
+          <a:p>
+            <a:r>
+              <a:rPr sz="900" b="1" i="0" spc="120">
+                <a:solidFill>
+                  <a:srgbClr val="006B6B"/>
+                </a:solidFill>
+                <a:latin typeface="Arial"/>
+              </a:rPr>
+              <a:t>GEMINI  .  GOOGLE DEEPMIND</a:t>
+            </a:r>
+          </a:p>
+          <a:p>
+            <a:pPr>
+              <a:spcBef>
+                <a:spcPts val="400"/>
+              </a:spcBef>
+            </a:pPr>
+            <a:r>
+              <a:rPr sz="1450" b="1" i="0">
+                <a:solidFill>
+                  <a:srgbClr val="1A1C22"/>
+                </a:solidFill>
+                <a:latin typeface="Georgia"/>
+              </a:rPr>
+              <a:t>Dedicated multimodal -- purpose-built for cross-modal work</a:t>
+            </a:r>
+          </a:p>
+          <a:p>
+            <a:pPr>
+              <a:lnSpc>
+                <a:spcPct val="113000"/>
+              </a:lnSpc>
+              <a:spcBef>
+                <a:spcPts val="700"/>
+              </a:spcBef>
+            </a:pPr>
+            <a:r>
+              <a:rPr sz="1100" b="1" i="0">
+                <a:solidFill>
+                  <a:srgbClr val="006B6B"/>
+                </a:solidFill>
+                <a:latin typeface="Arial"/>
+              </a:rPr>
+              <a:t>.  </a:t>
+            </a:r>
+            <a:r>
+              <a:rPr sz="1100" b="0" i="0">
+                <a:solidFill>
+                  <a:srgbClr val="52586A"/>
+                </a:solidFill>
+                <a:latin typeface="Arial"/>
+              </a:rPr>
+              <a:t>Native image generation (Imagen) -- best-in-class text-to-image from a chat interface</a:t>
+            </a:r>
+          </a:p>
+          <a:p>
+            <a:pPr>
+              <a:lnSpc>
+                <a:spcPct val="113000"/>
+              </a:lnSpc>
+              <a:spcBef>
+                <a:spcPts val="700"/>
+              </a:spcBef>
+            </a:pPr>
+            <a:r>
+              <a:rPr sz="1100" b="1" i="0">
+                <a:solidFill>
+                  <a:srgbClr val="006B6B"/>
+                </a:solidFill>
+                <a:latin typeface="Arial"/>
+              </a:rPr>
+              <a:t>.  </a:t>
+            </a:r>
+            <a:r>
+              <a:rPr sz="1100" b="0" i="0">
+                <a:solidFill>
+                  <a:srgbClr val="52586A"/>
+                </a:solidFill>
+                <a:latin typeface="Arial"/>
+              </a:rPr>
+              <a:t>Video understanding and generation (Veo) at a depth other models don't match</a:t>
+            </a:r>
+          </a:p>
+          <a:p>
+            <a:pPr>
+              <a:lnSpc>
+                <a:spcPct val="113000"/>
+              </a:lnSpc>
+              <a:spcBef>
+                <a:spcPts val="700"/>
+              </a:spcBef>
+            </a:pPr>
+            <a:r>
+              <a:rPr sz="1100" b="1" i="0">
+                <a:solidFill>
+                  <a:srgbClr val="006B6B"/>
+                </a:solidFill>
+                <a:latin typeface="Arial"/>
+              </a:rPr>
+              <a:t>.  </a:t>
+            </a:r>
+            <a:r>
+              <a:rPr sz="1100" b="0" i="0">
+                <a:solidFill>
+                  <a:srgbClr val="52586A"/>
+                </a:solidFill>
+                <a:latin typeface="Arial"/>
+              </a:rPr>
+              <a:t>Deep Research: multi-step web research agent producing long-form reports with citations</a:t>
+            </a:r>
+          </a:p>
+          <a:p>
+            <a:pPr>
+              <a:lnSpc>
+                <a:spcPct val="113000"/>
+              </a:lnSpc>
+              <a:spcBef>
+                <a:spcPts val="700"/>
+              </a:spcBef>
+            </a:pPr>
+            <a:r>
+              <a:rPr sz="1100" b="1" i="0">
+                <a:solidFill>
+                  <a:srgbClr val="006B6B"/>
+                </a:solidFill>
+                <a:latin typeface="Arial"/>
+              </a:rPr>
+              <a:t>.  </a:t>
+            </a:r>
+            <a:r>
+              <a:rPr sz="1100" b="0" i="0">
+                <a:solidFill>
+                  <a:srgbClr val="52586A"/>
+                </a:solidFill>
+                <a:latin typeface="Arial"/>
+              </a:rPr>
+              <a:t>Google ecosystem binding -- Docs, Sheets, Drive, Gmail, Meet integration</a:t>
+            </a:r>
+          </a:p>
+          <a:p>
+            <a:pPr>
+              <a:lnSpc>
+                <a:spcPct val="113000"/>
+              </a:lnSpc>
+              <a:spcBef>
+                <a:spcPts val="700"/>
+              </a:spcBef>
+            </a:pPr>
+            <a:r>
+              <a:rPr sz="1100" b="1" i="0">
+                <a:solidFill>
+                  <a:srgbClr val="006B6B"/>
+                </a:solidFill>
+                <a:latin typeface="Arial"/>
+              </a:rPr>
+              <a:t>.  </a:t>
+            </a:r>
+            <a:r>
+              <a:rPr sz="1100" b="0" i="0">
+                <a:solidFill>
+                  <a:srgbClr val="52586A"/>
+                </a:solidFill>
+                <a:latin typeface="Arial"/>
+              </a:rPr>
+              <a:t>I would choose Gemini for: any workflow where image or video creation is the primary output</a:t>
+            </a:r>
+          </a:p>
+        </p:txBody>
+      </p:sp>
+      <p:sp>
+        <p:nvSpPr>
+          <p:cNvPr id="12" name="Rounded Rectangle 11"/>
+          <p:cNvSpPr/>
+          <p:nvPr/>
+        </p:nvSpPr>
+        <p:spPr>
+          <a:xfrm>
+            <a:off x="6245352" y="2194560"/>
+            <a:ext cx="5440680" cy="3931920"/>
+          </a:xfrm>
+          <a:prstGeom prst="roundRect">
+            <a:avLst>
+              <a:gd name="adj" fmla="val 4000"/>
+            </a:avLst>
+          </a:prstGeom>
+          <a:solidFill>
+            <a:srgbClr val="E6EEF7"/>
+          </a:solidFill>
+          <a:ln w="19050">
+            <a:solidFill>
+              <a:srgbClr val="0070C0"/>
+            </a:solidFill>
+          </a:ln>
+          <a:effectLst/>
+        </p:spPr>
+        <p:style>
+          <a:lnRef idx="1">
+            <a:schemeClr val="accent1"/>
+          </a:lnRef>
+          <a:fillRef idx="3">
+            <a:schemeClr val="accent1"/>
+          </a:fillRef>
+          <a:effectRef idx="2">
+            <a:schemeClr val="accent1"/>
+          </a:effectRef>
+          <a:fontRef idx="minor">
+            <a:schemeClr val="lt1"/>
+          </a:fontRef>
+        </p:style>
+        <p:txBody>
+          <a:bodyPr rtlCol="0" anchor="ctr"/>
+          <a:lstStyle/>
+          <a:p>
+            <a:pPr algn="ctr"/>
+          </a:p>
+        </p:txBody>
+      </p:sp>
+      <p:sp>
+        <p:nvSpPr>
+          <p:cNvPr id="13" name="Rectangle 12"/>
+          <p:cNvSpPr/>
+          <p:nvPr/>
+        </p:nvSpPr>
+        <p:spPr>
+          <a:xfrm>
+            <a:off x="6245352" y="2194560"/>
+            <a:ext cx="5440680" cy="54864"/>
+          </a:xfrm>
+          <a:prstGeom prst="rect">
+            <a:avLst/>
+          </a:prstGeom>
+          <a:solidFill>
+            <a:srgbClr val="0070C0"/>
+          </a:solidFill>
+          <a:ln>
+            <a:noFill/>
+          </a:ln>
+          <a:effectLst/>
+        </p:spPr>
+        <p:style>
+          <a:lnRef idx="1">
+            <a:schemeClr val="accent1"/>
+          </a:lnRef>
+          <a:fillRef idx="3">
+            <a:schemeClr val="accent1"/>
+          </a:fillRef>
+          <a:effectRef idx="2">
+            <a:schemeClr val="accent1"/>
+          </a:effectRef>
+          <a:fontRef idx="minor">
+            <a:schemeClr val="lt1"/>
+          </a:fontRef>
+        </p:style>
+        <p:txBody>
+          <a:bodyPr rtlCol="0" anchor="ctr"/>
+          <a:lstStyle/>
+          <a:p>
+            <a:pPr algn="ctr"/>
+          </a:p>
+        </p:txBody>
+      </p:sp>
+      <p:sp>
+        <p:nvSpPr>
+          <p:cNvPr id="14" name="TextBox 13"/>
+          <p:cNvSpPr txBox="1"/>
+          <p:nvPr/>
+        </p:nvSpPr>
+        <p:spPr>
+          <a:xfrm>
+            <a:off x="6473952" y="2395728"/>
+            <a:ext cx="4983480" cy="3566160"/>
+          </a:xfrm>
+          <a:prstGeom prst="rect">
+            <a:avLst/>
+          </a:prstGeom>
+          <a:noFill/>
+        </p:spPr>
+        <p:txBody>
+          <a:bodyPr wrap="square" anchor="t" lIns="0" rIns="0" tIns="0" bIns="0">
+            <a:spAutoFit/>
+          </a:bodyPr>
+          <a:lstStyle/>
+          <a:p>
+            <a:r>
+              <a:rPr sz="900" b="1" i="0" spc="120">
+                <a:solidFill>
+                  <a:srgbClr val="0070C0"/>
+                </a:solidFill>
+                <a:latin typeface="Arial"/>
+              </a:rPr>
+              <a:t>CLAUDE  .  ANTHROPIC  .  MY CHOICE</a:t>
+            </a:r>
+          </a:p>
+          <a:p>
+            <a:pPr>
+              <a:spcBef>
+                <a:spcPts val="400"/>
+              </a:spcBef>
+            </a:pPr>
+            <a:r>
+              <a:rPr sz="1450" b="1" i="0">
+                <a:solidFill>
+                  <a:srgbClr val="002060"/>
+                </a:solidFill>
+                <a:latin typeface="Georgia"/>
+              </a:rPr>
+              <a:t>Agent building and office work -- best available solution</a:t>
+            </a:r>
+          </a:p>
+          <a:p>
+            <a:pPr>
+              <a:lnSpc>
+                <a:spcPct val="113000"/>
+              </a:lnSpc>
+              <a:spcBef>
+                <a:spcPts val="700"/>
+              </a:spcBef>
+            </a:pPr>
+            <a:r>
+              <a:rPr sz="1100" b="1" i="0">
+                <a:solidFill>
+                  <a:srgbClr val="0070C0"/>
+                </a:solidFill>
+                <a:latin typeface="Arial"/>
+              </a:rPr>
+              <a:t>-&gt;  </a:t>
+            </a:r>
+            <a:r>
+              <a:rPr sz="1100" b="0" i="0">
+                <a:solidFill>
+                  <a:srgbClr val="0D3060"/>
+                </a:solidFill>
+                <a:latin typeface="Arial"/>
+              </a:rPr>
+              <a:t>Agent building: MCP ecosystem, Claude Code, multi-step reasoning -- the most mature agent stack today</a:t>
+            </a:r>
+          </a:p>
+          <a:p>
+            <a:pPr>
+              <a:lnSpc>
+                <a:spcPct val="113000"/>
+              </a:lnSpc>
+              <a:spcBef>
+                <a:spcPts val="700"/>
+              </a:spcBef>
+            </a:pPr>
+            <a:r>
+              <a:rPr sz="1100" b="1" i="0">
+                <a:solidFill>
+                  <a:srgbClr val="0070C0"/>
+                </a:solidFill>
+                <a:latin typeface="Arial"/>
+              </a:rPr>
+              <a:t>-&gt;  </a:t>
+            </a:r>
+            <a:r>
+              <a:rPr sz="1100" b="0" i="0">
+                <a:solidFill>
+                  <a:srgbClr val="0D3060"/>
+                </a:solidFill>
+                <a:latin typeface="Arial"/>
+              </a:rPr>
+              <a:t>Office integration: native Excel and PowerPoint access via Desktop App (no copy-paste) -- Gemini binds to Google, not Microsoft</a:t>
+            </a:r>
+          </a:p>
+          <a:p>
+            <a:pPr>
+              <a:lnSpc>
+                <a:spcPct val="113000"/>
+              </a:lnSpc>
+              <a:spcBef>
+                <a:spcPts val="700"/>
+              </a:spcBef>
+            </a:pPr>
+            <a:r>
+              <a:rPr sz="1100" b="1" i="0">
+                <a:solidFill>
+                  <a:srgbClr val="0070C0"/>
+                </a:solidFill>
+                <a:latin typeface="Arial"/>
+              </a:rPr>
+              <a:t>-&gt;  </a:t>
+            </a:r>
+            <a:r>
+              <a:rPr sz="1100" b="0" i="0">
+                <a:solidFill>
+                  <a:srgbClr val="0D3060"/>
+                </a:solidFill>
+                <a:latin typeface="Arial"/>
+              </a:rPr>
+              <a:t>Instruction-following and long-context reliability -- critical when building on top of it</a:t>
+            </a:r>
+          </a:p>
+          <a:p>
+            <a:pPr>
+              <a:lnSpc>
+                <a:spcPct val="113000"/>
+              </a:lnSpc>
+              <a:spcBef>
+                <a:spcPts val="700"/>
+              </a:spcBef>
+            </a:pPr>
+            <a:r>
+              <a:rPr sz="1100" b="1" i="0">
+                <a:solidFill>
+                  <a:srgbClr val="0070C0"/>
+                </a:solidFill>
+                <a:latin typeface="Arial"/>
+              </a:rPr>
+              <a:t>-&gt;  </a:t>
+            </a:r>
+            <a:r>
+              <a:rPr sz="1100" b="0" i="0">
+                <a:solidFill>
+                  <a:srgbClr val="0D3060"/>
+                </a:solidFill>
+                <a:latin typeface="Arial"/>
+              </a:rPr>
+              <a:t>Safety architecture -- predictable, auditable refusals; essential for enterprise deployment</a:t>
+            </a:r>
+          </a:p>
+          <a:p>
+            <a:pPr>
+              <a:lnSpc>
+                <a:spcPct val="113000"/>
+              </a:lnSpc>
+              <a:spcBef>
+                <a:spcPts val="700"/>
+              </a:spcBef>
+            </a:pPr>
+            <a:r>
+              <a:rPr sz="1100" b="1" i="0">
+                <a:solidFill>
+                  <a:srgbClr val="0070C0"/>
+                </a:solidFill>
+                <a:latin typeface="Arial"/>
+              </a:rPr>
+              <a:t>-&gt;  </a:t>
+            </a:r>
+            <a:r>
+              <a:rPr sz="1100" b="0" i="0">
+                <a:solidFill>
+                  <a:srgbClr val="0D3060"/>
+                </a:solidFill>
+                <a:latin typeface="Arial"/>
+              </a:rPr>
+              <a:t>I would choose Claude for: any workflow involving office automation, agents, or building AI products</a:t>
+            </a:r>
+          </a:p>
+        </p:txBody>
+      </p:sp>
+    </p:spTree>
+  </p:cSld>
+  <p:clrMapOvr>
+    <a:masterClrMapping/>
+  </p:clrMapOvr>
+</p:sld>
+</file>
+
+<file path=ppt/slides/slide27.xml><?xml version="1.0" encoding="utf-8"?>
+<p:sld xmlns:a="http://schemas.openxmlformats.org/drawingml/2006/main" xmlns:p="http://schemas.openxmlformats.org/presentationml/2006/main" xmlns:r="http://schemas.openxmlformats.org/officeDocument/2006/relationships">
+  <p:cSld>
+    <p:spTree>
+      <p:nvGrpSpPr>
+        <p:cNvPr id="1" name=""/>
+        <p:cNvGrpSpPr/>
+        <p:nvPr/>
+      </p:nvGrpSpPr>
+      <p:grpSpPr/>
+      <p:sp>
+        <p:nvSpPr>
+          <p:cNvPr id="2" name="Rectangle 1"/>
+          <p:cNvSpPr/>
+          <p:nvPr/>
+        </p:nvSpPr>
+        <p:spPr>
+          <a:xfrm>
+            <a:off x="0" y="0"/>
+            <a:ext cx="12191695" cy="6858000"/>
+          </a:xfrm>
+          <a:prstGeom prst="rect">
+            <a:avLst/>
+          </a:prstGeom>
+          <a:solidFill>
+            <a:srgbClr val="090D18"/>
+          </a:solidFill>
+          <a:ln>
+            <a:noFill/>
+          </a:ln>
+          <a:effectLst/>
+        </p:spPr>
+        <p:style>
+          <a:lnRef idx="1">
+            <a:schemeClr val="accent1"/>
+          </a:lnRef>
+          <a:fillRef idx="3">
+            <a:schemeClr val="accent1"/>
+          </a:fillRef>
+          <a:effectRef idx="2">
+            <a:schemeClr val="accent1"/>
+          </a:effectRef>
+          <a:fontRef idx="minor">
+            <a:schemeClr val="lt1"/>
+          </a:fontRef>
+        </p:style>
+        <p:txBody>
+          <a:bodyPr rtlCol="0" anchor="ctr"/>
+          <a:lstStyle/>
+          <a:p>
+            <a:pPr algn="ctr"/>
+          </a:p>
+        </p:txBody>
+      </p:sp>
+      <p:sp>
+        <p:nvSpPr>
+          <p:cNvPr id="3" name="Rectangle 2"/>
+          <p:cNvSpPr/>
+          <p:nvPr/>
+        </p:nvSpPr>
+        <p:spPr>
+          <a:xfrm>
+            <a:off x="502920" y="2331720"/>
+            <a:ext cx="457200" cy="54864"/>
+          </a:xfrm>
+          <a:prstGeom prst="rect">
+            <a:avLst/>
+          </a:prstGeom>
+          <a:solidFill>
+            <a:srgbClr val="0070C0"/>
+          </a:solidFill>
+          <a:ln>
+            <a:noFill/>
+          </a:ln>
+          <a:effectLst/>
+        </p:spPr>
+        <p:style>
+          <a:lnRef idx="1">
+            <a:schemeClr val="accent1"/>
+          </a:lnRef>
+          <a:fillRef idx="3">
+            <a:schemeClr val="accent1"/>
+          </a:fillRef>
+          <a:effectRef idx="2">
+            <a:schemeClr val="accent1"/>
+          </a:effectRef>
+          <a:fontRef idx="minor">
+            <a:schemeClr val="lt1"/>
+          </a:fontRef>
+        </p:style>
+        <p:txBody>
+          <a:bodyPr rtlCol="0" anchor="ctr"/>
+          <a:lstStyle/>
+          <a:p>
+            <a:pPr algn="ctr"/>
+          </a:p>
+        </p:txBody>
+      </p:sp>
+      <p:sp>
+        <p:nvSpPr>
+          <p:cNvPr id="4" name="TextBox 3"/>
+          <p:cNvSpPr txBox="1"/>
+          <p:nvPr/>
+        </p:nvSpPr>
+        <p:spPr>
+          <a:xfrm>
+            <a:off x="502920" y="1874519"/>
+            <a:ext cx="10058400" cy="274320"/>
+          </a:xfrm>
+          <a:prstGeom prst="rect">
+            <a:avLst/>
+          </a:prstGeom>
+          <a:noFill/>
+        </p:spPr>
+        <p:txBody>
+          <a:bodyPr wrap="square" anchor="t" lIns="0" rIns="0" tIns="0" bIns="0">
+            <a:spAutoFit/>
+          </a:bodyPr>
+          <a:lstStyle/>
+          <a:p>
+            <a:r>
+              <a:rPr sz="1050" b="1" i="0" spc="220">
+                <a:solidFill>
+                  <a:srgbClr val="0070C0"/>
+                </a:solidFill>
+                <a:latin typeface="Arial"/>
+              </a:rPr>
+              <a:t>SECTION 05</a:t>
+            </a:r>
+          </a:p>
+        </p:txBody>
+      </p:sp>
+      <p:sp>
+        <p:nvSpPr>
+          <p:cNvPr id="5" name="TextBox 4"/>
+          <p:cNvSpPr txBox="1"/>
+          <p:nvPr/>
+        </p:nvSpPr>
+        <p:spPr>
+          <a:xfrm>
+            <a:off x="457200" y="2606040"/>
+            <a:ext cx="10972800" cy="1463040"/>
+          </a:xfrm>
+          <a:prstGeom prst="rect">
+            <a:avLst/>
+          </a:prstGeom>
+          <a:noFill/>
+        </p:spPr>
+        <p:txBody>
+          <a:bodyPr wrap="square" anchor="t" lIns="0" rIns="0" tIns="0" bIns="0">
+            <a:spAutoFit/>
+          </a:bodyPr>
+          <a:lstStyle/>
+          <a:p>
+            <a:r>
+              <a:rPr sz="4600" b="0" i="0">
+                <a:solidFill>
+                  <a:srgbClr val="FFFFFF"/>
+                </a:solidFill>
+                <a:latin typeface="Georgia"/>
+              </a:rPr>
+              <a:t>The </a:t>
+            </a:r>
+            <a:r>
+              <a:rPr sz="4600" b="0" i="0">
+                <a:solidFill>
+                  <a:srgbClr val="0070C0"/>
+                </a:solidFill>
+                <a:latin typeface="Georgia"/>
+              </a:rPr>
+              <a:t>Research Project</a:t>
+            </a:r>
+          </a:p>
+        </p:txBody>
+      </p:sp>
+      <p:sp>
+        <p:nvSpPr>
+          <p:cNvPr id="6" name="TextBox 5"/>
+          <p:cNvSpPr txBox="1"/>
+          <p:nvPr/>
+        </p:nvSpPr>
+        <p:spPr>
+          <a:xfrm>
+            <a:off x="521207" y="3977639"/>
+            <a:ext cx="10058400" cy="548640"/>
+          </a:xfrm>
+          <a:prstGeom prst="rect">
+            <a:avLst/>
+          </a:prstGeom>
+          <a:noFill/>
+        </p:spPr>
+        <p:txBody>
+          <a:bodyPr wrap="square" anchor="t" lIns="0" rIns="0" tIns="0" bIns="0">
+            <a:spAutoFit/>
+          </a:bodyPr>
+          <a:lstStyle/>
+          <a:p>
+            <a:r>
+              <a:rPr sz="1400" b="0" i="0">
+                <a:solidFill>
+                  <a:srgbClr val="8A93A8"/>
+                </a:solidFill>
+                <a:latin typeface="Arial"/>
+              </a:rPr>
+              <a:t>Strategic analysis  .  experimentation in Claude  .  product-architecture principles</a:t>
+            </a:r>
+          </a:p>
+        </p:txBody>
+      </p:sp>
+      <p:sp>
+        <p:nvSpPr>
+          <p:cNvPr id="7" name="TextBox 6"/>
+          <p:cNvSpPr txBox="1"/>
+          <p:nvPr/>
+        </p:nvSpPr>
+        <p:spPr>
+          <a:xfrm>
+            <a:off x="10789920" y="6400800"/>
+            <a:ext cx="896112" cy="274320"/>
+          </a:xfrm>
+          <a:prstGeom prst="rect">
+            <a:avLst/>
+          </a:prstGeom>
+          <a:noFill/>
+        </p:spPr>
+        <p:txBody>
+          <a:bodyPr wrap="square" anchor="t" lIns="0" rIns="0" tIns="0" bIns="0">
+            <a:spAutoFit/>
+          </a:bodyPr>
+          <a:lstStyle/>
+          <a:p>
+            <a:pPr algn="r"/>
+            <a:r>
+              <a:rPr sz="850" b="0" i="0" spc="80">
+                <a:solidFill>
+                  <a:srgbClr val="4A5270"/>
+                </a:solidFill>
+                <a:latin typeface="Arial"/>
+              </a:rPr>
+              <a:t>27</a:t>
+            </a:r>
+          </a:p>
+        </p:txBody>
+      </p:sp>
+    </p:spTree>
+  </p:cSld>
+  <p:clrMapOvr>
+    <a:masterClrMapping/>
+  </p:clrMapOvr>
+</p:sld>
+</file>
+
+<file path=ppt/slides/slide28.xml><?xml version="1.0" encoding="utf-8"?>
+<p:sld xmlns:a="http://schemas.openxmlformats.org/drawingml/2006/main" xmlns:p="http://schemas.openxmlformats.org/presentationml/2006/main" xmlns:r="http://schemas.openxmlformats.org/officeDocument/2006/relationships">
+  <p:cSld>
+    <p:spTree>
+      <p:nvGrpSpPr>
+        <p:cNvPr id="1" name=""/>
+        <p:cNvGrpSpPr/>
+        <p:nvPr/>
+      </p:nvGrpSpPr>
+      <p:grpSpPr/>
+      <p:sp>
+        <p:nvSpPr>
+          <p:cNvPr id="2" name="Rectangle 1"/>
+          <p:cNvSpPr/>
+          <p:nvPr/>
+        </p:nvSpPr>
+        <p:spPr>
+          <a:xfrm>
+            <a:off x="0" y="0"/>
+            <a:ext cx="12191695" cy="6858000"/>
+          </a:xfrm>
+          <a:prstGeom prst="rect">
+            <a:avLst/>
+          </a:prstGeom>
+          <a:solidFill>
+            <a:srgbClr val="F7F8FA"/>
+          </a:solidFill>
+          <a:ln>
+            <a:noFill/>
+          </a:ln>
+          <a:effectLst/>
+        </p:spPr>
+        <p:style>
+          <a:lnRef idx="1">
+            <a:schemeClr val="accent1"/>
+          </a:lnRef>
+          <a:fillRef idx="3">
+            <a:schemeClr val="accent1"/>
+          </a:fillRef>
+          <a:effectRef idx="2">
+            <a:schemeClr val="accent1"/>
+          </a:effectRef>
+          <a:fontRef idx="minor">
+            <a:schemeClr val="lt1"/>
+          </a:fontRef>
+        </p:style>
+        <p:txBody>
+          <a:bodyPr rtlCol="0" anchor="ctr"/>
+          <a:lstStyle/>
+          <a:p>
+            <a:pPr algn="ctr"/>
+          </a:p>
+        </p:txBody>
+      </p:sp>
+      <p:sp>
+        <p:nvSpPr>
+          <p:cNvPr id="3" name="TextBox 2"/>
+          <p:cNvSpPr txBox="1"/>
+          <p:nvPr/>
+        </p:nvSpPr>
+        <p:spPr>
+          <a:xfrm>
+            <a:off x="502920" y="457200"/>
+            <a:ext cx="10058400" cy="274320"/>
+          </a:xfrm>
+          <a:prstGeom prst="rect">
+            <a:avLst/>
+          </a:prstGeom>
+          <a:noFill/>
+        </p:spPr>
+        <p:txBody>
+          <a:bodyPr wrap="square" anchor="t" lIns="0" rIns="0" tIns="0" bIns="0">
+            <a:spAutoFit/>
+          </a:bodyPr>
+          <a:lstStyle/>
+          <a:p>
+            <a:r>
+              <a:rPr sz="1050" b="1" i="0" spc="220">
+                <a:solidFill>
+                  <a:srgbClr val="0070C0"/>
+                </a:solidFill>
+                <a:latin typeface="Arial"/>
+              </a:rPr>
+              <a:t>THE RESEARCH PROJECT</a:t>
+            </a:r>
+          </a:p>
+        </p:txBody>
+      </p:sp>
+      <p:sp>
+        <p:nvSpPr>
+          <p:cNvPr id="4" name="TextBox 3"/>
+          <p:cNvSpPr txBox="1"/>
+          <p:nvPr/>
+        </p:nvSpPr>
+        <p:spPr>
+          <a:xfrm>
+            <a:off x="502920" y="749808"/>
+            <a:ext cx="10515600" cy="1097280"/>
+          </a:xfrm>
+          <a:prstGeom prst="rect">
+            <a:avLst/>
+          </a:prstGeom>
+          <a:noFill/>
+        </p:spPr>
+        <p:txBody>
+          <a:bodyPr wrap="square" anchor="t" lIns="0" rIns="0" tIns="0" bIns="0">
+            <a:spAutoFit/>
+          </a:bodyPr>
+          <a:lstStyle/>
+          <a:p>
+            <a:r>
+              <a:rPr sz="3300" b="0" i="0">
+                <a:solidFill>
+                  <a:srgbClr val="1A1C22"/>
+                </a:solidFill>
+                <a:latin typeface="Georgia"/>
+              </a:rPr>
+              <a:t>Project </a:t>
+            </a:r>
+            <a:r>
+              <a:rPr sz="3300" b="0" i="0">
+                <a:solidFill>
+                  <a:srgbClr val="0070C0"/>
+                </a:solidFill>
+                <a:latin typeface="Georgia"/>
+              </a:rPr>
+              <a:t>timeline</a:t>
+            </a:r>
+          </a:p>
+        </p:txBody>
+      </p:sp>
+      <p:sp>
+        <p:nvSpPr>
+          <p:cNvPr id="5" name="TextBox 4"/>
+          <p:cNvSpPr txBox="1"/>
+          <p:nvPr/>
+        </p:nvSpPr>
+        <p:spPr>
+          <a:xfrm>
+            <a:off x="521207" y="1572768"/>
+            <a:ext cx="9601200" cy="640080"/>
+          </a:xfrm>
+          <a:prstGeom prst="rect">
+            <a:avLst/>
+          </a:prstGeom>
+          <a:noFill/>
+        </p:spPr>
+        <p:txBody>
+          <a:bodyPr wrap="square" anchor="t" lIns="0" rIns="0" tIns="0" bIns="0">
+            <a:spAutoFit/>
+          </a:bodyPr>
+          <a:lstStyle/>
+          <a:p>
+            <a:pPr>
+              <a:lnSpc>
+                <a:spcPct val="130000"/>
+              </a:lnSpc>
+            </a:pPr>
+            <a:r>
+              <a:rPr sz="1300" b="0" i="0">
+                <a:solidFill>
+                  <a:srgbClr val="52586A"/>
+                </a:solidFill>
+                <a:latin typeface="Arial"/>
+              </a:rPr>
+              <a:t>From perspectives and state-of-the-art to building and positioning knowledge areas.</a:t>
+            </a:r>
+          </a:p>
+        </p:txBody>
+      </p:sp>
+      <p:sp>
+        <p:nvSpPr>
+          <p:cNvPr id="6" name="Rectangle 5"/>
+          <p:cNvSpPr/>
+          <p:nvPr/>
+        </p:nvSpPr>
+        <p:spPr>
+          <a:xfrm>
+            <a:off x="502920" y="6455664"/>
+            <a:ext cx="11183112" cy="9525"/>
+          </a:xfrm>
+          <a:prstGeom prst="rect">
+            <a:avLst/>
+          </a:prstGeom>
+          <a:solidFill>
+            <a:srgbClr val="E0E4EC"/>
+          </a:solidFill>
+          <a:ln>
+            <a:noFill/>
+          </a:ln>
+          <a:effectLst/>
+        </p:spPr>
+        <p:style>
+          <a:lnRef idx="1">
+            <a:schemeClr val="accent1"/>
+          </a:lnRef>
+          <a:fillRef idx="3">
+            <a:schemeClr val="accent1"/>
+          </a:fillRef>
+          <a:effectRef idx="2">
+            <a:schemeClr val="accent1"/>
+          </a:effectRef>
+          <a:fontRef idx="minor">
+            <a:schemeClr val="lt1"/>
+          </a:fontRef>
+        </p:style>
+        <p:txBody>
+          <a:bodyPr rtlCol="0" anchor="ctr"/>
+          <a:lstStyle/>
+          <a:p>
+            <a:pPr algn="ctr"/>
+          </a:p>
+        </p:txBody>
+      </p:sp>
+      <p:sp>
+        <p:nvSpPr>
+          <p:cNvPr id="7" name="TextBox 6"/>
+          <p:cNvSpPr txBox="1"/>
+          <p:nvPr/>
+        </p:nvSpPr>
+        <p:spPr>
+          <a:xfrm>
+            <a:off x="502920" y="6510528"/>
+            <a:ext cx="8229600" cy="274320"/>
+          </a:xfrm>
+          <a:prstGeom prst="rect">
+            <a:avLst/>
+          </a:prstGeom>
+          <a:noFill/>
+        </p:spPr>
+        <p:txBody>
+          <a:bodyPr wrap="square" anchor="t" lIns="0" rIns="0" tIns="0" bIns="0">
+            <a:spAutoFit/>
+          </a:bodyPr>
+          <a:lstStyle/>
+          <a:p>
+            <a:r>
+              <a:rPr sz="850" b="0" i="0" spc="80">
+                <a:solidFill>
+                  <a:srgbClr val="8A93A8"/>
+                </a:solidFill>
+                <a:latin typeface="Arial"/>
+              </a:rPr>
+              <a:t>AI Implementation Strategy  .  Systems Engineering</a:t>
+            </a:r>
+          </a:p>
+        </p:txBody>
+      </p:sp>
+      <p:sp>
+        <p:nvSpPr>
+          <p:cNvPr id="8" name="TextBox 7"/>
+          <p:cNvSpPr txBox="1"/>
+          <p:nvPr/>
+        </p:nvSpPr>
+        <p:spPr>
+          <a:xfrm>
+            <a:off x="10789920" y="6510528"/>
+            <a:ext cx="896112" cy="274320"/>
+          </a:xfrm>
+          <a:prstGeom prst="rect">
+            <a:avLst/>
+          </a:prstGeom>
+          <a:noFill/>
+        </p:spPr>
+        <p:txBody>
+          <a:bodyPr wrap="square" anchor="t" lIns="0" rIns="0" tIns="0" bIns="0">
+            <a:spAutoFit/>
+          </a:bodyPr>
+          <a:lstStyle/>
+          <a:p>
+            <a:pPr algn="r"/>
+            <a:r>
+              <a:rPr sz="850" b="0" i="0" spc="80">
+                <a:solidFill>
+                  <a:srgbClr val="8A93A8"/>
+                </a:solidFill>
+                <a:latin typeface="Arial"/>
+              </a:rPr>
+              <a:t>28</a:t>
+            </a:r>
+          </a:p>
+        </p:txBody>
+      </p:sp>
+      <p:sp>
+        <p:nvSpPr>
+          <p:cNvPr id="9" name="Rectangle 8"/>
+          <p:cNvSpPr/>
+          <p:nvPr/>
+        </p:nvSpPr>
+        <p:spPr>
+          <a:xfrm>
+            <a:off x="822960" y="3977639"/>
+            <a:ext cx="10698480" cy="17780"/>
+          </a:xfrm>
+          <a:prstGeom prst="rect">
+            <a:avLst/>
+          </a:prstGeom>
+          <a:solidFill>
+            <a:srgbClr val="E4E8F0"/>
+          </a:solidFill>
+          <a:ln>
+            <a:noFill/>
+          </a:ln>
+          <a:effectLst/>
+        </p:spPr>
+        <p:style>
+          <a:lnRef idx="1">
+            <a:schemeClr val="accent1"/>
+          </a:lnRef>
+          <a:fillRef idx="3">
+            <a:schemeClr val="accent1"/>
+          </a:fillRef>
+          <a:effectRef idx="2">
+            <a:schemeClr val="accent1"/>
+          </a:effectRef>
+          <a:fontRef idx="minor">
+            <a:schemeClr val="lt1"/>
+          </a:fontRef>
+        </p:style>
+        <p:txBody>
+          <a:bodyPr rtlCol="0" anchor="ctr"/>
+          <a:lstStyle/>
+          <a:p>
+            <a:pPr algn="ctr"/>
+          </a:p>
+        </p:txBody>
+      </p:sp>
+      <p:sp>
+        <p:nvSpPr>
+          <p:cNvPr id="10" name="Rectangle 9"/>
+          <p:cNvSpPr/>
+          <p:nvPr/>
+        </p:nvSpPr>
+        <p:spPr>
+          <a:xfrm>
+            <a:off x="818388" y="3922776"/>
+            <a:ext cx="17780" cy="109728"/>
+          </a:xfrm>
+          <a:prstGeom prst="rect">
+            <a:avLst/>
+          </a:prstGeom>
+          <a:solidFill>
+            <a:srgbClr val="52586A"/>
+          </a:solidFill>
+          <a:ln>
+            <a:noFill/>
+          </a:ln>
+          <a:effectLst/>
+        </p:spPr>
+        <p:style>
+          <a:lnRef idx="1">
+            <a:schemeClr val="accent1"/>
+          </a:lnRef>
+          <a:fillRef idx="3">
+            <a:schemeClr val="accent1"/>
+          </a:fillRef>
+          <a:effectRef idx="2">
+            <a:schemeClr val="accent1"/>
+          </a:effectRef>
+          <a:fontRef idx="minor">
+            <a:schemeClr val="lt1"/>
+          </a:fontRef>
+        </p:style>
+        <p:txBody>
+          <a:bodyPr rtlCol="0" anchor="ctr"/>
+          <a:lstStyle/>
+          <a:p>
+            <a:pPr algn="ctr"/>
+          </a:p>
+        </p:txBody>
+      </p:sp>
+      <p:sp>
+        <p:nvSpPr>
+          <p:cNvPr id="11" name="TextBox 10"/>
+          <p:cNvSpPr txBox="1"/>
+          <p:nvPr/>
+        </p:nvSpPr>
+        <p:spPr>
+          <a:xfrm>
+            <a:off x="365760" y="4087368"/>
+            <a:ext cx="914400" cy="274320"/>
+          </a:xfrm>
+          <a:prstGeom prst="rect">
+            <a:avLst/>
+          </a:prstGeom>
+          <a:noFill/>
+        </p:spPr>
+        <p:txBody>
+          <a:bodyPr wrap="square" anchor="t" lIns="0" rIns="0" tIns="0" bIns="0">
+            <a:spAutoFit/>
+          </a:bodyPr>
+          <a:lstStyle/>
+          <a:p>
+            <a:pPr algn="ctr"/>
+            <a:r>
+              <a:rPr sz="950" b="1" i="0" spc="50">
+                <a:solidFill>
+                  <a:srgbClr val="52586A"/>
+                </a:solidFill>
+                <a:latin typeface="Arial"/>
+              </a:rPr>
+              <a:t>Jan 26</a:t>
+            </a:r>
+          </a:p>
+        </p:txBody>
+      </p:sp>
+      <p:sp>
+        <p:nvSpPr>
+          <p:cNvPr id="12" name="Rectangle 11"/>
+          <p:cNvSpPr/>
+          <p:nvPr/>
+        </p:nvSpPr>
+        <p:spPr>
+          <a:xfrm>
+            <a:off x="2958084" y="3922776"/>
+            <a:ext cx="17780" cy="109728"/>
+          </a:xfrm>
+          <a:prstGeom prst="rect">
+            <a:avLst/>
+          </a:prstGeom>
+          <a:solidFill>
+            <a:srgbClr val="52586A"/>
+          </a:solidFill>
+          <a:ln>
+            <a:noFill/>
+          </a:ln>
+          <a:effectLst/>
+        </p:spPr>
+        <p:style>
+          <a:lnRef idx="1">
+            <a:schemeClr val="accent1"/>
+          </a:lnRef>
+          <a:fillRef idx="3">
+            <a:schemeClr val="accent1"/>
+          </a:fillRef>
+          <a:effectRef idx="2">
+            <a:schemeClr val="accent1"/>
+          </a:effectRef>
+          <a:fontRef idx="minor">
+            <a:schemeClr val="lt1"/>
+          </a:fontRef>
+        </p:style>
+        <p:txBody>
+          <a:bodyPr rtlCol="0" anchor="ctr"/>
+          <a:lstStyle/>
+          <a:p>
+            <a:pPr algn="ctr"/>
+          </a:p>
+        </p:txBody>
+      </p:sp>
+      <p:sp>
+        <p:nvSpPr>
+          <p:cNvPr id="13" name="TextBox 12"/>
+          <p:cNvSpPr txBox="1"/>
+          <p:nvPr/>
+        </p:nvSpPr>
+        <p:spPr>
+          <a:xfrm>
+            <a:off x="2505456" y="4087368"/>
+            <a:ext cx="914400" cy="274320"/>
+          </a:xfrm>
+          <a:prstGeom prst="rect">
+            <a:avLst/>
+          </a:prstGeom>
+          <a:noFill/>
+        </p:spPr>
+        <p:txBody>
+          <a:bodyPr wrap="square" anchor="t" lIns="0" rIns="0" tIns="0" bIns="0">
+            <a:spAutoFit/>
+          </a:bodyPr>
+          <a:lstStyle/>
+          <a:p>
+            <a:pPr algn="ctr"/>
+            <a:r>
+              <a:rPr sz="950" b="1" i="0" spc="50">
+                <a:solidFill>
+                  <a:srgbClr val="52586A"/>
+                </a:solidFill>
+                <a:latin typeface="Arial"/>
+              </a:rPr>
+              <a:t>Feb 26</a:t>
+            </a:r>
+          </a:p>
+        </p:txBody>
+      </p:sp>
+      <p:sp>
+        <p:nvSpPr>
+          <p:cNvPr id="14" name="Rectangle 13"/>
+          <p:cNvSpPr/>
+          <p:nvPr/>
+        </p:nvSpPr>
+        <p:spPr>
+          <a:xfrm>
+            <a:off x="5097780" y="3922776"/>
+            <a:ext cx="17780" cy="109728"/>
+          </a:xfrm>
+          <a:prstGeom prst="rect">
+            <a:avLst/>
+          </a:prstGeom>
+          <a:solidFill>
+            <a:srgbClr val="52586A"/>
+          </a:solidFill>
+          <a:ln>
+            <a:noFill/>
+          </a:ln>
+          <a:effectLst/>
+        </p:spPr>
+        <p:style>
+          <a:lnRef idx="1">
+            <a:schemeClr val="accent1"/>
+          </a:lnRef>
+          <a:fillRef idx="3">
+            <a:schemeClr val="accent1"/>
+          </a:fillRef>
+          <a:effectRef idx="2">
+            <a:schemeClr val="accent1"/>
+          </a:effectRef>
+          <a:fontRef idx="minor">
+            <a:schemeClr val="lt1"/>
+          </a:fontRef>
+        </p:style>
+        <p:txBody>
+          <a:bodyPr rtlCol="0" anchor="ctr"/>
+          <a:lstStyle/>
+          <a:p>
+            <a:pPr algn="ctr"/>
+          </a:p>
+        </p:txBody>
+      </p:sp>
+      <p:sp>
+        <p:nvSpPr>
+          <p:cNvPr id="15" name="TextBox 14"/>
+          <p:cNvSpPr txBox="1"/>
+          <p:nvPr/>
+        </p:nvSpPr>
+        <p:spPr>
+          <a:xfrm>
+            <a:off x="4645152" y="4087368"/>
+            <a:ext cx="914400" cy="274320"/>
+          </a:xfrm>
+          <a:prstGeom prst="rect">
+            <a:avLst/>
+          </a:prstGeom>
+          <a:noFill/>
+        </p:spPr>
+        <p:txBody>
+          <a:bodyPr wrap="square" anchor="t" lIns="0" rIns="0" tIns="0" bIns="0">
+            <a:spAutoFit/>
+          </a:bodyPr>
+          <a:lstStyle/>
+          <a:p>
+            <a:pPr algn="ctr"/>
+            <a:r>
+              <a:rPr sz="950" b="1" i="0" spc="50">
+                <a:solidFill>
+                  <a:srgbClr val="52586A"/>
+                </a:solidFill>
+                <a:latin typeface="Arial"/>
+              </a:rPr>
+              <a:t>Mar 26</a:t>
+            </a:r>
+          </a:p>
+        </p:txBody>
+      </p:sp>
+      <p:sp>
+        <p:nvSpPr>
+          <p:cNvPr id="16" name="Rectangle 15"/>
+          <p:cNvSpPr/>
+          <p:nvPr/>
+        </p:nvSpPr>
+        <p:spPr>
+          <a:xfrm>
+            <a:off x="7237476" y="3922776"/>
+            <a:ext cx="17780" cy="109728"/>
+          </a:xfrm>
+          <a:prstGeom prst="rect">
+            <a:avLst/>
+          </a:prstGeom>
+          <a:solidFill>
+            <a:srgbClr val="52586A"/>
+          </a:solidFill>
+          <a:ln>
+            <a:noFill/>
+          </a:ln>
+          <a:effectLst/>
+        </p:spPr>
+        <p:style>
+          <a:lnRef idx="1">
+            <a:schemeClr val="accent1"/>
+          </a:lnRef>
+          <a:fillRef idx="3">
+            <a:schemeClr val="accent1"/>
+          </a:fillRef>
+          <a:effectRef idx="2">
+            <a:schemeClr val="accent1"/>
+          </a:effectRef>
+          <a:fontRef idx="minor">
+            <a:schemeClr val="lt1"/>
+          </a:fontRef>
+        </p:style>
+        <p:txBody>
+          <a:bodyPr rtlCol="0" anchor="ctr"/>
+          <a:lstStyle/>
+          <a:p>
+            <a:pPr algn="ctr"/>
+          </a:p>
+        </p:txBody>
+      </p:sp>
+      <p:sp>
+        <p:nvSpPr>
+          <p:cNvPr id="17" name="TextBox 16"/>
+          <p:cNvSpPr txBox="1"/>
+          <p:nvPr/>
+        </p:nvSpPr>
+        <p:spPr>
+          <a:xfrm>
+            <a:off x="6784848" y="4087368"/>
+            <a:ext cx="914400" cy="274320"/>
+          </a:xfrm>
+          <a:prstGeom prst="rect">
+            <a:avLst/>
+          </a:prstGeom>
+          <a:noFill/>
+        </p:spPr>
+        <p:txBody>
+          <a:bodyPr wrap="square" anchor="t" lIns="0" rIns="0" tIns="0" bIns="0">
+            <a:spAutoFit/>
+          </a:bodyPr>
+          <a:lstStyle/>
+          <a:p>
+            <a:pPr algn="ctr"/>
+            <a:r>
+              <a:rPr sz="950" b="1" i="0" spc="50">
+                <a:solidFill>
+                  <a:srgbClr val="52586A"/>
+                </a:solidFill>
+                <a:latin typeface="Arial"/>
+              </a:rPr>
+              <a:t>Apr 26</a:t>
+            </a:r>
+          </a:p>
+        </p:txBody>
+      </p:sp>
+      <p:sp>
+        <p:nvSpPr>
+          <p:cNvPr id="18" name="Rectangle 17"/>
+          <p:cNvSpPr/>
+          <p:nvPr/>
+        </p:nvSpPr>
+        <p:spPr>
+          <a:xfrm>
+            <a:off x="9377172" y="3922776"/>
+            <a:ext cx="17780" cy="109728"/>
+          </a:xfrm>
+          <a:prstGeom prst="rect">
+            <a:avLst/>
+          </a:prstGeom>
+          <a:solidFill>
+            <a:srgbClr val="52586A"/>
+          </a:solidFill>
+          <a:ln>
+            <a:noFill/>
+          </a:ln>
+          <a:effectLst/>
+        </p:spPr>
+        <p:style>
+          <a:lnRef idx="1">
+            <a:schemeClr val="accent1"/>
+          </a:lnRef>
+          <a:fillRef idx="3">
+            <a:schemeClr val="accent1"/>
+          </a:fillRef>
+          <a:effectRef idx="2">
+            <a:schemeClr val="accent1"/>
+          </a:effectRef>
+          <a:fontRef idx="minor">
+            <a:schemeClr val="lt1"/>
+          </a:fontRef>
+        </p:style>
+        <p:txBody>
+          <a:bodyPr rtlCol="0" anchor="ctr"/>
+          <a:lstStyle/>
+          <a:p>
+            <a:pPr algn="ctr"/>
+          </a:p>
+        </p:txBody>
+      </p:sp>
+      <p:sp>
+        <p:nvSpPr>
+          <p:cNvPr id="19" name="TextBox 18"/>
+          <p:cNvSpPr txBox="1"/>
+          <p:nvPr/>
+        </p:nvSpPr>
+        <p:spPr>
+          <a:xfrm>
+            <a:off x="8924544" y="4087368"/>
+            <a:ext cx="914400" cy="274320"/>
+          </a:xfrm>
+          <a:prstGeom prst="rect">
+            <a:avLst/>
+          </a:prstGeom>
+          <a:noFill/>
+        </p:spPr>
+        <p:txBody>
+          <a:bodyPr wrap="square" anchor="t" lIns="0" rIns="0" tIns="0" bIns="0">
+            <a:spAutoFit/>
+          </a:bodyPr>
+          <a:lstStyle/>
+          <a:p>
+            <a:pPr algn="ctr"/>
+            <a:r>
+              <a:rPr sz="950" b="1" i="0" spc="50">
+                <a:solidFill>
+                  <a:srgbClr val="52586A"/>
+                </a:solidFill>
+                <a:latin typeface="Arial"/>
+              </a:rPr>
+              <a:t>May 26</a:t>
+            </a:r>
+          </a:p>
+        </p:txBody>
+      </p:sp>
+      <p:sp>
+        <p:nvSpPr>
+          <p:cNvPr id="20" name="Rectangle 19"/>
+          <p:cNvSpPr/>
+          <p:nvPr/>
+        </p:nvSpPr>
+        <p:spPr>
+          <a:xfrm>
+            <a:off x="11516867" y="3922776"/>
+            <a:ext cx="17780" cy="109728"/>
+          </a:xfrm>
+          <a:prstGeom prst="rect">
+            <a:avLst/>
+          </a:prstGeom>
+          <a:solidFill>
+            <a:srgbClr val="52586A"/>
+          </a:solidFill>
+          <a:ln>
+            <a:noFill/>
+          </a:ln>
+          <a:effectLst/>
+        </p:spPr>
+        <p:style>
+          <a:lnRef idx="1">
+            <a:schemeClr val="accent1"/>
+          </a:lnRef>
+          <a:fillRef idx="3">
+            <a:schemeClr val="accent1"/>
+          </a:fillRef>
+          <a:effectRef idx="2">
+            <a:schemeClr val="accent1"/>
+          </a:effectRef>
+          <a:fontRef idx="minor">
+            <a:schemeClr val="lt1"/>
+          </a:fontRef>
+        </p:style>
+        <p:txBody>
+          <a:bodyPr rtlCol="0" anchor="ctr"/>
+          <a:lstStyle/>
+          <a:p>
+            <a:pPr algn="ctr"/>
+          </a:p>
+        </p:txBody>
+      </p:sp>
+      <p:sp>
+        <p:nvSpPr>
+          <p:cNvPr id="21" name="TextBox 20"/>
+          <p:cNvSpPr txBox="1"/>
+          <p:nvPr/>
+        </p:nvSpPr>
+        <p:spPr>
+          <a:xfrm>
+            <a:off x="11064240" y="4087368"/>
+            <a:ext cx="914400" cy="274320"/>
+          </a:xfrm>
+          <a:prstGeom prst="rect">
+            <a:avLst/>
+          </a:prstGeom>
+          <a:noFill/>
+        </p:spPr>
+        <p:txBody>
+          <a:bodyPr wrap="square" anchor="t" lIns="0" rIns="0" tIns="0" bIns="0">
+            <a:spAutoFit/>
+          </a:bodyPr>
+          <a:lstStyle/>
+          <a:p>
+            <a:pPr algn="ctr"/>
+            <a:r>
+              <a:rPr sz="950" b="1" i="0" spc="50">
+                <a:solidFill>
+                  <a:srgbClr val="52586A"/>
+                </a:solidFill>
+                <a:latin typeface="Arial"/>
+              </a:rPr>
+              <a:t>Jun 26</a:t>
+            </a:r>
+          </a:p>
+        </p:txBody>
+      </p:sp>
+      <p:sp>
+        <p:nvSpPr>
+          <p:cNvPr id="22" name="Rounded Rectangle 21"/>
+          <p:cNvSpPr/>
+          <p:nvPr/>
+        </p:nvSpPr>
+        <p:spPr>
+          <a:xfrm>
+            <a:off x="822960" y="3063240"/>
+            <a:ext cx="4279392" cy="566928"/>
+          </a:xfrm>
+          <a:prstGeom prst="roundRect">
+            <a:avLst>
+              <a:gd name="adj" fmla="val 25000"/>
+            </a:avLst>
+          </a:prstGeom>
+          <a:solidFill>
+            <a:srgbClr val="0070C0"/>
+          </a:solidFill>
+          <a:ln>
+            <a:noFill/>
+          </a:ln>
+          <a:effectLst/>
+        </p:spPr>
+        <p:style>
+          <a:lnRef idx="1">
+            <a:schemeClr val="accent1"/>
+          </a:lnRef>
+          <a:fillRef idx="3">
+            <a:schemeClr val="accent1"/>
+          </a:fillRef>
+          <a:effectRef idx="2">
+            <a:schemeClr val="accent1"/>
+          </a:effectRef>
+          <a:fontRef idx="minor">
+            <a:schemeClr val="lt1"/>
+          </a:fontRef>
+        </p:style>
+        <p:txBody>
+          <a:bodyPr rtlCol="0" anchor="ctr"/>
+          <a:lstStyle/>
+          <a:p>
+            <a:pPr algn="ctr"/>
+          </a:p>
+        </p:txBody>
+      </p:sp>
+      <p:sp>
+        <p:nvSpPr>
+          <p:cNvPr id="23" name="TextBox 22"/>
+          <p:cNvSpPr txBox="1"/>
+          <p:nvPr/>
+        </p:nvSpPr>
+        <p:spPr>
+          <a:xfrm>
+            <a:off x="960120" y="3063240"/>
+            <a:ext cx="4005072" cy="566928"/>
+          </a:xfrm>
+          <a:prstGeom prst="rect">
+            <a:avLst/>
+          </a:prstGeom>
+          <a:noFill/>
+        </p:spPr>
+        <p:txBody>
+          <a:bodyPr wrap="square" anchor="ctr" lIns="0" rIns="0" tIns="0" bIns="0">
+            <a:spAutoFit/>
+          </a:bodyPr>
+          <a:lstStyle/>
+          <a:p>
+            <a:pPr algn="ctr"/>
+            <a:r>
+              <a:rPr sz="1050" b="1" i="0">
+                <a:solidFill>
+                  <a:srgbClr val="FFFFFF"/>
+                </a:solidFill>
+                <a:latin typeface="Arial"/>
+              </a:rPr>
+              <a:t>Phase 1  .  Perspectives, state of the art, tool exploration</a:t>
+            </a:r>
+          </a:p>
+        </p:txBody>
+      </p:sp>
+      <p:sp>
+        <p:nvSpPr>
+          <p:cNvPr id="24" name="Rounded Rectangle 23"/>
+          <p:cNvSpPr/>
+          <p:nvPr/>
+        </p:nvSpPr>
+        <p:spPr>
+          <a:xfrm>
+            <a:off x="7242048" y="4325112"/>
+            <a:ext cx="4279392" cy="566928"/>
+          </a:xfrm>
+          <a:prstGeom prst="roundRect">
+            <a:avLst>
+              <a:gd name="adj" fmla="val 25000"/>
+            </a:avLst>
+          </a:prstGeom>
+          <a:solidFill>
+            <a:srgbClr val="006B6B"/>
+          </a:solidFill>
+          <a:ln>
+            <a:noFill/>
+          </a:ln>
+          <a:effectLst/>
+        </p:spPr>
+        <p:style>
+          <a:lnRef idx="1">
+            <a:schemeClr val="accent1"/>
+          </a:lnRef>
+          <a:fillRef idx="3">
+            <a:schemeClr val="accent1"/>
+          </a:fillRef>
+          <a:effectRef idx="2">
+            <a:schemeClr val="accent1"/>
+          </a:effectRef>
+          <a:fontRef idx="minor">
+            <a:schemeClr val="lt1"/>
+          </a:fontRef>
+        </p:style>
+        <p:txBody>
+          <a:bodyPr rtlCol="0" anchor="ctr"/>
+          <a:lstStyle/>
+          <a:p>
+            <a:pPr algn="ctr"/>
+          </a:p>
+        </p:txBody>
+      </p:sp>
+      <p:sp>
+        <p:nvSpPr>
+          <p:cNvPr id="25" name="TextBox 24"/>
+          <p:cNvSpPr txBox="1"/>
+          <p:nvPr/>
+        </p:nvSpPr>
+        <p:spPr>
+          <a:xfrm>
+            <a:off x="7379208" y="4325112"/>
+            <a:ext cx="4005072" cy="566928"/>
+          </a:xfrm>
+          <a:prstGeom prst="rect">
+            <a:avLst/>
+          </a:prstGeom>
+          <a:noFill/>
+        </p:spPr>
+        <p:txBody>
+          <a:bodyPr wrap="square" anchor="ctr" lIns="0" rIns="0" tIns="0" bIns="0">
+            <a:spAutoFit/>
+          </a:bodyPr>
+          <a:lstStyle/>
+          <a:p>
+            <a:pPr algn="ctr"/>
+            <a:r>
+              <a:rPr sz="1050" b="1" i="0">
+                <a:solidFill>
+                  <a:srgbClr val="FFFFFF"/>
+                </a:solidFill>
+                <a:latin typeface="Arial"/>
+              </a:rPr>
+              <a:t>Phase 2  .  1. Building   2. Positioning knowledge areas</a:t>
+            </a:r>
+          </a:p>
+        </p:txBody>
+      </p:sp>
+      <p:sp>
+        <p:nvSpPr>
+          <p:cNvPr id="26" name="Rectangle 25"/>
+          <p:cNvSpPr/>
+          <p:nvPr/>
+        </p:nvSpPr>
+        <p:spPr>
+          <a:xfrm>
+            <a:off x="11512296" y="2788920"/>
+            <a:ext cx="20320" cy="1188720"/>
+          </a:xfrm>
+          <a:prstGeom prst="rect">
+            <a:avLst/>
+          </a:prstGeom>
+          <a:solidFill>
+            <a:srgbClr val="8B1A1A"/>
+          </a:solidFill>
+          <a:ln>
+            <a:noFill/>
+          </a:ln>
+          <a:effectLst/>
+        </p:spPr>
+        <p:style>
+          <a:lnRef idx="1">
+            <a:schemeClr val="accent1"/>
+          </a:lnRef>
+          <a:fillRef idx="3">
+            <a:schemeClr val="accent1"/>
+          </a:fillRef>
+          <a:effectRef idx="2">
+            <a:schemeClr val="accent1"/>
+          </a:effectRef>
+          <a:fontRef idx="minor">
+            <a:schemeClr val="lt1"/>
+          </a:fontRef>
+        </p:style>
+        <p:txBody>
+          <a:bodyPr rtlCol="0" anchor="ctr"/>
+          <a:lstStyle/>
+          <a:p>
+            <a:pPr algn="ctr"/>
+          </a:p>
+        </p:txBody>
+      </p:sp>
+      <p:sp>
+        <p:nvSpPr>
+          <p:cNvPr id="27" name="TextBox 26"/>
+          <p:cNvSpPr txBox="1"/>
+          <p:nvPr/>
+        </p:nvSpPr>
+        <p:spPr>
+          <a:xfrm>
+            <a:off x="9235440" y="2514600"/>
+            <a:ext cx="2194560" cy="274320"/>
+          </a:xfrm>
+          <a:prstGeom prst="rect">
+            <a:avLst/>
+          </a:prstGeom>
+          <a:noFill/>
+        </p:spPr>
+        <p:txBody>
+          <a:bodyPr wrap="square" anchor="t" lIns="0" rIns="0" tIns="0" bIns="0">
+            <a:spAutoFit/>
+          </a:bodyPr>
+          <a:lstStyle/>
+          <a:p>
+            <a:pPr algn="r"/>
+            <a:r>
+              <a:rPr sz="900" b="1" i="0" spc="150">
+                <a:solidFill>
+                  <a:srgbClr val="8B1A1A"/>
+                </a:solidFill>
+                <a:latin typeface="Arial"/>
+              </a:rPr>
+              <a:t>WE ARE HERE  v</a:t>
+            </a:r>
+          </a:p>
+        </p:txBody>
+      </p:sp>
+      <p:sp>
+        <p:nvSpPr>
+          <p:cNvPr id="28" name="Rounded Rectangle 27"/>
+          <p:cNvSpPr/>
+          <p:nvPr/>
+        </p:nvSpPr>
+        <p:spPr>
+          <a:xfrm>
+            <a:off x="502920" y="5212080"/>
+            <a:ext cx="2670048" cy="1051560"/>
+          </a:xfrm>
+          <a:prstGeom prst="roundRect">
+            <a:avLst>
+              <a:gd name="adj" fmla="val 6000"/>
+            </a:avLst>
+          </a:prstGeom>
+          <a:solidFill>
+            <a:srgbClr val="FFFFFF"/>
+          </a:solidFill>
+          <a:ln w="12700">
+            <a:solidFill>
+              <a:srgbClr val="E0E4EC"/>
+            </a:solidFill>
+          </a:ln>
+          <a:effectLst/>
+        </p:spPr>
+        <p:style>
+          <a:lnRef idx="1">
+            <a:schemeClr val="accent1"/>
+          </a:lnRef>
+          <a:fillRef idx="3">
+            <a:schemeClr val="accent1"/>
+          </a:fillRef>
+          <a:effectRef idx="2">
+            <a:schemeClr val="accent1"/>
+          </a:effectRef>
+          <a:fontRef idx="minor">
+            <a:schemeClr val="lt1"/>
+          </a:fontRef>
+        </p:style>
+        <p:txBody>
+          <a:bodyPr rtlCol="0" anchor="ctr"/>
+          <a:lstStyle/>
+          <a:p>
+            <a:pPr algn="ctr"/>
+          </a:p>
+        </p:txBody>
+      </p:sp>
+      <p:sp>
+        <p:nvSpPr>
+          <p:cNvPr id="29" name="Rectangle 28"/>
+          <p:cNvSpPr/>
+          <p:nvPr/>
+        </p:nvSpPr>
+        <p:spPr>
+          <a:xfrm>
+            <a:off x="502920" y="5212080"/>
+            <a:ext cx="2670048" cy="54864"/>
+          </a:xfrm>
+          <a:prstGeom prst="rect">
+            <a:avLst/>
+          </a:prstGeom>
+          <a:solidFill>
+            <a:srgbClr val="0070C0"/>
+          </a:solidFill>
+          <a:ln>
+            <a:noFill/>
+          </a:ln>
+          <a:effectLst/>
+        </p:spPr>
+        <p:style>
+          <a:lnRef idx="1">
+            <a:schemeClr val="accent1"/>
+          </a:lnRef>
+          <a:fillRef idx="3">
+            <a:schemeClr val="accent1"/>
+          </a:fillRef>
+          <a:effectRef idx="2">
+            <a:schemeClr val="accent1"/>
+          </a:effectRef>
+          <a:fontRef idx="minor">
+            <a:schemeClr val="lt1"/>
+          </a:fontRef>
+        </p:style>
+        <p:txBody>
+          <a:bodyPr rtlCol="0" anchor="ctr"/>
+          <a:lstStyle/>
+          <a:p>
+            <a:pPr algn="ctr"/>
+          </a:p>
+        </p:txBody>
+      </p:sp>
+      <p:sp>
+        <p:nvSpPr>
+          <p:cNvPr id="30" name="TextBox 29"/>
+          <p:cNvSpPr txBox="1"/>
+          <p:nvPr/>
+        </p:nvSpPr>
+        <p:spPr>
+          <a:xfrm>
+            <a:off x="667512" y="5394960"/>
+            <a:ext cx="2359152" cy="740664"/>
+          </a:xfrm>
+          <a:prstGeom prst="rect">
+            <a:avLst/>
+          </a:prstGeom>
+          <a:noFill/>
+        </p:spPr>
+        <p:txBody>
+          <a:bodyPr wrap="square" anchor="t" lIns="0" rIns="0" tIns="0" bIns="0">
+            <a:spAutoFit/>
+          </a:bodyPr>
+          <a:lstStyle/>
+          <a:p>
+            <a:r>
               <a:rPr sz="850" b="1" i="0" spc="140">
                 <a:solidFill>
+                  <a:srgbClr val="0070C0"/>
+                </a:solidFill>
+                <a:latin typeface="Arial"/>
+              </a:rPr>
+              <a:t>JAN-MAR</a:t>
+            </a:r>
+          </a:p>
+          <a:p>
+            <a:pPr>
+              <a:lnSpc>
+                <a:spcPct val="118000"/>
+              </a:lnSpc>
+              <a:spcBef>
+                <a:spcPts val="400"/>
+              </a:spcBef>
+            </a:pPr>
+            <a:r>
+              <a:rPr sz="1100" b="0" i="0">
+                <a:solidFill>
+                  <a:srgbClr val="52586A"/>
+                </a:solidFill>
+                <a:latin typeface="Arial"/>
+              </a:rPr>
+              <a:t>Strategic analysis &amp; preliminary views</a:t>
+            </a:r>
+          </a:p>
+        </p:txBody>
+      </p:sp>
+      <p:sp>
+        <p:nvSpPr>
+          <p:cNvPr id="31" name="Rounded Rectangle 30"/>
+          <p:cNvSpPr/>
+          <p:nvPr/>
+        </p:nvSpPr>
+        <p:spPr>
+          <a:xfrm>
+            <a:off x="3337560" y="5212080"/>
+            <a:ext cx="2670048" cy="1051560"/>
+          </a:xfrm>
+          <a:prstGeom prst="roundRect">
+            <a:avLst>
+              <a:gd name="adj" fmla="val 6000"/>
+            </a:avLst>
+          </a:prstGeom>
+          <a:solidFill>
+            <a:srgbClr val="FFFFFF"/>
+          </a:solidFill>
+          <a:ln w="12700">
+            <a:solidFill>
+              <a:srgbClr val="E0E4EC"/>
+            </a:solidFill>
+          </a:ln>
+          <a:effectLst/>
+        </p:spPr>
+        <p:style>
+          <a:lnRef idx="1">
+            <a:schemeClr val="accent1"/>
+          </a:lnRef>
+          <a:fillRef idx="3">
+            <a:schemeClr val="accent1"/>
+          </a:fillRef>
+          <a:effectRef idx="2">
+            <a:schemeClr val="accent1"/>
+          </a:effectRef>
+          <a:fontRef idx="minor">
+            <a:schemeClr val="lt1"/>
+          </a:fontRef>
+        </p:style>
+        <p:txBody>
+          <a:bodyPr rtlCol="0" anchor="ctr"/>
+          <a:lstStyle/>
+          <a:p>
+            <a:pPr algn="ctr"/>
+          </a:p>
+        </p:txBody>
+      </p:sp>
+      <p:sp>
+        <p:nvSpPr>
+          <p:cNvPr id="32" name="Rectangle 31"/>
+          <p:cNvSpPr/>
+          <p:nvPr/>
+        </p:nvSpPr>
+        <p:spPr>
+          <a:xfrm>
+            <a:off x="3337560" y="5212080"/>
+            <a:ext cx="2670048" cy="54864"/>
+          </a:xfrm>
+          <a:prstGeom prst="rect">
+            <a:avLst/>
+          </a:prstGeom>
+          <a:solidFill>
+            <a:srgbClr val="002060"/>
+          </a:solidFill>
+          <a:ln>
+            <a:noFill/>
+          </a:ln>
+          <a:effectLst/>
+        </p:spPr>
+        <p:style>
+          <a:lnRef idx="1">
+            <a:schemeClr val="accent1"/>
+          </a:lnRef>
+          <a:fillRef idx="3">
+            <a:schemeClr val="accent1"/>
+          </a:fillRef>
+          <a:effectRef idx="2">
+            <a:schemeClr val="accent1"/>
+          </a:effectRef>
+          <a:fontRef idx="minor">
+            <a:schemeClr val="lt1"/>
+          </a:fontRef>
+        </p:style>
+        <p:txBody>
+          <a:bodyPr rtlCol="0" anchor="ctr"/>
+          <a:lstStyle/>
+          <a:p>
+            <a:pPr algn="ctr"/>
+          </a:p>
+        </p:txBody>
+      </p:sp>
+      <p:sp>
+        <p:nvSpPr>
+          <p:cNvPr id="33" name="TextBox 32"/>
+          <p:cNvSpPr txBox="1"/>
+          <p:nvPr/>
+        </p:nvSpPr>
+        <p:spPr>
+          <a:xfrm>
+            <a:off x="3502152" y="5394960"/>
+            <a:ext cx="2359152" cy="740664"/>
+          </a:xfrm>
+          <a:prstGeom prst="rect">
+            <a:avLst/>
+          </a:prstGeom>
+          <a:noFill/>
+        </p:spPr>
+        <p:txBody>
+          <a:bodyPr wrap="square" anchor="t" lIns="0" rIns="0" tIns="0" bIns="0">
+            <a:spAutoFit/>
+          </a:bodyPr>
+          <a:lstStyle/>
+          <a:p>
+            <a:r>
+              <a:rPr sz="850" b="1" i="0" spc="140">
+                <a:solidFill>
+                  <a:srgbClr val="002060"/>
+                </a:solidFill>
+                <a:latin typeface="Arial"/>
+              </a:rPr>
+              <a:t>MAR</a:t>
+            </a:r>
+          </a:p>
+          <a:p>
+            <a:pPr>
+              <a:lnSpc>
+                <a:spcPct val="118000"/>
+              </a:lnSpc>
+              <a:spcBef>
+                <a:spcPts val="400"/>
+              </a:spcBef>
+            </a:pPr>
+            <a:r>
+              <a:rPr sz="1100" b="0" i="0">
+                <a:solidFill>
+                  <a:srgbClr val="52586A"/>
+                </a:solidFill>
+                <a:latin typeface="Arial"/>
+              </a:rPr>
+              <a:t>State of the art + tool exploration</a:t>
+            </a:r>
+          </a:p>
+        </p:txBody>
+      </p:sp>
+      <p:sp>
+        <p:nvSpPr>
+          <p:cNvPr id="34" name="Rounded Rectangle 33"/>
+          <p:cNvSpPr/>
+          <p:nvPr/>
+        </p:nvSpPr>
+        <p:spPr>
+          <a:xfrm>
+            <a:off x="6172200" y="5212080"/>
+            <a:ext cx="2670048" cy="1051560"/>
+          </a:xfrm>
+          <a:prstGeom prst="roundRect">
+            <a:avLst>
+              <a:gd name="adj" fmla="val 6000"/>
+            </a:avLst>
+          </a:prstGeom>
+          <a:solidFill>
+            <a:srgbClr val="FFFFFF"/>
+          </a:solidFill>
+          <a:ln w="12700">
+            <a:solidFill>
+              <a:srgbClr val="E0E4EC"/>
+            </a:solidFill>
+          </a:ln>
+          <a:effectLst/>
+        </p:spPr>
+        <p:style>
+          <a:lnRef idx="1">
+            <a:schemeClr val="accent1"/>
+          </a:lnRef>
+          <a:fillRef idx="3">
+            <a:schemeClr val="accent1"/>
+          </a:fillRef>
+          <a:effectRef idx="2">
+            <a:schemeClr val="accent1"/>
+          </a:effectRef>
+          <a:fontRef idx="minor">
+            <a:schemeClr val="lt1"/>
+          </a:fontRef>
+        </p:style>
+        <p:txBody>
+          <a:bodyPr rtlCol="0" anchor="ctr"/>
+          <a:lstStyle/>
+          <a:p>
+            <a:pPr algn="ctr"/>
+          </a:p>
+        </p:txBody>
+      </p:sp>
+      <p:sp>
+        <p:nvSpPr>
+          <p:cNvPr id="35" name="Rectangle 34"/>
+          <p:cNvSpPr/>
+          <p:nvPr/>
+        </p:nvSpPr>
+        <p:spPr>
+          <a:xfrm>
+            <a:off x="6172200" y="5212080"/>
+            <a:ext cx="2670048" cy="54864"/>
+          </a:xfrm>
+          <a:prstGeom prst="rect">
+            <a:avLst/>
+          </a:prstGeom>
+          <a:solidFill>
+            <a:srgbClr val="006B6B"/>
+          </a:solidFill>
+          <a:ln>
+            <a:noFill/>
+          </a:ln>
+          <a:effectLst/>
+        </p:spPr>
+        <p:style>
+          <a:lnRef idx="1">
+            <a:schemeClr val="accent1"/>
+          </a:lnRef>
+          <a:fillRef idx="3">
+            <a:schemeClr val="accent1"/>
+          </a:fillRef>
+          <a:effectRef idx="2">
+            <a:schemeClr val="accent1"/>
+          </a:effectRef>
+          <a:fontRef idx="minor">
+            <a:schemeClr val="lt1"/>
+          </a:fontRef>
+        </p:style>
+        <p:txBody>
+          <a:bodyPr rtlCol="0" anchor="ctr"/>
+          <a:lstStyle/>
+          <a:p>
+            <a:pPr algn="ctr"/>
+          </a:p>
+        </p:txBody>
+      </p:sp>
+      <p:sp>
+        <p:nvSpPr>
+          <p:cNvPr id="36" name="TextBox 35"/>
+          <p:cNvSpPr txBox="1"/>
+          <p:nvPr/>
+        </p:nvSpPr>
+        <p:spPr>
+          <a:xfrm>
+            <a:off x="6336792" y="5394960"/>
+            <a:ext cx="2359152" cy="740664"/>
+          </a:xfrm>
+          <a:prstGeom prst="rect">
+            <a:avLst/>
+          </a:prstGeom>
+          <a:noFill/>
+        </p:spPr>
+        <p:txBody>
+          <a:bodyPr wrap="square" anchor="t" lIns="0" rIns="0" tIns="0" bIns="0">
+            <a:spAutoFit/>
+          </a:bodyPr>
+          <a:lstStyle/>
+          <a:p>
+            <a:r>
+              <a:rPr sz="850" b="1" i="0" spc="140">
+                <a:solidFill>
                   <a:srgbClr val="006B6B"/>
                 </a:solidFill>
                 <a:latin typeface="Arial"/>
               </a:rPr>
-              <a:t>APR–JUN</a:t>
+              <a:t>APR-JUN</a:t>
             </a:r>
           </a:p>
           <a:p>
@@ -18642,7 +22345,7 @@
                 </a:solidFill>
                 <a:latin typeface="Arial"/>
               </a:rPr>
-              <a:t>AI Implementation Strategy  ·  Systems Engineering</a:t>
+              <a:t>AI Implementation Strategy  .  Systems Engineering</a:t>
             </a:r>
           </a:p>
         </p:txBody>
@@ -18817,7 +22520,7 @@
                 </a:solidFill>
                 <a:latin typeface="Arial"/>
               </a:rPr>
-              <a:t>  —  </a:t>
+              <a:t>  --  </a:t>
             </a:r>
             <a:r>
               <a:rPr sz="1200" b="0" i="0">
@@ -18966,7 +22669,7 @@
                 </a:solidFill>
                 <a:latin typeface="Arial"/>
               </a:rPr>
-              <a:t>  —  </a:t>
+              <a:t>  --  </a:t>
             </a:r>
             <a:r>
               <a:rPr sz="1200" b="0" i="0">
@@ -19115,7 +22818,7 @@
                 </a:solidFill>
                 <a:latin typeface="Arial"/>
               </a:rPr>
-              <a:t>  —  </a:t>
+              <a:t>  --  </a:t>
             </a:r>
             <a:r>
               <a:rPr sz="1200" b="0" i="0">
@@ -19264,7 +22967,7 @@
                 </a:solidFill>
                 <a:latin typeface="Arial"/>
               </a:rPr>
-              <a:t>  —  </a:t>
+              <a:t>  --  </a:t>
             </a:r>
             <a:r>
               <a:rPr sz="1200" b="0" i="0">
@@ -19490,7 +23193,7 @@
                 </a:solidFill>
                 <a:latin typeface="Arial"/>
               </a:rPr>
-              <a:t>AI Implementation Strategy  ·  Systems Engineering</a:t>
+              <a:t>AI Implementation Strategy  .  Systems Engineering</a:t>
             </a:r>
           </a:p>
         </p:txBody>
@@ -19665,7 +23368,7 @@
                 </a:solidFill>
                 <a:latin typeface="Arial"/>
               </a:rPr>
-              <a:t>  —  </a:t>
+              <a:t>  --  </a:t>
             </a:r>
             <a:r>
               <a:rPr sz="1200" b="0" i="0">
@@ -19674,7 +23377,7 @@
                 </a:solidFill>
                 <a:latin typeface="Arial"/>
               </a:rPr>
-              <a:t>AI systems engineering, product development, Gen AI engineering — I use them interchangeably, but “product development” is the industry's term.</a:t>
+              <a:t>AI systems engineering, product development, Gen AI engineering -- I use them interchangeably, but product development is the industry term.</a:t>
             </a:r>
           </a:p>
         </p:txBody>
@@ -19814,7 +23517,7 @@
                 </a:solidFill>
                 <a:latin typeface="Arial"/>
               </a:rPr>
-              <a:t>  —  </a:t>
+              <a:t>  --  </a:t>
             </a:r>
             <a:r>
               <a:rPr sz="1200" b="0" i="0">
@@ -19963,7 +23666,7 @@
                 </a:solidFill>
                 <a:latin typeface="Arial"/>
               </a:rPr>
-              <a:t>  —  </a:t>
+              <a:t>  --  </a:t>
             </a:r>
             <a:r>
               <a:rPr sz="1200" b="0" i="0">
@@ -20150,7 +23853,7 @@
                 </a:solidFill>
                 <a:latin typeface="Arial"/>
               </a:rPr>
-              <a:t>We are implementation and solution providers — not a bad position. Many start-ups and great firms win with that playbook.</a:t>
+              <a:t>We are implementation and solution providers -- not a bad position. Many start-ups and great firms win with that playbook.</a:t>
             </a:r>
           </a:p>
         </p:txBody>
@@ -20228,7 +23931,7 @@
                 </a:solidFill>
                 <a:latin typeface="Arial"/>
               </a:rPr>
-              <a:t>AI Implementation Strategy  ·  Systems Engineering</a:t>
+              <a:t>AI Implementation Strategy  .  Systems Engineering</a:t>
             </a:r>
           </a:p>
         </p:txBody>
@@ -20352,7 +24055,7 @@
                 </a:solidFill>
                 <a:latin typeface="Arial"/>
               </a:rPr>
-              <a:t>    Where we play  ·  implementation &amp; solution providers</a:t>
+              <a:t>    Where we play  .  implementation &amp; solution providers</a:t>
             </a:r>
           </a:p>
         </p:txBody>
@@ -20432,7 +24135,7 @@
                 </a:solidFill>
                 <a:latin typeface="Arial"/>
               </a:rPr>
-              <a:t>Models  ·  LMMs</a:t>
+              <a:t>Models  .  LMMs</a:t>
             </a:r>
             <a:r>
               <a:rPr sz="950" b="0" i="0">
@@ -20530,7 +24233,7 @@
                 </a:solidFill>
                 <a:latin typeface="Arial"/>
               </a:rPr>
-              <a:t>    Hyperscalers own and contract  ·  xAI, sovereign compute, demand guarantees, unlikely players (VW)</a:t>
+              <a:t>    Hyperscalers own and contract  .  xAI, sovereign compute, demand guarantees, unlikely players (VW)</a:t>
             </a:r>
           </a:p>
         </p:txBody>
@@ -20708,7 +24411,7 @@
                 </a:solidFill>
                 <a:latin typeface="Arial"/>
               </a:rPr>
-              <a:t>    Designers (NVIDIA)  ·  manufacturers (TSMC)  ·  machine makers (ASML)</a:t>
+              <a:t>    Designers (NVIDIA)  .  manufacturers (TSMC)  .  machine makers (ASML)</a:t>
             </a:r>
           </a:p>
         </p:txBody>
@@ -20869,7 +24572,7 @@
                 </a:solidFill>
                 <a:latin typeface="Arial"/>
               </a:rPr>
-              <a:t>Companies like Samsung cut across the entire value chain — design, manufacturing and devices.</a:t>
+              <a:t>Companies like Samsung cut across the entire value chain -- design, manufacturing and devices.</a:t>
             </a:r>
           </a:p>
         </p:txBody>
@@ -21030,7 +24733,7 @@
                 </a:solidFill>
                 <a:latin typeface="Arial"/>
               </a:rPr>
-              <a:t>Implementation and solution providers capture AI's near-zero build cost and hyper-customization — and own the customer relationship.</a:t>
+              <a:t>Implementation and solution providers capture near-zero build cost and hyper-customization -- and own the customer relationship.</a:t>
             </a:r>
           </a:p>
         </p:txBody>
@@ -21286,7 +24989,7 @@
                 </a:solidFill>
                 <a:latin typeface="Arial"/>
               </a:rPr>
-              <a:t>AI Implementation Strategy  ·  Systems Engineering</a:t>
+              <a:t>AI Implementation Strategy  .  Systems Engineering</a:t>
             </a:r>
           </a:p>
         </p:txBody>
@@ -21519,7 +25222,7 @@
                 </a:solidFill>
                 <a:latin typeface="Arial"/>
               </a:rPr>
-              <a:t>The largest single value driver — a bigger pie, so large vendors push for it</a:t>
+              <a:t>The largest single value driver -- a bigger pie, so large vendors push for it</a:t>
             </a:r>
           </a:p>
           <a:p>
@@ -21701,7 +25404,7 @@
                 </a:solidFill>
                 <a:latin typeface="Arial"/>
               </a:rPr>
-              <a:t>BOTTOM-UP BUILDING  ·  I ARGUE</a:t>
+              <a:t>BOTTOM-UP BUILDING  .  I ARGUE</a:t>
             </a:r>
           </a:p>
           <a:p>
@@ -21773,7 +25476,7 @@
                 </a:solidFill>
                 <a:latin typeface="Arial"/>
               </a:rPr>
-              <a:t>May or may not scale — but it will delight its users</a:t>
+              <a:t>May or may not scale -- but it will delight its users</a:t>
             </a:r>
           </a:p>
           <a:p>
@@ -22046,7 +25749,7 @@
                 </a:solidFill>
                 <a:latin typeface="Arial"/>
               </a:rPr>
-              <a:t>AI Implementation Strategy  ·  Systems Engineering</a:t>
+              <a:t>AI Implementation Strategy  .  Systems Engineering</a:t>
             </a:r>
           </a:p>
         </p:txBody>
@@ -22221,7 +25924,7 @@
                 </a:solidFill>
                 <a:latin typeface="Arial"/>
               </a:rPr>
-              <a:t>  —  </a:t>
+              <a:t>  --  </a:t>
             </a:r>
             <a:r>
               <a:rPr sz="1100" b="0" i="0">
@@ -22370,7 +26073,7 @@
                 </a:solidFill>
                 <a:latin typeface="Arial"/>
               </a:rPr>
-              <a:t>  —  </a:t>
+              <a:t>  --  </a:t>
             </a:r>
             <a:r>
               <a:rPr sz="1100" b="0" i="0">
@@ -22379,7 +26082,7 @@
                 </a:solidFill>
                 <a:latin typeface="Arial"/>
               </a:rPr>
-              <a:t>They hold the market and legacy switching costs. They can sit on it, or ship AI that improves the core — they will not disrupt themselves.</a:t>
+              <a:t>They hold the market and legacy switching costs. They can sit on it, or ship AI that improves the core -- they will not disrupt themselves.</a:t>
             </a:r>
           </a:p>
         </p:txBody>
@@ -22519,7 +26222,7 @@
                 </a:solidFill>
                 <a:latin typeface="Arial"/>
               </a:rPr>
-              <a:t>  —  </a:t>
+              <a:t>  --  </a:t>
             </a:r>
             <a:r>
               <a:rPr sz="1100" b="0" i="0">
@@ -22668,7 +26371,7 @@
                 </a:solidFill>
                 <a:latin typeface="Arial"/>
               </a:rPr>
-              <a:t>  —  </a:t>
+              <a:t>  --  </a:t>
             </a:r>
             <a:r>
               <a:rPr sz="1100" b="0" i="0">
@@ -22817,7 +26520,7 @@
                 </a:solidFill>
                 <a:latin typeface="Arial"/>
               </a:rPr>
-              <a:t>  —  </a:t>
+              <a:t>  --  </a:t>
             </a:r>
             <a:r>
               <a:rPr sz="1100" b="0" i="0">
@@ -22966,7 +26669,7 @@
                 </a:solidFill>
                 <a:latin typeface="Arial"/>
               </a:rPr>
-              <a:t>  —  </a:t>
+              <a:t>  --  </a:t>
             </a:r>
             <a:r>
               <a:rPr sz="1100" b="0" i="0">
